--- a/exports/pptx/lessons/middle-module-11-multiplication-near-base/day-07-why-it-works.pptx
+++ b/exports/pptx/lessons/middle-module-11-multiplication-near-base/day-07-why-it-works.pptx
@@ -15,9 +15,20 @@
     <p:sldId id="263" r:id="rId9"/>
     <p:sldId id="264" r:id="rId10"/>
     <p:sldId id="265" r:id="rId11"/>
+    <p:sldId id="266" r:id="rId12"/>
+    <p:sldId id="267" r:id="rId13"/>
+    <p:sldId id="268" r:id="rId14"/>
+    <p:sldId id="269" r:id="rId15"/>
+    <p:sldId id="270" r:id="rId16"/>
+    <p:sldId id="271" r:id="rId17"/>
+    <p:sldId id="272" r:id="rId18"/>
+    <p:sldId id="273" r:id="rId19"/>
+    <p:sldId id="274" r:id="rId20"/>
+    <p:sldId id="275" r:id="rId21"/>
+    <p:sldId id="276" r:id="rId22"/>
   </p:sldIdLst>
   <p:notesMasterIdLst>
-    <p:notesMasterId r:id="rId12"/>
+    <p:notesMasterId r:id="rId23"/>
   </p:notesMasterIdLst>
   <p:sldSz cx="9144000" cy="5143500"/>
   <p:notesSz cx="5143500" cy="9144000"/>
@@ -641,6 +652,798 @@
 </p:notes>
 </file>
 
+<file path=ppt/notesSlides/notesSlide11.xml><?xml version="1.0" encoding="utf-8"?>
+<p:notes xmlns:a="http://schemas.openxmlformats.org/drawingml/2006/main" xmlns:r="http://schemas.openxmlformats.org/officeDocument/2006/relationships" xmlns:p="http://schemas.openxmlformats.org/presentationml/2006/main">
+  <p:cSld>
+    <p:spTree>
+      <p:nvGrpSpPr>
+        <p:cNvPr id="1" name=""/>
+        <p:cNvGrpSpPr/>
+        <p:nvPr/>
+      </p:nvGrpSpPr>
+      <p:grpSpPr>
+        <a:xfrm>
+          <a:off x="0" y="0"/>
+          <a:ext cx="0" cy="0"/>
+          <a:chOff x="0" y="0"/>
+          <a:chExt cx="0" cy="0"/>
+        </a:xfrm>
+      </p:grpSpPr>
+      <p:sp>
+        <p:nvSpPr>
+          <p:cNvPr id="2" name="Slide Image Placeholder 1"/>
+          <p:cNvSpPr>
+            <a:spLocks noGrp="1" noRot="1" noChangeAspect="1"/>
+          </p:cNvSpPr>
+          <p:nvPr>
+            <p:ph type="sldImg"/>
+          </p:nvPr>
+        </p:nvSpPr>
+        <p:spPr/>
+      </p:sp>
+      <p:sp>
+        <p:nvSpPr>
+          <p:cNvPr id="3" name="Notes Placeholder 2"/>
+          <p:cNvSpPr>
+            <a:spLocks noGrp="1"/>
+          </p:cNvSpPr>
+          <p:nvPr>
+            <p:ph type="body" idx="1"/>
+          </p:nvPr>
+        </p:nvSpPr>
+        <p:spPr/>
+        <p:txBody>
+          <a:bodyPr/>
+          <a:lstStyle/>
+          <a:p>
+            <a:r>
+              <a:rPr lang="en-US" dirty="0"/>
+              <a:t/>
+            </a:r>
+            <a:endParaRPr lang="en-US" dirty="0"/>
+          </a:p>
+        </p:txBody>
+      </p:sp>
+      <p:sp>
+        <p:nvSpPr>
+          <p:cNvPr id="4" name="Slide Number Placeholder 3"/>
+          <p:cNvSpPr>
+            <a:spLocks noGrp="1"/>
+          </p:cNvSpPr>
+          <p:nvPr>
+            <p:ph type="sldNum" sz="quarter" idx="10"/>
+          </p:nvPr>
+        </p:nvSpPr>
+        <p:spPr/>
+        <p:txBody>
+          <a:bodyPr/>
+          <a:lstStyle/>
+          <a:p>
+            <a:fld id="{F7021451-1387-4CA6-816F-3879F97B5CBC}" type="slidenum">
+              <a:rPr lang="en-US"/>
+              <a:t>11</a:t>
+            </a:fld>
+            <a:endParaRPr lang="en-US"/>
+          </a:p>
+        </p:txBody>
+      </p:sp>
+    </p:spTree>
+    <p:extLst>
+      <p:ext uri="{BB962C8B-B14F-4D97-AF65-F5344CB8AC3E}">
+        <p14:creationId xmlns:p14="http://schemas.microsoft.com/office/powerpoint/2010/main" val="1024086991"/>
+      </p:ext>
+    </p:extLst>
+  </p:cSld>
+  <p:clrMapOvr>
+    <a:masterClrMapping/>
+  </p:clrMapOvr>
+</p:notes>
+</file>
+
+<file path=ppt/notesSlides/notesSlide12.xml><?xml version="1.0" encoding="utf-8"?>
+<p:notes xmlns:a="http://schemas.openxmlformats.org/drawingml/2006/main" xmlns:r="http://schemas.openxmlformats.org/officeDocument/2006/relationships" xmlns:p="http://schemas.openxmlformats.org/presentationml/2006/main">
+  <p:cSld>
+    <p:spTree>
+      <p:nvGrpSpPr>
+        <p:cNvPr id="1" name=""/>
+        <p:cNvGrpSpPr/>
+        <p:nvPr/>
+      </p:nvGrpSpPr>
+      <p:grpSpPr>
+        <a:xfrm>
+          <a:off x="0" y="0"/>
+          <a:ext cx="0" cy="0"/>
+          <a:chOff x="0" y="0"/>
+          <a:chExt cx="0" cy="0"/>
+        </a:xfrm>
+      </p:grpSpPr>
+      <p:sp>
+        <p:nvSpPr>
+          <p:cNvPr id="2" name="Slide Image Placeholder 1"/>
+          <p:cNvSpPr>
+            <a:spLocks noGrp="1" noRot="1" noChangeAspect="1"/>
+          </p:cNvSpPr>
+          <p:nvPr>
+            <p:ph type="sldImg"/>
+          </p:nvPr>
+        </p:nvSpPr>
+        <p:spPr/>
+      </p:sp>
+      <p:sp>
+        <p:nvSpPr>
+          <p:cNvPr id="3" name="Notes Placeholder 2"/>
+          <p:cNvSpPr>
+            <a:spLocks noGrp="1"/>
+          </p:cNvSpPr>
+          <p:nvPr>
+            <p:ph type="body" idx="1"/>
+          </p:nvPr>
+        </p:nvSpPr>
+        <p:spPr/>
+        <p:txBody>
+          <a:bodyPr/>
+          <a:lstStyle/>
+          <a:p>
+            <a:r>
+              <a:rPr lang="en-US" dirty="0"/>
+              <a:t/>
+            </a:r>
+            <a:endParaRPr lang="en-US" dirty="0"/>
+          </a:p>
+        </p:txBody>
+      </p:sp>
+      <p:sp>
+        <p:nvSpPr>
+          <p:cNvPr id="4" name="Slide Number Placeholder 3"/>
+          <p:cNvSpPr>
+            <a:spLocks noGrp="1"/>
+          </p:cNvSpPr>
+          <p:nvPr>
+            <p:ph type="sldNum" sz="quarter" idx="10"/>
+          </p:nvPr>
+        </p:nvSpPr>
+        <p:spPr/>
+        <p:txBody>
+          <a:bodyPr/>
+          <a:lstStyle/>
+          <a:p>
+            <a:fld id="{F7021451-1387-4CA6-816F-3879F97B5CBC}" type="slidenum">
+              <a:rPr lang="en-US"/>
+              <a:t>12</a:t>
+            </a:fld>
+            <a:endParaRPr lang="en-US"/>
+          </a:p>
+        </p:txBody>
+      </p:sp>
+    </p:spTree>
+    <p:extLst>
+      <p:ext uri="{BB962C8B-B14F-4D97-AF65-F5344CB8AC3E}">
+        <p14:creationId xmlns:p14="http://schemas.microsoft.com/office/powerpoint/2010/main" val="1024086991"/>
+      </p:ext>
+    </p:extLst>
+  </p:cSld>
+  <p:clrMapOvr>
+    <a:masterClrMapping/>
+  </p:clrMapOvr>
+</p:notes>
+</file>
+
+<file path=ppt/notesSlides/notesSlide13.xml><?xml version="1.0" encoding="utf-8"?>
+<p:notes xmlns:a="http://schemas.openxmlformats.org/drawingml/2006/main" xmlns:r="http://schemas.openxmlformats.org/officeDocument/2006/relationships" xmlns:p="http://schemas.openxmlformats.org/presentationml/2006/main">
+  <p:cSld>
+    <p:spTree>
+      <p:nvGrpSpPr>
+        <p:cNvPr id="1" name=""/>
+        <p:cNvGrpSpPr/>
+        <p:nvPr/>
+      </p:nvGrpSpPr>
+      <p:grpSpPr>
+        <a:xfrm>
+          <a:off x="0" y="0"/>
+          <a:ext cx="0" cy="0"/>
+          <a:chOff x="0" y="0"/>
+          <a:chExt cx="0" cy="0"/>
+        </a:xfrm>
+      </p:grpSpPr>
+      <p:sp>
+        <p:nvSpPr>
+          <p:cNvPr id="2" name="Slide Image Placeholder 1"/>
+          <p:cNvSpPr>
+            <a:spLocks noGrp="1" noRot="1" noChangeAspect="1"/>
+          </p:cNvSpPr>
+          <p:nvPr>
+            <p:ph type="sldImg"/>
+          </p:nvPr>
+        </p:nvSpPr>
+        <p:spPr/>
+      </p:sp>
+      <p:sp>
+        <p:nvSpPr>
+          <p:cNvPr id="3" name="Notes Placeholder 2"/>
+          <p:cNvSpPr>
+            <a:spLocks noGrp="1"/>
+          </p:cNvSpPr>
+          <p:nvPr>
+            <p:ph type="body" idx="1"/>
+          </p:nvPr>
+        </p:nvSpPr>
+        <p:spPr/>
+        <p:txBody>
+          <a:bodyPr/>
+          <a:lstStyle/>
+          <a:p>
+            <a:r>
+              <a:rPr lang="en-US" dirty="0"/>
+              <a:t/>
+            </a:r>
+            <a:endParaRPr lang="en-US" dirty="0"/>
+          </a:p>
+        </p:txBody>
+      </p:sp>
+      <p:sp>
+        <p:nvSpPr>
+          <p:cNvPr id="4" name="Slide Number Placeholder 3"/>
+          <p:cNvSpPr>
+            <a:spLocks noGrp="1"/>
+          </p:cNvSpPr>
+          <p:nvPr>
+            <p:ph type="sldNum" sz="quarter" idx="10"/>
+          </p:nvPr>
+        </p:nvSpPr>
+        <p:spPr/>
+        <p:txBody>
+          <a:bodyPr/>
+          <a:lstStyle/>
+          <a:p>
+            <a:fld id="{F7021451-1387-4CA6-816F-3879F97B5CBC}" type="slidenum">
+              <a:rPr lang="en-US"/>
+              <a:t>13</a:t>
+            </a:fld>
+            <a:endParaRPr lang="en-US"/>
+          </a:p>
+        </p:txBody>
+      </p:sp>
+    </p:spTree>
+    <p:extLst>
+      <p:ext uri="{BB962C8B-B14F-4D97-AF65-F5344CB8AC3E}">
+        <p14:creationId xmlns:p14="http://schemas.microsoft.com/office/powerpoint/2010/main" val="1024086991"/>
+      </p:ext>
+    </p:extLst>
+  </p:cSld>
+  <p:clrMapOvr>
+    <a:masterClrMapping/>
+  </p:clrMapOvr>
+</p:notes>
+</file>
+
+<file path=ppt/notesSlides/notesSlide14.xml><?xml version="1.0" encoding="utf-8"?>
+<p:notes xmlns:a="http://schemas.openxmlformats.org/drawingml/2006/main" xmlns:r="http://schemas.openxmlformats.org/officeDocument/2006/relationships" xmlns:p="http://schemas.openxmlformats.org/presentationml/2006/main">
+  <p:cSld>
+    <p:spTree>
+      <p:nvGrpSpPr>
+        <p:cNvPr id="1" name=""/>
+        <p:cNvGrpSpPr/>
+        <p:nvPr/>
+      </p:nvGrpSpPr>
+      <p:grpSpPr>
+        <a:xfrm>
+          <a:off x="0" y="0"/>
+          <a:ext cx="0" cy="0"/>
+          <a:chOff x="0" y="0"/>
+          <a:chExt cx="0" cy="0"/>
+        </a:xfrm>
+      </p:grpSpPr>
+      <p:sp>
+        <p:nvSpPr>
+          <p:cNvPr id="2" name="Slide Image Placeholder 1"/>
+          <p:cNvSpPr>
+            <a:spLocks noGrp="1" noRot="1" noChangeAspect="1"/>
+          </p:cNvSpPr>
+          <p:nvPr>
+            <p:ph type="sldImg"/>
+          </p:nvPr>
+        </p:nvSpPr>
+        <p:spPr/>
+      </p:sp>
+      <p:sp>
+        <p:nvSpPr>
+          <p:cNvPr id="3" name="Notes Placeholder 2"/>
+          <p:cNvSpPr>
+            <a:spLocks noGrp="1"/>
+          </p:cNvSpPr>
+          <p:nvPr>
+            <p:ph type="body" idx="1"/>
+          </p:nvPr>
+        </p:nvSpPr>
+        <p:spPr/>
+        <p:txBody>
+          <a:bodyPr/>
+          <a:lstStyle/>
+          <a:p>
+            <a:r>
+              <a:rPr lang="en-US" dirty="0"/>
+              <a:t/>
+            </a:r>
+            <a:endParaRPr lang="en-US" dirty="0"/>
+          </a:p>
+        </p:txBody>
+      </p:sp>
+      <p:sp>
+        <p:nvSpPr>
+          <p:cNvPr id="4" name="Slide Number Placeholder 3"/>
+          <p:cNvSpPr>
+            <a:spLocks noGrp="1"/>
+          </p:cNvSpPr>
+          <p:nvPr>
+            <p:ph type="sldNum" sz="quarter" idx="10"/>
+          </p:nvPr>
+        </p:nvSpPr>
+        <p:spPr/>
+        <p:txBody>
+          <a:bodyPr/>
+          <a:lstStyle/>
+          <a:p>
+            <a:fld id="{F7021451-1387-4CA6-816F-3879F97B5CBC}" type="slidenum">
+              <a:rPr lang="en-US"/>
+              <a:t>14</a:t>
+            </a:fld>
+            <a:endParaRPr lang="en-US"/>
+          </a:p>
+        </p:txBody>
+      </p:sp>
+    </p:spTree>
+    <p:extLst>
+      <p:ext uri="{BB962C8B-B14F-4D97-AF65-F5344CB8AC3E}">
+        <p14:creationId xmlns:p14="http://schemas.microsoft.com/office/powerpoint/2010/main" val="1024086991"/>
+      </p:ext>
+    </p:extLst>
+  </p:cSld>
+  <p:clrMapOvr>
+    <a:masterClrMapping/>
+  </p:clrMapOvr>
+</p:notes>
+</file>
+
+<file path=ppt/notesSlides/notesSlide15.xml><?xml version="1.0" encoding="utf-8"?>
+<p:notes xmlns:a="http://schemas.openxmlformats.org/drawingml/2006/main" xmlns:r="http://schemas.openxmlformats.org/officeDocument/2006/relationships" xmlns:p="http://schemas.openxmlformats.org/presentationml/2006/main">
+  <p:cSld>
+    <p:spTree>
+      <p:nvGrpSpPr>
+        <p:cNvPr id="1" name=""/>
+        <p:cNvGrpSpPr/>
+        <p:nvPr/>
+      </p:nvGrpSpPr>
+      <p:grpSpPr>
+        <a:xfrm>
+          <a:off x="0" y="0"/>
+          <a:ext cx="0" cy="0"/>
+          <a:chOff x="0" y="0"/>
+          <a:chExt cx="0" cy="0"/>
+        </a:xfrm>
+      </p:grpSpPr>
+      <p:sp>
+        <p:nvSpPr>
+          <p:cNvPr id="2" name="Slide Image Placeholder 1"/>
+          <p:cNvSpPr>
+            <a:spLocks noGrp="1" noRot="1" noChangeAspect="1"/>
+          </p:cNvSpPr>
+          <p:nvPr>
+            <p:ph type="sldImg"/>
+          </p:nvPr>
+        </p:nvSpPr>
+        <p:spPr/>
+      </p:sp>
+      <p:sp>
+        <p:nvSpPr>
+          <p:cNvPr id="3" name="Notes Placeholder 2"/>
+          <p:cNvSpPr>
+            <a:spLocks noGrp="1"/>
+          </p:cNvSpPr>
+          <p:nvPr>
+            <p:ph type="body" idx="1"/>
+          </p:nvPr>
+        </p:nvSpPr>
+        <p:spPr/>
+        <p:txBody>
+          <a:bodyPr/>
+          <a:lstStyle/>
+          <a:p>
+            <a:r>
+              <a:rPr lang="en-US" dirty="0"/>
+              <a:t/>
+            </a:r>
+            <a:endParaRPr lang="en-US" dirty="0"/>
+          </a:p>
+        </p:txBody>
+      </p:sp>
+      <p:sp>
+        <p:nvSpPr>
+          <p:cNvPr id="4" name="Slide Number Placeholder 3"/>
+          <p:cNvSpPr>
+            <a:spLocks noGrp="1"/>
+          </p:cNvSpPr>
+          <p:nvPr>
+            <p:ph type="sldNum" sz="quarter" idx="10"/>
+          </p:nvPr>
+        </p:nvSpPr>
+        <p:spPr/>
+        <p:txBody>
+          <a:bodyPr/>
+          <a:lstStyle/>
+          <a:p>
+            <a:fld id="{F7021451-1387-4CA6-816F-3879F97B5CBC}" type="slidenum">
+              <a:rPr lang="en-US"/>
+              <a:t>15</a:t>
+            </a:fld>
+            <a:endParaRPr lang="en-US"/>
+          </a:p>
+        </p:txBody>
+      </p:sp>
+    </p:spTree>
+    <p:extLst>
+      <p:ext uri="{BB962C8B-B14F-4D97-AF65-F5344CB8AC3E}">
+        <p14:creationId xmlns:p14="http://schemas.microsoft.com/office/powerpoint/2010/main" val="1024086991"/>
+      </p:ext>
+    </p:extLst>
+  </p:cSld>
+  <p:clrMapOvr>
+    <a:masterClrMapping/>
+  </p:clrMapOvr>
+</p:notes>
+</file>
+
+<file path=ppt/notesSlides/notesSlide16.xml><?xml version="1.0" encoding="utf-8"?>
+<p:notes xmlns:a="http://schemas.openxmlformats.org/drawingml/2006/main" xmlns:r="http://schemas.openxmlformats.org/officeDocument/2006/relationships" xmlns:p="http://schemas.openxmlformats.org/presentationml/2006/main">
+  <p:cSld>
+    <p:spTree>
+      <p:nvGrpSpPr>
+        <p:cNvPr id="1" name=""/>
+        <p:cNvGrpSpPr/>
+        <p:nvPr/>
+      </p:nvGrpSpPr>
+      <p:grpSpPr>
+        <a:xfrm>
+          <a:off x="0" y="0"/>
+          <a:ext cx="0" cy="0"/>
+          <a:chOff x="0" y="0"/>
+          <a:chExt cx="0" cy="0"/>
+        </a:xfrm>
+      </p:grpSpPr>
+      <p:sp>
+        <p:nvSpPr>
+          <p:cNvPr id="2" name="Slide Image Placeholder 1"/>
+          <p:cNvSpPr>
+            <a:spLocks noGrp="1" noRot="1" noChangeAspect="1"/>
+          </p:cNvSpPr>
+          <p:nvPr>
+            <p:ph type="sldImg"/>
+          </p:nvPr>
+        </p:nvSpPr>
+        <p:spPr/>
+      </p:sp>
+      <p:sp>
+        <p:nvSpPr>
+          <p:cNvPr id="3" name="Notes Placeholder 2"/>
+          <p:cNvSpPr>
+            <a:spLocks noGrp="1"/>
+          </p:cNvSpPr>
+          <p:nvPr>
+            <p:ph type="body" idx="1"/>
+          </p:nvPr>
+        </p:nvSpPr>
+        <p:spPr/>
+        <p:txBody>
+          <a:bodyPr/>
+          <a:lstStyle/>
+          <a:p>
+            <a:r>
+              <a:rPr lang="en-US" dirty="0"/>
+              <a:t/>
+            </a:r>
+            <a:endParaRPr lang="en-US" dirty="0"/>
+          </a:p>
+        </p:txBody>
+      </p:sp>
+      <p:sp>
+        <p:nvSpPr>
+          <p:cNvPr id="4" name="Slide Number Placeholder 3"/>
+          <p:cNvSpPr>
+            <a:spLocks noGrp="1"/>
+          </p:cNvSpPr>
+          <p:nvPr>
+            <p:ph type="sldNum" sz="quarter" idx="10"/>
+          </p:nvPr>
+        </p:nvSpPr>
+        <p:spPr/>
+        <p:txBody>
+          <a:bodyPr/>
+          <a:lstStyle/>
+          <a:p>
+            <a:fld id="{F7021451-1387-4CA6-816F-3879F97B5CBC}" type="slidenum">
+              <a:rPr lang="en-US"/>
+              <a:t>16</a:t>
+            </a:fld>
+            <a:endParaRPr lang="en-US"/>
+          </a:p>
+        </p:txBody>
+      </p:sp>
+    </p:spTree>
+    <p:extLst>
+      <p:ext uri="{BB962C8B-B14F-4D97-AF65-F5344CB8AC3E}">
+        <p14:creationId xmlns:p14="http://schemas.microsoft.com/office/powerpoint/2010/main" val="1024086991"/>
+      </p:ext>
+    </p:extLst>
+  </p:cSld>
+  <p:clrMapOvr>
+    <a:masterClrMapping/>
+  </p:clrMapOvr>
+</p:notes>
+</file>
+
+<file path=ppt/notesSlides/notesSlide17.xml><?xml version="1.0" encoding="utf-8"?>
+<p:notes xmlns:a="http://schemas.openxmlformats.org/drawingml/2006/main" xmlns:r="http://schemas.openxmlformats.org/officeDocument/2006/relationships" xmlns:p="http://schemas.openxmlformats.org/presentationml/2006/main">
+  <p:cSld>
+    <p:spTree>
+      <p:nvGrpSpPr>
+        <p:cNvPr id="1" name=""/>
+        <p:cNvGrpSpPr/>
+        <p:nvPr/>
+      </p:nvGrpSpPr>
+      <p:grpSpPr>
+        <a:xfrm>
+          <a:off x="0" y="0"/>
+          <a:ext cx="0" cy="0"/>
+          <a:chOff x="0" y="0"/>
+          <a:chExt cx="0" cy="0"/>
+        </a:xfrm>
+      </p:grpSpPr>
+      <p:sp>
+        <p:nvSpPr>
+          <p:cNvPr id="2" name="Slide Image Placeholder 1"/>
+          <p:cNvSpPr>
+            <a:spLocks noGrp="1" noRot="1" noChangeAspect="1"/>
+          </p:cNvSpPr>
+          <p:nvPr>
+            <p:ph type="sldImg"/>
+          </p:nvPr>
+        </p:nvSpPr>
+        <p:spPr/>
+      </p:sp>
+      <p:sp>
+        <p:nvSpPr>
+          <p:cNvPr id="3" name="Notes Placeholder 2"/>
+          <p:cNvSpPr>
+            <a:spLocks noGrp="1"/>
+          </p:cNvSpPr>
+          <p:nvPr>
+            <p:ph type="body" idx="1"/>
+          </p:nvPr>
+        </p:nvSpPr>
+        <p:spPr/>
+        <p:txBody>
+          <a:bodyPr/>
+          <a:lstStyle/>
+          <a:p>
+            <a:r>
+              <a:rPr lang="en-US" dirty="0"/>
+              <a:t/>
+            </a:r>
+            <a:endParaRPr lang="en-US" dirty="0"/>
+          </a:p>
+        </p:txBody>
+      </p:sp>
+      <p:sp>
+        <p:nvSpPr>
+          <p:cNvPr id="4" name="Slide Number Placeholder 3"/>
+          <p:cNvSpPr>
+            <a:spLocks noGrp="1"/>
+          </p:cNvSpPr>
+          <p:nvPr>
+            <p:ph type="sldNum" sz="quarter" idx="10"/>
+          </p:nvPr>
+        </p:nvSpPr>
+        <p:spPr/>
+        <p:txBody>
+          <a:bodyPr/>
+          <a:lstStyle/>
+          <a:p>
+            <a:fld id="{F7021451-1387-4CA6-816F-3879F97B5CBC}" type="slidenum">
+              <a:rPr lang="en-US"/>
+              <a:t>17</a:t>
+            </a:fld>
+            <a:endParaRPr lang="en-US"/>
+          </a:p>
+        </p:txBody>
+      </p:sp>
+    </p:spTree>
+    <p:extLst>
+      <p:ext uri="{BB962C8B-B14F-4D97-AF65-F5344CB8AC3E}">
+        <p14:creationId xmlns:p14="http://schemas.microsoft.com/office/powerpoint/2010/main" val="1024086991"/>
+      </p:ext>
+    </p:extLst>
+  </p:cSld>
+  <p:clrMapOvr>
+    <a:masterClrMapping/>
+  </p:clrMapOvr>
+</p:notes>
+</file>
+
+<file path=ppt/notesSlides/notesSlide18.xml><?xml version="1.0" encoding="utf-8"?>
+<p:notes xmlns:a="http://schemas.openxmlformats.org/drawingml/2006/main" xmlns:r="http://schemas.openxmlformats.org/officeDocument/2006/relationships" xmlns:p="http://schemas.openxmlformats.org/presentationml/2006/main">
+  <p:cSld>
+    <p:spTree>
+      <p:nvGrpSpPr>
+        <p:cNvPr id="1" name=""/>
+        <p:cNvGrpSpPr/>
+        <p:nvPr/>
+      </p:nvGrpSpPr>
+      <p:grpSpPr>
+        <a:xfrm>
+          <a:off x="0" y="0"/>
+          <a:ext cx="0" cy="0"/>
+          <a:chOff x="0" y="0"/>
+          <a:chExt cx="0" cy="0"/>
+        </a:xfrm>
+      </p:grpSpPr>
+      <p:sp>
+        <p:nvSpPr>
+          <p:cNvPr id="2" name="Slide Image Placeholder 1"/>
+          <p:cNvSpPr>
+            <a:spLocks noGrp="1" noRot="1" noChangeAspect="1"/>
+          </p:cNvSpPr>
+          <p:nvPr>
+            <p:ph type="sldImg"/>
+          </p:nvPr>
+        </p:nvSpPr>
+        <p:spPr/>
+      </p:sp>
+      <p:sp>
+        <p:nvSpPr>
+          <p:cNvPr id="3" name="Notes Placeholder 2"/>
+          <p:cNvSpPr>
+            <a:spLocks noGrp="1"/>
+          </p:cNvSpPr>
+          <p:nvPr>
+            <p:ph type="body" idx="1"/>
+          </p:nvPr>
+        </p:nvSpPr>
+        <p:spPr/>
+        <p:txBody>
+          <a:bodyPr/>
+          <a:lstStyle/>
+          <a:p>
+            <a:r>
+              <a:rPr lang="en-US" dirty="0"/>
+              <a:t/>
+            </a:r>
+            <a:endParaRPr lang="en-US" dirty="0"/>
+          </a:p>
+        </p:txBody>
+      </p:sp>
+      <p:sp>
+        <p:nvSpPr>
+          <p:cNvPr id="4" name="Slide Number Placeholder 3"/>
+          <p:cNvSpPr>
+            <a:spLocks noGrp="1"/>
+          </p:cNvSpPr>
+          <p:nvPr>
+            <p:ph type="sldNum" sz="quarter" idx="10"/>
+          </p:nvPr>
+        </p:nvSpPr>
+        <p:spPr/>
+        <p:txBody>
+          <a:bodyPr/>
+          <a:lstStyle/>
+          <a:p>
+            <a:fld id="{F7021451-1387-4CA6-816F-3879F97B5CBC}" type="slidenum">
+              <a:rPr lang="en-US"/>
+              <a:t>18</a:t>
+            </a:fld>
+            <a:endParaRPr lang="en-US"/>
+          </a:p>
+        </p:txBody>
+      </p:sp>
+    </p:spTree>
+    <p:extLst>
+      <p:ext uri="{BB962C8B-B14F-4D97-AF65-F5344CB8AC3E}">
+        <p14:creationId xmlns:p14="http://schemas.microsoft.com/office/powerpoint/2010/main" val="1024086991"/>
+      </p:ext>
+    </p:extLst>
+  </p:cSld>
+  <p:clrMapOvr>
+    <a:masterClrMapping/>
+  </p:clrMapOvr>
+</p:notes>
+</file>
+
+<file path=ppt/notesSlides/notesSlide19.xml><?xml version="1.0" encoding="utf-8"?>
+<p:notes xmlns:a="http://schemas.openxmlformats.org/drawingml/2006/main" xmlns:r="http://schemas.openxmlformats.org/officeDocument/2006/relationships" xmlns:p="http://schemas.openxmlformats.org/presentationml/2006/main">
+  <p:cSld>
+    <p:spTree>
+      <p:nvGrpSpPr>
+        <p:cNvPr id="1" name=""/>
+        <p:cNvGrpSpPr/>
+        <p:nvPr/>
+      </p:nvGrpSpPr>
+      <p:grpSpPr>
+        <a:xfrm>
+          <a:off x="0" y="0"/>
+          <a:ext cx="0" cy="0"/>
+          <a:chOff x="0" y="0"/>
+          <a:chExt cx="0" cy="0"/>
+        </a:xfrm>
+      </p:grpSpPr>
+      <p:sp>
+        <p:nvSpPr>
+          <p:cNvPr id="2" name="Slide Image Placeholder 1"/>
+          <p:cNvSpPr>
+            <a:spLocks noGrp="1" noRot="1" noChangeAspect="1"/>
+          </p:cNvSpPr>
+          <p:nvPr>
+            <p:ph type="sldImg"/>
+          </p:nvPr>
+        </p:nvSpPr>
+        <p:spPr/>
+      </p:sp>
+      <p:sp>
+        <p:nvSpPr>
+          <p:cNvPr id="3" name="Notes Placeholder 2"/>
+          <p:cNvSpPr>
+            <a:spLocks noGrp="1"/>
+          </p:cNvSpPr>
+          <p:nvPr>
+            <p:ph type="body" idx="1"/>
+          </p:nvPr>
+        </p:nvSpPr>
+        <p:spPr/>
+        <p:txBody>
+          <a:bodyPr/>
+          <a:lstStyle/>
+          <a:p>
+            <a:r>
+              <a:rPr lang="en-US" dirty="0"/>
+              <a:t/>
+            </a:r>
+            <a:endParaRPr lang="en-US" dirty="0"/>
+          </a:p>
+        </p:txBody>
+      </p:sp>
+      <p:sp>
+        <p:nvSpPr>
+          <p:cNvPr id="4" name="Slide Number Placeholder 3"/>
+          <p:cNvSpPr>
+            <a:spLocks noGrp="1"/>
+          </p:cNvSpPr>
+          <p:nvPr>
+            <p:ph type="sldNum" sz="quarter" idx="10"/>
+          </p:nvPr>
+        </p:nvSpPr>
+        <p:spPr/>
+        <p:txBody>
+          <a:bodyPr/>
+          <a:lstStyle/>
+          <a:p>
+            <a:fld id="{F7021451-1387-4CA6-816F-3879F97B5CBC}" type="slidenum">
+              <a:rPr lang="en-US"/>
+              <a:t>19</a:t>
+            </a:fld>
+            <a:endParaRPr lang="en-US"/>
+          </a:p>
+        </p:txBody>
+      </p:sp>
+    </p:spTree>
+    <p:extLst>
+      <p:ext uri="{BB962C8B-B14F-4D97-AF65-F5344CB8AC3E}">
+        <p14:creationId xmlns:p14="http://schemas.microsoft.com/office/powerpoint/2010/main" val="1024086991"/>
+      </p:ext>
+    </p:extLst>
+  </p:cSld>
+  <p:clrMapOvr>
+    <a:masterClrMapping/>
+  </p:clrMapOvr>
+</p:notes>
+</file>
+
 <file path=ppt/notesSlides/notesSlide2.xml><?xml version="1.0" encoding="utf-8"?>
 <p:notes xmlns:a="http://schemas.openxmlformats.org/drawingml/2006/main" xmlns:r="http://schemas.openxmlformats.org/officeDocument/2006/relationships" xmlns:p="http://schemas.openxmlformats.org/presentationml/2006/main">
   <p:cSld>
@@ -711,6 +1514,182 @@
             <a:fld id="{F7021451-1387-4CA6-816F-3879F97B5CBC}" type="slidenum">
               <a:rPr lang="en-US"/>
               <a:t>2</a:t>
+            </a:fld>
+            <a:endParaRPr lang="en-US"/>
+          </a:p>
+        </p:txBody>
+      </p:sp>
+    </p:spTree>
+    <p:extLst>
+      <p:ext uri="{BB962C8B-B14F-4D97-AF65-F5344CB8AC3E}">
+        <p14:creationId xmlns:p14="http://schemas.microsoft.com/office/powerpoint/2010/main" val="1024086991"/>
+      </p:ext>
+    </p:extLst>
+  </p:cSld>
+  <p:clrMapOvr>
+    <a:masterClrMapping/>
+  </p:clrMapOvr>
+</p:notes>
+</file>
+
+<file path=ppt/notesSlides/notesSlide20.xml><?xml version="1.0" encoding="utf-8"?>
+<p:notes xmlns:a="http://schemas.openxmlformats.org/drawingml/2006/main" xmlns:r="http://schemas.openxmlformats.org/officeDocument/2006/relationships" xmlns:p="http://schemas.openxmlformats.org/presentationml/2006/main">
+  <p:cSld>
+    <p:spTree>
+      <p:nvGrpSpPr>
+        <p:cNvPr id="1" name=""/>
+        <p:cNvGrpSpPr/>
+        <p:nvPr/>
+      </p:nvGrpSpPr>
+      <p:grpSpPr>
+        <a:xfrm>
+          <a:off x="0" y="0"/>
+          <a:ext cx="0" cy="0"/>
+          <a:chOff x="0" y="0"/>
+          <a:chExt cx="0" cy="0"/>
+        </a:xfrm>
+      </p:grpSpPr>
+      <p:sp>
+        <p:nvSpPr>
+          <p:cNvPr id="2" name="Slide Image Placeholder 1"/>
+          <p:cNvSpPr>
+            <a:spLocks noGrp="1" noRot="1" noChangeAspect="1"/>
+          </p:cNvSpPr>
+          <p:nvPr>
+            <p:ph type="sldImg"/>
+          </p:nvPr>
+        </p:nvSpPr>
+        <p:spPr/>
+      </p:sp>
+      <p:sp>
+        <p:nvSpPr>
+          <p:cNvPr id="3" name="Notes Placeholder 2"/>
+          <p:cNvSpPr>
+            <a:spLocks noGrp="1"/>
+          </p:cNvSpPr>
+          <p:nvPr>
+            <p:ph type="body" idx="1"/>
+          </p:nvPr>
+        </p:nvSpPr>
+        <p:spPr/>
+        <p:txBody>
+          <a:bodyPr/>
+          <a:lstStyle/>
+          <a:p>
+            <a:r>
+              <a:rPr lang="en-US" dirty="0"/>
+              <a:t/>
+            </a:r>
+            <a:endParaRPr lang="en-US" dirty="0"/>
+          </a:p>
+        </p:txBody>
+      </p:sp>
+      <p:sp>
+        <p:nvSpPr>
+          <p:cNvPr id="4" name="Slide Number Placeholder 3"/>
+          <p:cNvSpPr>
+            <a:spLocks noGrp="1"/>
+          </p:cNvSpPr>
+          <p:nvPr>
+            <p:ph type="sldNum" sz="quarter" idx="10"/>
+          </p:nvPr>
+        </p:nvSpPr>
+        <p:spPr/>
+        <p:txBody>
+          <a:bodyPr/>
+          <a:lstStyle/>
+          <a:p>
+            <a:fld id="{F7021451-1387-4CA6-816F-3879F97B5CBC}" type="slidenum">
+              <a:rPr lang="en-US"/>
+              <a:t>20</a:t>
+            </a:fld>
+            <a:endParaRPr lang="en-US"/>
+          </a:p>
+        </p:txBody>
+      </p:sp>
+    </p:spTree>
+    <p:extLst>
+      <p:ext uri="{BB962C8B-B14F-4D97-AF65-F5344CB8AC3E}">
+        <p14:creationId xmlns:p14="http://schemas.microsoft.com/office/powerpoint/2010/main" val="1024086991"/>
+      </p:ext>
+    </p:extLst>
+  </p:cSld>
+  <p:clrMapOvr>
+    <a:masterClrMapping/>
+  </p:clrMapOvr>
+</p:notes>
+</file>
+
+<file path=ppt/notesSlides/notesSlide21.xml><?xml version="1.0" encoding="utf-8"?>
+<p:notes xmlns:a="http://schemas.openxmlformats.org/drawingml/2006/main" xmlns:r="http://schemas.openxmlformats.org/officeDocument/2006/relationships" xmlns:p="http://schemas.openxmlformats.org/presentationml/2006/main">
+  <p:cSld>
+    <p:spTree>
+      <p:nvGrpSpPr>
+        <p:cNvPr id="1" name=""/>
+        <p:cNvGrpSpPr/>
+        <p:nvPr/>
+      </p:nvGrpSpPr>
+      <p:grpSpPr>
+        <a:xfrm>
+          <a:off x="0" y="0"/>
+          <a:ext cx="0" cy="0"/>
+          <a:chOff x="0" y="0"/>
+          <a:chExt cx="0" cy="0"/>
+        </a:xfrm>
+      </p:grpSpPr>
+      <p:sp>
+        <p:nvSpPr>
+          <p:cNvPr id="2" name="Slide Image Placeholder 1"/>
+          <p:cNvSpPr>
+            <a:spLocks noGrp="1" noRot="1" noChangeAspect="1"/>
+          </p:cNvSpPr>
+          <p:nvPr>
+            <p:ph type="sldImg"/>
+          </p:nvPr>
+        </p:nvSpPr>
+        <p:spPr/>
+      </p:sp>
+      <p:sp>
+        <p:nvSpPr>
+          <p:cNvPr id="3" name="Notes Placeholder 2"/>
+          <p:cNvSpPr>
+            <a:spLocks noGrp="1"/>
+          </p:cNvSpPr>
+          <p:nvPr>
+            <p:ph type="body" idx="1"/>
+          </p:nvPr>
+        </p:nvSpPr>
+        <p:spPr/>
+        <p:txBody>
+          <a:bodyPr/>
+          <a:lstStyle/>
+          <a:p>
+            <a:r>
+              <a:rPr lang="en-US" dirty="0"/>
+              <a:t/>
+            </a:r>
+            <a:endParaRPr lang="en-US" dirty="0"/>
+          </a:p>
+        </p:txBody>
+      </p:sp>
+      <p:sp>
+        <p:nvSpPr>
+          <p:cNvPr id="4" name="Slide Number Placeholder 3"/>
+          <p:cNvSpPr>
+            <a:spLocks noGrp="1"/>
+          </p:cNvSpPr>
+          <p:nvPr>
+            <p:ph type="sldNum" sz="quarter" idx="10"/>
+          </p:nvPr>
+        </p:nvSpPr>
+        <p:spPr/>
+        <p:txBody>
+          <a:bodyPr/>
+          <a:lstStyle/>
+          <a:p>
+            <a:fld id="{F7021451-1387-4CA6-816F-3879F97B5CBC}" type="slidenum">
+              <a:rPr lang="en-US"/>
+              <a:t>21</a:t>
             </a:fld>
             <a:endParaRPr lang="en-US"/>
           </a:p>
@@ -1922,148 +2901,6 @@
         </p:nvSpPr>
         <p:spPr>
           <a:xfrm>
-            <a:off x="406301" y="1223963"/>
-            <a:ext cx="8498026" cy="274290"/>
-          </a:xfrm>
-          <a:prstGeom prst="rect">
-            <a:avLst/>
-          </a:prstGeom>
-          <a:noFill/>
-          <a:ln/>
-        </p:spPr>
-        <p:txBody>
-          <a:bodyPr wrap="square" lIns="0" tIns="0" rIns="0" bIns="0" rtlCol="0" anchor="t"/>
-          <a:lstStyle/>
-          <a:p>
-            <a:pPr algn="l" indent="0" marL="0">
-              <a:lnSpc>
-                <a:spcPts val="2160"/>
-              </a:lnSpc>
-              <a:spcBef>
-                <a:spcPts val="600"/>
-              </a:spcBef>
-              <a:spcAft>
-                <a:spcPts val="800"/>
-              </a:spcAft>
-              <a:buNone/>
-            </a:pPr>
-            <a:r>
-              <a:rPr lang="en-US" sz="1800" b="1" dirty="0">
-                <a:solidFill>
-                  <a:srgbClr val="FE4447"/>
-                </a:solidFill>
-                <a:latin typeface="Georgia" pitchFamily="34" charset="0"/>
-                <a:ea typeface="Georgia" pitchFamily="34" charset="-122"/>
-                <a:cs typeface="Georgia" pitchFamily="34" charset="-120"/>
-              </a:rPr>
-              <a:t>Learning objective</a:t>
-            </a:r>
-            <a:endParaRPr lang="en-US" sz="1800" dirty="0"/>
-          </a:p>
-        </p:txBody>
-      </p:sp>
-      <p:sp>
-        <p:nvSpPr>
-          <p:cNvPr id="6" name="Text 4"/>
-          <p:cNvSpPr/>
-          <p:nvPr/>
-        </p:nvSpPr>
-        <p:spPr>
-          <a:xfrm>
-            <a:off x="406301" y="1637854"/>
-            <a:ext cx="8498026" cy="445591"/>
-          </a:xfrm>
-          <a:prstGeom prst="rect">
-            <a:avLst/>
-          </a:prstGeom>
-          <a:noFill/>
-          <a:ln/>
-        </p:spPr>
-        <p:txBody>
-          <a:bodyPr wrap="square" lIns="0" tIns="0" rIns="0" bIns="0" rtlCol="0" anchor="t"/>
-          <a:lstStyle/>
-          <a:p>
-            <a:pPr algn="l" indent="0" marL="0">
-              <a:lnSpc>
-                <a:spcPts val="1680"/>
-              </a:lnSpc>
-              <a:spcBef>
-                <a:spcPts val="300"/>
-              </a:spcBef>
-              <a:spcAft>
-                <a:spcPts val="300"/>
-              </a:spcAft>
-              <a:buNone/>
-            </a:pPr>
-            <a:r>
-              <a:rPr lang="en-US" sz="1200" dirty="0">
-                <a:solidFill>
-                  <a:srgbClr val="1C2833"/>
-                </a:solidFill>
-                <a:latin typeface="Arial" pitchFamily="34" charset="0"/>
-                <a:ea typeface="Arial" pitchFamily="34" charset="-122"/>
-                <a:cs typeface="Arial" pitchFamily="34" charset="-120"/>
-              </a:rPr>
-              <a:t>By the end of this lesson, students will state the algebraic identity behind the Nikhilam method </a:t>
-            </a:r>
-            <a:pPr algn="l" indent="0" marL="0">
-              <a:lnSpc>
-                <a:spcPts val="1680"/>
-              </a:lnSpc>
-              <a:spcBef>
-                <a:spcPts val="300"/>
-              </a:spcBef>
-              <a:spcAft>
-                <a:spcPts val="300"/>
-              </a:spcAft>
-              <a:buNone/>
-            </a:pPr>
-            <a:r>
-              <a:rPr lang="en-US" sz="1200" dirty="0">
-                <a:solidFill>
-                  <a:srgbClr val="1C2833"/>
-                </a:solidFill>
-                <a:latin typeface="Arial" pitchFamily="34" charset="0"/>
-                <a:ea typeface="Arial" pitchFamily="34" charset="-122"/>
-                <a:cs typeface="Arial" pitchFamily="34" charset="-120"/>
-              </a:rPr>
-              <a:t>(B − a)(B − b) = B(B − a − b) + ab</a:t>
-            </a:r>
-            <a:pPr algn="l" indent="0" marL="0">
-              <a:lnSpc>
-                <a:spcPts val="1680"/>
-              </a:lnSpc>
-              <a:spcBef>
-                <a:spcPts val="300"/>
-              </a:spcBef>
-              <a:spcAft>
-                <a:spcPts val="300"/>
-              </a:spcAft>
-              <a:buNone/>
-            </a:pPr>
-            <a:r>
-              <a:rPr lang="en-US" sz="1200" dirty="0">
-                <a:solidFill>
-                  <a:srgbClr val="1C2833"/>
-                </a:solidFill>
-                <a:latin typeface="Arial" pitchFamily="34" charset="0"/>
-                <a:ea typeface="Arial" pitchFamily="34" charset="-122"/>
-                <a:cs typeface="Arial" pitchFamily="34" charset="-120"/>
-              </a:rPr>
-              <a:t>, derive it on paper, and explain in their own words why this matches the procedure.</a:t>
-            </a:r>
-            <a:endParaRPr lang="en-US" sz="1200" dirty="0"/>
-          </a:p>
-        </p:txBody>
-      </p:sp>
-      <p:sp>
-        <p:nvSpPr>
-          <p:cNvPr id="7" name="Text 5"/>
-          <p:cNvSpPr/>
-          <p:nvPr/>
-        </p:nvSpPr>
-        <p:spPr>
-          <a:xfrm>
             <a:off x="406301" y="4434929"/>
             <a:ext cx="8498026" cy="213271"/>
           </a:xfrm>
@@ -2208,7 +3045,7 @@
                 <a:ea typeface="Georgia" pitchFamily="34" charset="-122"/>
                 <a:cs typeface="Georgia" pitchFamily="34" charset="-120"/>
               </a:rPr>
-              <a:t>Citation(s) used in this lesson</a:t>
+              <a:t>Core (20 min) — The algebraic proof (cont.)</a:t>
             </a:r>
             <a:endParaRPr lang="en-US" sz="1800" dirty="0"/>
           </a:p>
@@ -2223,7 +3060,7 @@
         <p:spPr>
           <a:xfrm>
             <a:off x="634901" y="883593"/>
-            <a:ext cx="8102798" cy="731341"/>
+            <a:ext cx="8102798" cy="281880"/>
           </a:xfrm>
           <a:prstGeom prst="rect">
             <a:avLst/>
@@ -2246,38 +3083,40 @@
               <a:buChar char="•"/>
             </a:pPr>
             <a:r>
-              <a:rPr lang="en-US" sz="1200" i="1" dirty="0">
-                <a:solidFill>
-                  <a:srgbClr val="1C2833"/>
-                </a:solidFill>
-                <a:latin typeface="Arial" pitchFamily="34" charset="0"/>
-                <a:ea typeface="Arial" pitchFamily="34" charset="-122"/>
-                <a:cs typeface="Arial" pitchFamily="34" charset="-120"/>
-              </a:rPr>
-              <a:t>Vedic Mathematics Batch1.pdf</a:t>
-            </a:r>
-            <a:pPr algn="l" indent="0" marL="0">
-              <a:lnSpc>
-                <a:spcPts val="1620"/>
-              </a:lnSpc>
-              <a:spcAft>
-                <a:spcPts val="300"/>
-              </a:spcAft>
-              <a:buNone/>
-            </a:pPr>
-            <a:r>
-              <a:rPr lang="en-US" sz="1200" dirty="0">
-                <a:solidFill>
-                  <a:srgbClr val="1C2833"/>
-                </a:solidFill>
-                <a:latin typeface="Arial" pitchFamily="34" charset="0"/>
-                <a:ea typeface="Arial" pitchFamily="34" charset="-122"/>
-                <a:cs typeface="Arial" pitchFamily="34" charset="-120"/>
-              </a:rPr>
-              <a:t> (Vedic Cultural Center, Sammamish WA) — Nikhilam multiplication, "why it works" section.</a:t>
+              <a:rPr lang="en-US" sz="1200" b="1" dirty="0">
+                <a:solidFill>
+                  <a:srgbClr val="1C2833"/>
+                </a:solidFill>
+                <a:latin typeface="Arial" pitchFamily="34" charset="0"/>
+                <a:ea typeface="Arial" pitchFamily="34" charset="-122"/>
+                <a:cs typeface="Arial" pitchFamily="34" charset="-120"/>
+              </a:rPr>
+              <a:t>Why concatenation works.</a:t>
             </a:r>
             <a:endParaRPr lang="en-US" sz="1200" dirty="0"/>
           </a:p>
+        </p:txBody>
+      </p:sp>
+      <p:sp>
+        <p:nvSpPr>
+          <p:cNvPr id="5" name="Text 3"/>
+          <p:cNvSpPr/>
+          <p:nvPr/>
+        </p:nvSpPr>
+        <p:spPr>
+          <a:xfrm>
+            <a:off x="634901" y="1266974"/>
+            <a:ext cx="8102798" cy="1013222"/>
+          </a:xfrm>
+          <a:prstGeom prst="rect">
+            <a:avLst/>
+          </a:prstGeom>
+          <a:noFill/>
+          <a:ln/>
+        </p:spPr>
+        <p:txBody>
+          <a:bodyPr wrap="square" lIns="0" tIns="0" rIns="0" bIns="0" rtlCol="0" anchor="t"/>
+          <a:lstStyle/>
           <a:p>
             <a:pPr algn="l" marL="342900" indent="-342900">
               <a:lnSpc>
@@ -2290,15 +3129,15 @@
               <a:buChar char="•"/>
             </a:pPr>
             <a:r>
-              <a:rPr lang="en-US" sz="1200" i="1" dirty="0">
-                <a:solidFill>
-                  <a:srgbClr val="1C2833"/>
-                </a:solidFill>
-                <a:latin typeface="Arial" pitchFamily="34" charset="0"/>
-                <a:ea typeface="Arial" pitchFamily="34" charset="-122"/>
-                <a:cs typeface="Arial" pitchFamily="34" charset="-120"/>
-              </a:rPr>
-              <a:t>Microsoft Word - sutras1.pdf</a:t>
+              <a:rPr lang="en-US" sz="1200" dirty="0">
+                <a:solidFill>
+                  <a:srgbClr val="1C2833"/>
+                </a:solidFill>
+                <a:latin typeface="Arial" pitchFamily="34" charset="0"/>
+                <a:ea typeface="Arial" pitchFamily="34" charset="-122"/>
+                <a:cs typeface="Arial" pitchFamily="34" charset="-120"/>
+              </a:rPr>
+              <a:t>The "LEFT" digit pattern, placed in the next-higher slot, means we're multiplying it by B. (E.g. </a:t>
             </a:r>
             <a:pPr algn="l" indent="0" marL="0">
               <a:lnSpc>
@@ -2318,22 +3157,290 @@
                 <a:ea typeface="Arial" pitchFamily="34" charset="-122"/>
                 <a:cs typeface="Arial" pitchFamily="34" charset="-120"/>
               </a:rPr>
-              <a:t> — list of 16 Tirthaji sūtras.</a:t>
+              <a:t>93|12</a:t>
+            </a:r>
+            <a:pPr algn="l" indent="0" marL="0">
+              <a:lnSpc>
+                <a:spcPts val="1620"/>
+              </a:lnSpc>
+              <a:spcAft>
+                <a:spcPts val="300"/>
+              </a:spcAft>
+              <a:buNone/>
+            </a:pPr>
+            <a:r>
+              <a:rPr lang="en-US" sz="1200" dirty="0">
+                <a:solidFill>
+                  <a:srgbClr val="1C2833"/>
+                </a:solidFill>
+                <a:latin typeface="Arial" pitchFamily="34" charset="0"/>
+                <a:ea typeface="Arial" pitchFamily="34" charset="-122"/>
+                <a:cs typeface="Arial" pitchFamily="34" charset="-120"/>
+              </a:rPr>
+              <a:t> = </a:t>
+            </a:r>
+            <a:pPr algn="l" indent="0" marL="0">
+              <a:lnSpc>
+                <a:spcPts val="1620"/>
+              </a:lnSpc>
+              <a:spcAft>
+                <a:spcPts val="300"/>
+              </a:spcAft>
+              <a:buNone/>
+            </a:pPr>
+            <a:r>
+              <a:rPr lang="en-US" sz="1200" dirty="0">
+                <a:solidFill>
+                  <a:srgbClr val="1C2833"/>
+                </a:solidFill>
+                <a:latin typeface="Arial" pitchFamily="34" charset="0"/>
+                <a:ea typeface="Arial" pitchFamily="34" charset="-122"/>
+                <a:cs typeface="Arial" pitchFamily="34" charset="-120"/>
+              </a:rPr>
+              <a:t>93 × 100 + 12</a:t>
+            </a:r>
+            <a:pPr algn="l" indent="0" marL="0">
+              <a:lnSpc>
+                <a:spcPts val="1620"/>
+              </a:lnSpc>
+              <a:spcAft>
+                <a:spcPts val="300"/>
+              </a:spcAft>
+              <a:buNone/>
+            </a:pPr>
+            <a:r>
+              <a:rPr lang="en-US" sz="1200" dirty="0">
+                <a:solidFill>
+                  <a:srgbClr val="1C2833"/>
+                </a:solidFill>
+                <a:latin typeface="Arial" pitchFamily="34" charset="0"/>
+                <a:ea typeface="Arial" pitchFamily="34" charset="-122"/>
+                <a:cs typeface="Arial" pitchFamily="34" charset="-120"/>
+              </a:rPr>
+              <a:t> = 9300 + 12 = 9312.)</a:t>
             </a:r>
             <a:endParaRPr lang="en-US" sz="1200" dirty="0"/>
           </a:p>
-        </p:txBody>
-      </p:sp>
-      <p:sp>
-        <p:nvSpPr>
-          <p:cNvPr id="5" name="Text 3"/>
-          <p:cNvSpPr/>
-          <p:nvPr/>
-        </p:nvSpPr>
-        <p:spPr>
-          <a:xfrm>
-            <a:off x="406301" y="1703784"/>
-            <a:ext cx="8498026" cy="213271"/>
+          <a:p>
+            <a:pPr algn="l" marL="342900" indent="-342900">
+              <a:lnSpc>
+                <a:spcPts val="1620"/>
+              </a:lnSpc>
+              <a:spcAft>
+                <a:spcPts val="300"/>
+              </a:spcAft>
+              <a:buSzPct val="100000"/>
+              <a:buChar char="•"/>
+            </a:pPr>
+            <a:r>
+              <a:rPr lang="en-US" sz="1200" dirty="0">
+                <a:solidFill>
+                  <a:srgbClr val="1C2833"/>
+                </a:solidFill>
+                <a:latin typeface="Arial" pitchFamily="34" charset="0"/>
+                <a:ea typeface="Arial" pitchFamily="34" charset="-122"/>
+                <a:cs typeface="Arial" pitchFamily="34" charset="-120"/>
+              </a:rPr>
+              <a:t>So </a:t>
+            </a:r>
+            <a:pPr algn="l" indent="0" marL="0">
+              <a:lnSpc>
+                <a:spcPts val="1620"/>
+              </a:lnSpc>
+              <a:spcAft>
+                <a:spcPts val="300"/>
+              </a:spcAft>
+              <a:buNone/>
+            </a:pPr>
+            <a:r>
+              <a:rPr lang="en-US" sz="1200" dirty="0">
+                <a:solidFill>
+                  <a:srgbClr val="1C2833"/>
+                </a:solidFill>
+                <a:latin typeface="Arial" pitchFamily="34" charset="0"/>
+                <a:ea typeface="Arial" pitchFamily="34" charset="-122"/>
+                <a:cs typeface="Arial" pitchFamily="34" charset="-120"/>
+              </a:rPr>
+              <a:t>93|12</a:t>
+            </a:r>
+            <a:pPr algn="l" indent="0" marL="0">
+              <a:lnSpc>
+                <a:spcPts val="1620"/>
+              </a:lnSpc>
+              <a:spcAft>
+                <a:spcPts val="300"/>
+              </a:spcAft>
+              <a:buNone/>
+            </a:pPr>
+            <a:r>
+              <a:rPr lang="en-US" sz="1200" dirty="0">
+                <a:solidFill>
+                  <a:srgbClr val="1C2833"/>
+                </a:solidFill>
+                <a:latin typeface="Arial" pitchFamily="34" charset="0"/>
+                <a:ea typeface="Arial" pitchFamily="34" charset="-122"/>
+                <a:cs typeface="Arial" pitchFamily="34" charset="-120"/>
+              </a:rPr>
+              <a:t> is exactly </a:t>
+            </a:r>
+            <a:pPr algn="l" indent="0" marL="0">
+              <a:lnSpc>
+                <a:spcPts val="1620"/>
+              </a:lnSpc>
+              <a:spcAft>
+                <a:spcPts val="300"/>
+              </a:spcAft>
+              <a:buNone/>
+            </a:pPr>
+            <a:r>
+              <a:rPr lang="en-US" sz="1200" dirty="0">
+                <a:solidFill>
+                  <a:srgbClr val="1C2833"/>
+                </a:solidFill>
+                <a:latin typeface="Arial" pitchFamily="34" charset="0"/>
+                <a:ea typeface="Arial" pitchFamily="34" charset="-122"/>
+                <a:cs typeface="Arial" pitchFamily="34" charset="-120"/>
+              </a:rPr>
+              <a:t>B · LEFT + RIGHT</a:t>
+            </a:r>
+            <a:pPr algn="l" indent="0" marL="0">
+              <a:lnSpc>
+                <a:spcPts val="1620"/>
+              </a:lnSpc>
+              <a:spcAft>
+                <a:spcPts val="300"/>
+              </a:spcAft>
+              <a:buNone/>
+            </a:pPr>
+            <a:r>
+              <a:rPr lang="en-US" sz="1200" dirty="0">
+                <a:solidFill>
+                  <a:srgbClr val="1C2833"/>
+                </a:solidFill>
+                <a:latin typeface="Arial" pitchFamily="34" charset="0"/>
+                <a:ea typeface="Arial" pitchFamily="34" charset="-122"/>
+                <a:cs typeface="Arial" pitchFamily="34" charset="-120"/>
+              </a:rPr>
+              <a:t> = </a:t>
+            </a:r>
+            <a:pPr algn="l" indent="0" marL="0">
+              <a:lnSpc>
+                <a:spcPts val="1620"/>
+              </a:lnSpc>
+              <a:spcAft>
+                <a:spcPts val="300"/>
+              </a:spcAft>
+              <a:buNone/>
+            </a:pPr>
+            <a:r>
+              <a:rPr lang="en-US" sz="1200" dirty="0">
+                <a:solidFill>
+                  <a:srgbClr val="1C2833"/>
+                </a:solidFill>
+                <a:latin typeface="Arial" pitchFamily="34" charset="0"/>
+                <a:ea typeface="Arial" pitchFamily="34" charset="-122"/>
+                <a:cs typeface="Arial" pitchFamily="34" charset="-120"/>
+              </a:rPr>
+              <a:t>100 · 93 + 12</a:t>
+            </a:r>
+            <a:pPr algn="l" indent="0" marL="0">
+              <a:lnSpc>
+                <a:spcPts val="1620"/>
+              </a:lnSpc>
+              <a:spcAft>
+                <a:spcPts val="300"/>
+              </a:spcAft>
+              <a:buNone/>
+            </a:pPr>
+            <a:r>
+              <a:rPr lang="en-US" sz="1200" dirty="0">
+                <a:solidFill>
+                  <a:srgbClr val="1C2833"/>
+                </a:solidFill>
+                <a:latin typeface="Arial" pitchFamily="34" charset="0"/>
+                <a:ea typeface="Arial" pitchFamily="34" charset="-122"/>
+                <a:cs typeface="Arial" pitchFamily="34" charset="-120"/>
+              </a:rPr>
+              <a:t> = </a:t>
+            </a:r>
+            <a:pPr algn="l" indent="0" marL="0">
+              <a:lnSpc>
+                <a:spcPts val="1620"/>
+              </a:lnSpc>
+              <a:spcAft>
+                <a:spcPts val="300"/>
+              </a:spcAft>
+              <a:buNone/>
+            </a:pPr>
+            <a:r>
+              <a:rPr lang="en-US" sz="1200" dirty="0">
+                <a:solidFill>
+                  <a:srgbClr val="1C2833"/>
+                </a:solidFill>
+                <a:latin typeface="Arial" pitchFamily="34" charset="0"/>
+                <a:ea typeface="Arial" pitchFamily="34" charset="-122"/>
+                <a:cs typeface="Arial" pitchFamily="34" charset="-120"/>
+              </a:rPr>
+              <a:t>9312</a:t>
+            </a:r>
+            <a:pPr algn="l" indent="0" marL="0">
+              <a:lnSpc>
+                <a:spcPts val="1620"/>
+              </a:lnSpc>
+              <a:spcAft>
+                <a:spcPts val="300"/>
+              </a:spcAft>
+              <a:buNone/>
+            </a:pPr>
+            <a:r>
+              <a:rPr lang="en-US" sz="1200" dirty="0">
+                <a:solidFill>
+                  <a:srgbClr val="1C2833"/>
+                </a:solidFill>
+                <a:latin typeface="Arial" pitchFamily="34" charset="0"/>
+                <a:ea typeface="Arial" pitchFamily="34" charset="-122"/>
+                <a:cs typeface="Arial" pitchFamily="34" charset="-120"/>
+              </a:rPr>
+              <a:t>.</a:t>
+            </a:r>
+            <a:endParaRPr lang="en-US" sz="1200" dirty="0"/>
+          </a:p>
+          <a:p>
+            <a:pPr algn="l" marL="342900" indent="-342900">
+              <a:lnSpc>
+                <a:spcPts val="1620"/>
+              </a:lnSpc>
+              <a:spcAft>
+                <a:spcPts val="300"/>
+              </a:spcAft>
+              <a:buSzPct val="100000"/>
+              <a:buChar char="•"/>
+            </a:pPr>
+            <a:r>
+              <a:rPr lang="en-US" sz="1200" dirty="0">
+                <a:solidFill>
+                  <a:srgbClr val="1C2833"/>
+                </a:solidFill>
+                <a:latin typeface="Arial" pitchFamily="34" charset="0"/>
+                <a:ea typeface="Arial" pitchFamily="34" charset="-122"/>
+                <a:cs typeface="Arial" pitchFamily="34" charset="-120"/>
+              </a:rPr>
+              <a:t>That's exactly what the formula said.</a:t>
+            </a:r>
+            <a:endParaRPr lang="en-US" sz="1200" dirty="0"/>
+          </a:p>
+        </p:txBody>
+      </p:sp>
+      <p:sp>
+        <p:nvSpPr>
+          <p:cNvPr id="6" name="Text 4"/>
+          <p:cNvSpPr/>
+          <p:nvPr/>
+        </p:nvSpPr>
+        <p:spPr>
+          <a:xfrm>
+            <a:off x="634901" y="2381696"/>
+            <a:ext cx="8102798" cy="300930"/>
           </a:xfrm>
           <a:prstGeom prst="rect">
             <a:avLst/>
@@ -2345,6 +3452,112 @@
           <a:bodyPr wrap="square" lIns="0" tIns="0" rIns="0" bIns="0" rtlCol="0" anchor="t"/>
           <a:lstStyle/>
           <a:p>
+            <a:pPr algn="l" marL="342900" indent="-342900">
+              <a:lnSpc>
+                <a:spcPts val="1620"/>
+              </a:lnSpc>
+              <a:spcAft>
+                <a:spcPts val="300"/>
+              </a:spcAft>
+              <a:buSzPct val="100000"/>
+              <a:buChar char="•"/>
+            </a:pPr>
+            <a:r>
+              <a:rPr lang="en-US" sz="1200" b="1" dirty="0">
+                <a:solidFill>
+                  <a:srgbClr val="1C2833"/>
+                </a:solidFill>
+                <a:latin typeface="Arial" pitchFamily="34" charset="0"/>
+                <a:ea typeface="Arial" pitchFamily="34" charset="-122"/>
+                <a:cs typeface="Arial" pitchFamily="34" charset="-120"/>
+              </a:rPr>
+              <a:t>The "above the base" case.</a:t>
+            </a:r>
+            <a:pPr algn="l" indent="0" marL="0">
+              <a:lnSpc>
+                <a:spcPts val="1620"/>
+              </a:lnSpc>
+              <a:spcAft>
+                <a:spcPts val="300"/>
+              </a:spcAft>
+              <a:buNone/>
+            </a:pPr>
+            <a:r>
+              <a:rPr lang="en-US" sz="1200" dirty="0">
+                <a:solidFill>
+                  <a:srgbClr val="1C2833"/>
+                </a:solidFill>
+                <a:latin typeface="Arial" pitchFamily="34" charset="0"/>
+                <a:ea typeface="Arial" pitchFamily="34" charset="-122"/>
+                <a:cs typeface="Arial" pitchFamily="34" charset="-120"/>
+              </a:rPr>
+              <a:t> Use </a:t>
+            </a:r>
+            <a:pPr algn="l" indent="0" marL="0">
+              <a:lnSpc>
+                <a:spcPts val="1620"/>
+              </a:lnSpc>
+              <a:spcAft>
+                <a:spcPts val="300"/>
+              </a:spcAft>
+              <a:buNone/>
+            </a:pPr>
+            <a:r>
+              <a:rPr lang="en-US" sz="1200" dirty="0">
+                <a:solidFill>
+                  <a:srgbClr val="1C2833"/>
+                </a:solidFill>
+                <a:latin typeface="Arial" pitchFamily="34" charset="0"/>
+                <a:ea typeface="Arial" pitchFamily="34" charset="-122"/>
+                <a:cs typeface="Arial" pitchFamily="34" charset="-120"/>
+              </a:rPr>
+              <a:t>(B + x)(B + y)</a:t>
+            </a:r>
+            <a:pPr algn="l" indent="0" marL="0">
+              <a:lnSpc>
+                <a:spcPts val="1620"/>
+              </a:lnSpc>
+              <a:spcAft>
+                <a:spcPts val="300"/>
+              </a:spcAft>
+              <a:buNone/>
+            </a:pPr>
+            <a:r>
+              <a:rPr lang="en-US" sz="1200" dirty="0">
+                <a:solidFill>
+                  <a:srgbClr val="1C2833"/>
+                </a:solidFill>
+                <a:latin typeface="Arial" pitchFamily="34" charset="0"/>
+                <a:ea typeface="Arial" pitchFamily="34" charset="-122"/>
+                <a:cs typeface="Arial" pitchFamily="34" charset="-120"/>
+              </a:rPr>
+              <a:t>:</a:t>
+            </a:r>
+            <a:endParaRPr lang="en-US" sz="1200" dirty="0"/>
+          </a:p>
+        </p:txBody>
+      </p:sp>
+      <p:sp>
+        <p:nvSpPr>
+          <p:cNvPr id="7" name="Text 5"/>
+          <p:cNvSpPr/>
+          <p:nvPr/>
+        </p:nvSpPr>
+        <p:spPr>
+          <a:xfrm>
+            <a:off x="406301" y="4434929"/>
+            <a:ext cx="8498026" cy="213271"/>
+          </a:xfrm>
+          <a:prstGeom prst="rect">
+            <a:avLst/>
+          </a:prstGeom>
+          <a:noFill/>
+          <a:ln/>
+        </p:spPr>
+        <p:txBody>
+          <a:bodyPr wrap="square" lIns="0" tIns="0" rIns="0" bIns="0" rtlCol="0" anchor="t"/>
+          <a:lstStyle/>
+          <a:p>
             <a:pPr algn="l" indent="0" marL="0">
               <a:lnSpc>
                 <a:spcPts val="1680"/>
@@ -2366,8 +3579,322 @@
                 <a:ea typeface="Arial" pitchFamily="34" charset="-122"/>
                 <a:cs typeface="Arial" pitchFamily="34" charset="-120"/>
               </a:rPr>
-              <a:t>– Optional teacher reference: </a:t>
-            </a:r>
+              <a:t>Middle ·  · IKS Curriculum</a:t>
+            </a:r>
+            <a:endParaRPr lang="en-US" sz="1200" dirty="0"/>
+          </a:p>
+        </p:txBody>
+      </p:sp>
+    </p:spTree>
+  </p:cSld>
+  <p:clrMapOvr>
+    <a:masterClrMapping/>
+  </p:clrMapOvr>
+</p:sld>
+</file>
+
+<file path=ppt/slides/slide11.xml><?xml version="1.0" encoding="utf-8"?>
+<p:sld xmlns:a="http://schemas.openxmlformats.org/drawingml/2006/main" xmlns:r="http://schemas.openxmlformats.org/officeDocument/2006/relationships" xmlns:p="http://schemas.openxmlformats.org/presentationml/2006/main">
+  <p:cSld name="Slide 11">
+    <p:bg>
+      <p:bgPr>
+        <a:solidFill>
+          <a:srgbClr val="FFFFFF"/>
+        </a:solidFill>
+      </p:bgPr>
+    </p:bg>
+    <p:spTree>
+      <p:nvGrpSpPr>
+        <p:cNvPr id="1" name=""/>
+        <p:cNvGrpSpPr/>
+        <p:nvPr/>
+      </p:nvGrpSpPr>
+      <p:grpSpPr>
+        <a:xfrm>
+          <a:off x="0" y="0"/>
+          <a:ext cx="0" cy="0"/>
+          <a:chOff x="0" y="0"/>
+          <a:chExt cx="0" cy="0"/>
+        </a:xfrm>
+      </p:grpSpPr>
+      <p:sp>
+        <p:nvSpPr>
+          <p:cNvPr id="2" name="Text 0"/>
+          <p:cNvSpPr/>
+          <p:nvPr/>
+        </p:nvSpPr>
+        <p:spPr>
+          <a:xfrm>
+            <a:off x="0" y="0"/>
+            <a:ext cx="9144000" cy="101501"/>
+          </a:xfrm>
+          <a:prstGeom prst="rect">
+            <a:avLst/>
+          </a:prstGeom>
+          <a:solidFill>
+            <a:srgbClr val="277884"/>
+          </a:solidFill>
+          <a:ln/>
+        </p:spPr>
+        <p:txBody>
+          <a:bodyPr wrap="square" rtlCol="0" anchor="ctr"/>
+          <a:lstStyle/>
+          <a:p>
+            <a:pPr indent="0" marL="0">
+              <a:buNone/>
+            </a:pPr>
+            <a:endParaRPr lang="en-US" dirty="0"/>
+          </a:p>
+        </p:txBody>
+      </p:sp>
+      <p:sp>
+        <p:nvSpPr>
+          <p:cNvPr id="3" name="Text 1"/>
+          <p:cNvSpPr/>
+          <p:nvPr/>
+        </p:nvSpPr>
+        <p:spPr>
+          <a:xfrm>
+            <a:off x="406301" y="457051"/>
+            <a:ext cx="8498026" cy="274290"/>
+          </a:xfrm>
+          <a:prstGeom prst="rect">
+            <a:avLst/>
+          </a:prstGeom>
+          <a:noFill/>
+          <a:ln/>
+        </p:spPr>
+        <p:txBody>
+          <a:bodyPr wrap="square" lIns="0" tIns="0" rIns="0" bIns="0" rtlCol="0" anchor="t"/>
+          <a:lstStyle/>
+          <a:p>
+            <a:pPr algn="l" indent="0" marL="0">
+              <a:lnSpc>
+                <a:spcPts val="2160"/>
+              </a:lnSpc>
+              <a:spcBef>
+                <a:spcPts val="600"/>
+              </a:spcBef>
+              <a:spcAft>
+                <a:spcPts val="800"/>
+              </a:spcAft>
+              <a:buNone/>
+            </a:pPr>
+            <a:r>
+              <a:rPr lang="en-US" sz="1800" b="1" dirty="0">
+                <a:solidFill>
+                  <a:srgbClr val="FE4447"/>
+                </a:solidFill>
+                <a:latin typeface="Georgia" pitchFamily="34" charset="0"/>
+                <a:ea typeface="Georgia" pitchFamily="34" charset="-122"/>
+                <a:cs typeface="Georgia" pitchFamily="34" charset="-120"/>
+              </a:rPr>
+              <a:t>Core (20 min) — The algebraic proof (cont.)</a:t>
+            </a:r>
+            <a:endParaRPr lang="en-US" sz="1800" dirty="0"/>
+          </a:p>
+        </p:txBody>
+      </p:sp>
+      <p:sp>
+        <p:nvSpPr>
+          <p:cNvPr id="4" name="Text 2"/>
+          <p:cNvSpPr/>
+          <p:nvPr/>
+        </p:nvSpPr>
+        <p:spPr>
+          <a:xfrm>
+            <a:off x="406301" y="883593"/>
+            <a:ext cx="8331398" cy="777627"/>
+          </a:xfrm>
+          <a:prstGeom prst="rect">
+            <a:avLst/>
+          </a:prstGeom>
+          <a:solidFill>
+            <a:srgbClr val="F4F8F9"/>
+          </a:solidFill>
+          <a:ln/>
+        </p:spPr>
+        <p:txBody>
+          <a:bodyPr wrap="square" rtlCol="0" anchor="ctr"/>
+          <a:lstStyle/>
+          <a:p>
+            <a:pPr indent="0" marL="0">
+              <a:buNone/>
+            </a:pPr>
+            <a:endParaRPr lang="en-US" dirty="0"/>
+          </a:p>
+        </p:txBody>
+      </p:sp>
+      <p:sp>
+        <p:nvSpPr>
+          <p:cNvPr id="5" name="Shape 3"/>
+          <p:cNvSpPr/>
+          <p:nvPr/>
+        </p:nvSpPr>
+        <p:spPr>
+          <a:xfrm>
+            <a:off x="430113" y="883593"/>
+            <a:ext cx="0" cy="777627"/>
+          </a:xfrm>
+          <a:prstGeom prst="line">
+            <a:avLst/>
+          </a:prstGeom>
+          <a:noFill/>
+          <a:ln w="47625">
+            <a:solidFill>
+              <a:srgbClr val="277884"/>
+            </a:solidFill>
+            <a:prstDash val="solid"/>
+          </a:ln>
+        </p:spPr>
+      </p:sp>
+      <p:sp>
+        <p:nvSpPr>
+          <p:cNvPr id="6" name="Text 4"/>
+          <p:cNvSpPr/>
+          <p:nvPr/>
+        </p:nvSpPr>
+        <p:spPr>
+          <a:xfrm>
+            <a:off x="631627" y="1010543"/>
+            <a:ext cx="8086939" cy="174575"/>
+          </a:xfrm>
+          <a:prstGeom prst="rect">
+            <a:avLst/>
+          </a:prstGeom>
+          <a:noFill/>
+          <a:ln/>
+        </p:spPr>
+        <p:txBody>
+          <a:bodyPr wrap="square" lIns="0" tIns="0" rIns="0" bIns="0" rtlCol="0" anchor="t"/>
+          <a:lstStyle/>
+          <a:p>
+            <a:pPr algn="l" indent="0" marL="0">
+              <a:lnSpc>
+                <a:spcPts val="1375"/>
+              </a:lnSpc>
+              <a:buNone/>
+            </a:pPr>
+            <a:r>
+              <a:rPr lang="en-US" sz="1100" dirty="0">
+                <a:solidFill>
+                  <a:srgbClr val="1C2833"/>
+                </a:solidFill>
+                <a:latin typeface="Courier New" pitchFamily="34" charset="0"/>
+                <a:ea typeface="Courier New" pitchFamily="34" charset="-122"/>
+                <a:cs typeface="Courier New" pitchFamily="34" charset="-120"/>
+              </a:rPr>
+              <a:t>(B + x)(B + y) = B² + Bx + By + xy</a:t>
+            </a:r>
+            <a:endParaRPr lang="en-US" sz="1100" dirty="0"/>
+          </a:p>
+        </p:txBody>
+      </p:sp>
+      <p:sp>
+        <p:nvSpPr>
+          <p:cNvPr id="7" name="Text 5"/>
+          <p:cNvSpPr/>
+          <p:nvPr/>
+        </p:nvSpPr>
+        <p:spPr>
+          <a:xfrm>
+            <a:off x="631627" y="1185118"/>
+            <a:ext cx="8086939" cy="174575"/>
+          </a:xfrm>
+          <a:prstGeom prst="rect">
+            <a:avLst/>
+          </a:prstGeom>
+          <a:noFill/>
+          <a:ln/>
+        </p:spPr>
+        <p:txBody>
+          <a:bodyPr wrap="square" lIns="0" tIns="0" rIns="0" bIns="0" rtlCol="0" anchor="t"/>
+          <a:lstStyle/>
+          <a:p>
+            <a:pPr algn="l" indent="0" marL="0">
+              <a:lnSpc>
+                <a:spcPts val="1375"/>
+              </a:lnSpc>
+              <a:buNone/>
+            </a:pPr>
+            <a:r>
+              <a:rPr lang="en-US" sz="1100" dirty="0">
+                <a:solidFill>
+                  <a:srgbClr val="1C2833"/>
+                </a:solidFill>
+                <a:latin typeface="Courier New" pitchFamily="34" charset="0"/>
+                <a:ea typeface="Courier New" pitchFamily="34" charset="-122"/>
+                <a:cs typeface="Courier New" pitchFamily="34" charset="-120"/>
+              </a:rPr>
+              <a:t>= B(B + x + y) + xy</a:t>
+            </a:r>
+            <a:endParaRPr lang="en-US" sz="1100" dirty="0"/>
+          </a:p>
+        </p:txBody>
+      </p:sp>
+      <p:sp>
+        <p:nvSpPr>
+          <p:cNvPr id="8" name="Text 6"/>
+          <p:cNvSpPr/>
+          <p:nvPr/>
+        </p:nvSpPr>
+        <p:spPr>
+          <a:xfrm>
+            <a:off x="631627" y="1359694"/>
+            <a:ext cx="8086939" cy="174575"/>
+          </a:xfrm>
+          <a:prstGeom prst="rect">
+            <a:avLst/>
+          </a:prstGeom>
+          <a:noFill/>
+          <a:ln/>
+        </p:spPr>
+        <p:txBody>
+          <a:bodyPr wrap="square" lIns="0" tIns="0" rIns="0" bIns="0" rtlCol="0" anchor="t"/>
+          <a:lstStyle/>
+          <a:p>
+            <a:pPr algn="l" indent="0" marL="0">
+              <a:lnSpc>
+                <a:spcPts val="1375"/>
+              </a:lnSpc>
+              <a:buNone/>
+            </a:pPr>
+            <a:r>
+              <a:rPr lang="en-US" sz="1100" dirty="0">
+                <a:solidFill>
+                  <a:srgbClr val="1C2833"/>
+                </a:solidFill>
+                <a:latin typeface="Courier New" pitchFamily="34" charset="0"/>
+                <a:ea typeface="Courier New" pitchFamily="34" charset="-122"/>
+                <a:cs typeface="Courier New" pitchFamily="34" charset="-120"/>
+              </a:rPr>
+              <a:t>= B · LEFT + RIGHT</a:t>
+            </a:r>
+            <a:endParaRPr lang="en-US" sz="1100" dirty="0"/>
+          </a:p>
+        </p:txBody>
+      </p:sp>
+      <p:sp>
+        <p:nvSpPr>
+          <p:cNvPr id="9" name="Text 7"/>
+          <p:cNvSpPr/>
+          <p:nvPr/>
+        </p:nvSpPr>
+        <p:spPr>
+          <a:xfrm>
+            <a:off x="406301" y="1750070"/>
+            <a:ext cx="8498026" cy="222796"/>
+          </a:xfrm>
+          <a:prstGeom prst="rect">
+            <a:avLst/>
+          </a:prstGeom>
+          <a:noFill/>
+          <a:ln/>
+        </p:spPr>
+        <p:txBody>
+          <a:bodyPr wrap="square" lIns="0" tIns="0" rIns="0" bIns="0" rtlCol="0" anchor="t"/>
+          <a:lstStyle/>
+          <a:p>
             <a:pPr algn="l" indent="0" marL="0">
               <a:lnSpc>
                 <a:spcPts val="1680"/>
@@ -2381,6 +3908,2257 @@
               <a:buNone/>
             </a:pPr>
             <a:r>
+              <a:rPr lang="en-US" sz="1200" dirty="0">
+                <a:solidFill>
+                  <a:srgbClr val="1C2833"/>
+                </a:solidFill>
+                <a:latin typeface="Arial" pitchFamily="34" charset="0"/>
+                <a:ea typeface="Arial" pitchFamily="34" charset="-122"/>
+                <a:cs typeface="Arial" pitchFamily="34" charset="-120"/>
+              </a:rPr>
+              <a:t>Now LEFT = </a:t>
+            </a:r>
+            <a:pPr algn="l" indent="0" marL="0">
+              <a:lnSpc>
+                <a:spcPts val="1680"/>
+              </a:lnSpc>
+              <a:spcBef>
+                <a:spcPts val="300"/>
+              </a:spcBef>
+              <a:spcAft>
+                <a:spcPts val="300"/>
+              </a:spcAft>
+              <a:buNone/>
+            </a:pPr>
+            <a:r>
+              <a:rPr lang="en-US" sz="1200" dirty="0">
+                <a:solidFill>
+                  <a:srgbClr val="1C2833"/>
+                </a:solidFill>
+                <a:latin typeface="Arial" pitchFamily="34" charset="0"/>
+                <a:ea typeface="Arial" pitchFamily="34" charset="-122"/>
+                <a:cs typeface="Arial" pitchFamily="34" charset="-120"/>
+              </a:rPr>
+              <a:t>B + x + y</a:t>
+            </a:r>
+            <a:pPr algn="l" indent="0" marL="0">
+              <a:lnSpc>
+                <a:spcPts val="1680"/>
+              </a:lnSpc>
+              <a:spcBef>
+                <a:spcPts val="300"/>
+              </a:spcBef>
+              <a:spcAft>
+                <a:spcPts val="300"/>
+              </a:spcAft>
+              <a:buNone/>
+            </a:pPr>
+            <a:r>
+              <a:rPr lang="en-US" sz="1200" dirty="0">
+                <a:solidFill>
+                  <a:srgbClr val="1C2833"/>
+                </a:solidFill>
+                <a:latin typeface="Arial" pitchFamily="34" charset="0"/>
+                <a:ea typeface="Arial" pitchFamily="34" charset="-122"/>
+                <a:cs typeface="Arial" pitchFamily="34" charset="-120"/>
+              </a:rPr>
+              <a:t> — cross-</a:t>
+            </a:r>
+            <a:pPr algn="l" indent="0" marL="0">
+              <a:lnSpc>
+                <a:spcPts val="1680"/>
+              </a:lnSpc>
+              <a:spcBef>
+                <a:spcPts val="300"/>
+              </a:spcBef>
+              <a:spcAft>
+                <a:spcPts val="300"/>
+              </a:spcAft>
+              <a:buNone/>
+            </a:pPr>
+            <a:r>
+              <a:rPr lang="en-US" sz="1200" b="1" dirty="0">
+                <a:solidFill>
+                  <a:srgbClr val="1C2833"/>
+                </a:solidFill>
+                <a:latin typeface="Arial" pitchFamily="34" charset="0"/>
+                <a:ea typeface="Arial" pitchFamily="34" charset="-122"/>
+                <a:cs typeface="Arial" pitchFamily="34" charset="-120"/>
+              </a:rPr>
+              <a:t>add</a:t>
+            </a:r>
+            <a:pPr algn="l" indent="0" marL="0">
+              <a:lnSpc>
+                <a:spcPts val="1680"/>
+              </a:lnSpc>
+              <a:spcBef>
+                <a:spcPts val="300"/>
+              </a:spcBef>
+              <a:spcAft>
+                <a:spcPts val="300"/>
+              </a:spcAft>
+              <a:buNone/>
+            </a:pPr>
+            <a:r>
+              <a:rPr lang="en-US" sz="1200" dirty="0">
+                <a:solidFill>
+                  <a:srgbClr val="1C2833"/>
+                </a:solidFill>
+                <a:latin typeface="Arial" pitchFamily="34" charset="0"/>
+                <a:ea typeface="Arial" pitchFamily="34" charset="-122"/>
+                <a:cs typeface="Arial" pitchFamily="34" charset="-120"/>
+              </a:rPr>
+              <a:t>. RIGHT = </a:t>
+            </a:r>
+            <a:pPr algn="l" indent="0" marL="0">
+              <a:lnSpc>
+                <a:spcPts val="1680"/>
+              </a:lnSpc>
+              <a:spcBef>
+                <a:spcPts val="300"/>
+              </a:spcBef>
+              <a:spcAft>
+                <a:spcPts val="300"/>
+              </a:spcAft>
+              <a:buNone/>
+            </a:pPr>
+            <a:r>
+              <a:rPr lang="en-US" sz="1200" dirty="0">
+                <a:solidFill>
+                  <a:srgbClr val="1C2833"/>
+                </a:solidFill>
+                <a:latin typeface="Arial" pitchFamily="34" charset="0"/>
+                <a:ea typeface="Arial" pitchFamily="34" charset="-122"/>
+                <a:cs typeface="Arial" pitchFamily="34" charset="-120"/>
+              </a:rPr>
+              <a:t>xy</a:t>
+            </a:r>
+            <a:pPr algn="l" indent="0" marL="0">
+              <a:lnSpc>
+                <a:spcPts val="1680"/>
+              </a:lnSpc>
+              <a:spcBef>
+                <a:spcPts val="300"/>
+              </a:spcBef>
+              <a:spcAft>
+                <a:spcPts val="300"/>
+              </a:spcAft>
+              <a:buNone/>
+            </a:pPr>
+            <a:r>
+              <a:rPr lang="en-US" sz="1200" dirty="0">
+                <a:solidFill>
+                  <a:srgbClr val="1C2833"/>
+                </a:solidFill>
+                <a:latin typeface="Arial" pitchFamily="34" charset="0"/>
+                <a:ea typeface="Arial" pitchFamily="34" charset="-122"/>
+                <a:cs typeface="Arial" pitchFamily="34" charset="-120"/>
+              </a:rPr>
+              <a:t>. Sign flips, procedure mirrors.</a:t>
+            </a:r>
+            <a:endParaRPr lang="en-US" sz="1200" dirty="0"/>
+          </a:p>
+        </p:txBody>
+      </p:sp>
+      <p:sp>
+        <p:nvSpPr>
+          <p:cNvPr id="10" name="Text 8"/>
+          <p:cNvSpPr/>
+          <p:nvPr/>
+        </p:nvSpPr>
+        <p:spPr>
+          <a:xfrm>
+            <a:off x="406301" y="4434929"/>
+            <a:ext cx="8498026" cy="213271"/>
+          </a:xfrm>
+          <a:prstGeom prst="rect">
+            <a:avLst/>
+          </a:prstGeom>
+          <a:noFill/>
+          <a:ln/>
+        </p:spPr>
+        <p:txBody>
+          <a:bodyPr wrap="square" lIns="0" tIns="0" rIns="0" bIns="0" rtlCol="0" anchor="t"/>
+          <a:lstStyle/>
+          <a:p>
+            <a:pPr algn="l" indent="0" marL="0">
+              <a:lnSpc>
+                <a:spcPts val="1680"/>
+              </a:lnSpc>
+              <a:spcBef>
+                <a:spcPts val="300"/>
+              </a:spcBef>
+              <a:spcAft>
+                <a:spcPts val="300"/>
+              </a:spcAft>
+              <a:buNone/>
+            </a:pPr>
+            <a:r>
+              <a:rPr lang="en-US" sz="1200" dirty="0">
+                <a:solidFill>
+                  <a:srgbClr val="1C2833"/>
+                </a:solidFill>
+                <a:latin typeface="Arial" pitchFamily="34" charset="0"/>
+                <a:ea typeface="Arial" pitchFamily="34" charset="-122"/>
+                <a:cs typeface="Arial" pitchFamily="34" charset="-120"/>
+              </a:rPr>
+              <a:t>Middle ·  · IKS Curriculum</a:t>
+            </a:r>
+            <a:endParaRPr lang="en-US" sz="1200" dirty="0"/>
+          </a:p>
+        </p:txBody>
+      </p:sp>
+    </p:spTree>
+  </p:cSld>
+  <p:clrMapOvr>
+    <a:masterClrMapping/>
+  </p:clrMapOvr>
+</p:sld>
+</file>
+
+<file path=ppt/slides/slide12.xml><?xml version="1.0" encoding="utf-8"?>
+<p:sld xmlns:a="http://schemas.openxmlformats.org/drawingml/2006/main" xmlns:r="http://schemas.openxmlformats.org/officeDocument/2006/relationships" xmlns:p="http://schemas.openxmlformats.org/presentationml/2006/main">
+  <p:cSld name="Slide 12">
+    <p:bg>
+      <p:bgPr>
+        <a:solidFill>
+          <a:srgbClr val="FFFFFF"/>
+        </a:solidFill>
+      </p:bgPr>
+    </p:bg>
+    <p:spTree>
+      <p:nvGrpSpPr>
+        <p:cNvPr id="1" name=""/>
+        <p:cNvGrpSpPr/>
+        <p:nvPr/>
+      </p:nvGrpSpPr>
+      <p:grpSpPr>
+        <a:xfrm>
+          <a:off x="0" y="0"/>
+          <a:ext cx="0" cy="0"/>
+          <a:chOff x="0" y="0"/>
+          <a:chExt cx="0" cy="0"/>
+        </a:xfrm>
+      </p:grpSpPr>
+      <p:sp>
+        <p:nvSpPr>
+          <p:cNvPr id="2" name="Text 0"/>
+          <p:cNvSpPr/>
+          <p:nvPr/>
+        </p:nvSpPr>
+        <p:spPr>
+          <a:xfrm>
+            <a:off x="0" y="0"/>
+            <a:ext cx="9144000" cy="101501"/>
+          </a:xfrm>
+          <a:prstGeom prst="rect">
+            <a:avLst/>
+          </a:prstGeom>
+          <a:solidFill>
+            <a:srgbClr val="277884"/>
+          </a:solidFill>
+          <a:ln/>
+        </p:spPr>
+        <p:txBody>
+          <a:bodyPr wrap="square" rtlCol="0" anchor="ctr"/>
+          <a:lstStyle/>
+          <a:p>
+            <a:pPr indent="0" marL="0">
+              <a:buNone/>
+            </a:pPr>
+            <a:endParaRPr lang="en-US" dirty="0"/>
+          </a:p>
+        </p:txBody>
+      </p:sp>
+      <p:sp>
+        <p:nvSpPr>
+          <p:cNvPr id="3" name="Text 1"/>
+          <p:cNvSpPr/>
+          <p:nvPr/>
+        </p:nvSpPr>
+        <p:spPr>
+          <a:xfrm>
+            <a:off x="406301" y="457051"/>
+            <a:ext cx="8498026" cy="274290"/>
+          </a:xfrm>
+          <a:prstGeom prst="rect">
+            <a:avLst/>
+          </a:prstGeom>
+          <a:noFill/>
+          <a:ln/>
+        </p:spPr>
+        <p:txBody>
+          <a:bodyPr wrap="square" lIns="0" tIns="0" rIns="0" bIns="0" rtlCol="0" anchor="t"/>
+          <a:lstStyle/>
+          <a:p>
+            <a:pPr algn="l" indent="0" marL="0">
+              <a:lnSpc>
+                <a:spcPts val="2160"/>
+              </a:lnSpc>
+              <a:spcBef>
+                <a:spcPts val="600"/>
+              </a:spcBef>
+              <a:spcAft>
+                <a:spcPts val="800"/>
+              </a:spcAft>
+              <a:buNone/>
+            </a:pPr>
+            <a:r>
+              <a:rPr lang="en-US" sz="1800" b="1" dirty="0">
+                <a:solidFill>
+                  <a:srgbClr val="FE4447"/>
+                </a:solidFill>
+                <a:latin typeface="Georgia" pitchFamily="34" charset="0"/>
+                <a:ea typeface="Georgia" pitchFamily="34" charset="-122"/>
+                <a:cs typeface="Georgia" pitchFamily="34" charset="-120"/>
+              </a:rPr>
+              <a:t>Core (20 min) — The algebraic proof (cont.)</a:t>
+            </a:r>
+            <a:endParaRPr lang="en-US" sz="1800" dirty="0"/>
+          </a:p>
+        </p:txBody>
+      </p:sp>
+      <p:sp>
+        <p:nvSpPr>
+          <p:cNvPr id="4" name="Text 2"/>
+          <p:cNvSpPr/>
+          <p:nvPr/>
+        </p:nvSpPr>
+        <p:spPr>
+          <a:xfrm>
+            <a:off x="634901" y="883593"/>
+            <a:ext cx="8102798" cy="300930"/>
+          </a:xfrm>
+          <a:prstGeom prst="rect">
+            <a:avLst/>
+          </a:prstGeom>
+          <a:noFill/>
+          <a:ln/>
+        </p:spPr>
+        <p:txBody>
+          <a:bodyPr wrap="square" lIns="0" tIns="0" rIns="0" bIns="0" rtlCol="0" anchor="t"/>
+          <a:lstStyle/>
+          <a:p>
+            <a:pPr algn="l" marL="342900" indent="-342900">
+              <a:lnSpc>
+                <a:spcPts val="1620"/>
+              </a:lnSpc>
+              <a:spcAft>
+                <a:spcPts val="300"/>
+              </a:spcAft>
+              <a:buSzPct val="100000"/>
+              <a:buChar char="•"/>
+            </a:pPr>
+            <a:r>
+              <a:rPr lang="en-US" sz="1200" b="1" dirty="0">
+                <a:solidFill>
+                  <a:srgbClr val="1C2833"/>
+                </a:solidFill>
+                <a:latin typeface="Arial" pitchFamily="34" charset="0"/>
+                <a:ea typeface="Arial" pitchFamily="34" charset="-122"/>
+                <a:cs typeface="Arial" pitchFamily="34" charset="-120"/>
+              </a:rPr>
+              <a:t>The mixed case.</a:t>
+            </a:r>
+            <a:pPr algn="l" indent="0" marL="0">
+              <a:lnSpc>
+                <a:spcPts val="1620"/>
+              </a:lnSpc>
+              <a:spcAft>
+                <a:spcPts val="300"/>
+              </a:spcAft>
+              <a:buNone/>
+            </a:pPr>
+            <a:r>
+              <a:rPr lang="en-US" sz="1200" dirty="0">
+                <a:solidFill>
+                  <a:srgbClr val="1C2833"/>
+                </a:solidFill>
+                <a:latin typeface="Arial" pitchFamily="34" charset="0"/>
+                <a:ea typeface="Arial" pitchFamily="34" charset="-122"/>
+                <a:cs typeface="Arial" pitchFamily="34" charset="-120"/>
+              </a:rPr>
+              <a:t> Use </a:t>
+            </a:r>
+            <a:pPr algn="l" indent="0" marL="0">
+              <a:lnSpc>
+                <a:spcPts val="1620"/>
+              </a:lnSpc>
+              <a:spcAft>
+                <a:spcPts val="300"/>
+              </a:spcAft>
+              <a:buNone/>
+            </a:pPr>
+            <a:r>
+              <a:rPr lang="en-US" sz="1200" dirty="0">
+                <a:solidFill>
+                  <a:srgbClr val="1C2833"/>
+                </a:solidFill>
+                <a:latin typeface="Arial" pitchFamily="34" charset="0"/>
+                <a:ea typeface="Arial" pitchFamily="34" charset="-122"/>
+                <a:cs typeface="Arial" pitchFamily="34" charset="-120"/>
+              </a:rPr>
+              <a:t>(B + x)(B − y)</a:t>
+            </a:r>
+            <a:pPr algn="l" indent="0" marL="0">
+              <a:lnSpc>
+                <a:spcPts val="1620"/>
+              </a:lnSpc>
+              <a:spcAft>
+                <a:spcPts val="300"/>
+              </a:spcAft>
+              <a:buNone/>
+            </a:pPr>
+            <a:r>
+              <a:rPr lang="en-US" sz="1200" dirty="0">
+                <a:solidFill>
+                  <a:srgbClr val="1C2833"/>
+                </a:solidFill>
+                <a:latin typeface="Arial" pitchFamily="34" charset="0"/>
+                <a:ea typeface="Arial" pitchFamily="34" charset="-122"/>
+                <a:cs typeface="Arial" pitchFamily="34" charset="-120"/>
+              </a:rPr>
+              <a:t>:</a:t>
+            </a:r>
+            <a:endParaRPr lang="en-US" sz="1200" dirty="0"/>
+          </a:p>
+        </p:txBody>
+      </p:sp>
+      <p:sp>
+        <p:nvSpPr>
+          <p:cNvPr id="5" name="Text 3"/>
+          <p:cNvSpPr/>
+          <p:nvPr/>
+        </p:nvSpPr>
+        <p:spPr>
+          <a:xfrm>
+            <a:off x="406301" y="1286024"/>
+            <a:ext cx="8331398" cy="777627"/>
+          </a:xfrm>
+          <a:prstGeom prst="rect">
+            <a:avLst/>
+          </a:prstGeom>
+          <a:solidFill>
+            <a:srgbClr val="F4F8F9"/>
+          </a:solidFill>
+          <a:ln/>
+        </p:spPr>
+        <p:txBody>
+          <a:bodyPr wrap="square" rtlCol="0" anchor="ctr"/>
+          <a:lstStyle/>
+          <a:p>
+            <a:pPr indent="0" marL="0">
+              <a:buNone/>
+            </a:pPr>
+            <a:endParaRPr lang="en-US" dirty="0"/>
+          </a:p>
+        </p:txBody>
+      </p:sp>
+      <p:sp>
+        <p:nvSpPr>
+          <p:cNvPr id="6" name="Shape 4"/>
+          <p:cNvSpPr/>
+          <p:nvPr/>
+        </p:nvSpPr>
+        <p:spPr>
+          <a:xfrm>
+            <a:off x="430113" y="1286024"/>
+            <a:ext cx="0" cy="777627"/>
+          </a:xfrm>
+          <a:prstGeom prst="line">
+            <a:avLst/>
+          </a:prstGeom>
+          <a:noFill/>
+          <a:ln w="47625">
+            <a:solidFill>
+              <a:srgbClr val="277884"/>
+            </a:solidFill>
+            <a:prstDash val="solid"/>
+          </a:ln>
+        </p:spPr>
+      </p:sp>
+      <p:sp>
+        <p:nvSpPr>
+          <p:cNvPr id="7" name="Text 5"/>
+          <p:cNvSpPr/>
+          <p:nvPr/>
+        </p:nvSpPr>
+        <p:spPr>
+          <a:xfrm>
+            <a:off x="631627" y="1412974"/>
+            <a:ext cx="8086939" cy="174575"/>
+          </a:xfrm>
+          <a:prstGeom prst="rect">
+            <a:avLst/>
+          </a:prstGeom>
+          <a:noFill/>
+          <a:ln/>
+        </p:spPr>
+        <p:txBody>
+          <a:bodyPr wrap="square" lIns="0" tIns="0" rIns="0" bIns="0" rtlCol="0" anchor="t"/>
+          <a:lstStyle/>
+          <a:p>
+            <a:pPr algn="l" indent="0" marL="0">
+              <a:lnSpc>
+                <a:spcPts val="1375"/>
+              </a:lnSpc>
+              <a:buNone/>
+            </a:pPr>
+            <a:r>
+              <a:rPr lang="en-US" sz="1100" dirty="0">
+                <a:solidFill>
+                  <a:srgbClr val="1C2833"/>
+                </a:solidFill>
+                <a:latin typeface="Courier New" pitchFamily="34" charset="0"/>
+                <a:ea typeface="Courier New" pitchFamily="34" charset="-122"/>
+                <a:cs typeface="Courier New" pitchFamily="34" charset="-120"/>
+              </a:rPr>
+              <a:t>(B + x)(B − y) = B² − By + Bx − xy</a:t>
+            </a:r>
+            <a:endParaRPr lang="en-US" sz="1100" dirty="0"/>
+          </a:p>
+        </p:txBody>
+      </p:sp>
+      <p:sp>
+        <p:nvSpPr>
+          <p:cNvPr id="8" name="Text 6"/>
+          <p:cNvSpPr/>
+          <p:nvPr/>
+        </p:nvSpPr>
+        <p:spPr>
+          <a:xfrm>
+            <a:off x="631627" y="1587550"/>
+            <a:ext cx="8086939" cy="174575"/>
+          </a:xfrm>
+          <a:prstGeom prst="rect">
+            <a:avLst/>
+          </a:prstGeom>
+          <a:noFill/>
+          <a:ln/>
+        </p:spPr>
+        <p:txBody>
+          <a:bodyPr wrap="square" lIns="0" tIns="0" rIns="0" bIns="0" rtlCol="0" anchor="t"/>
+          <a:lstStyle/>
+          <a:p>
+            <a:pPr algn="l" indent="0" marL="0">
+              <a:lnSpc>
+                <a:spcPts val="1375"/>
+              </a:lnSpc>
+              <a:buNone/>
+            </a:pPr>
+            <a:r>
+              <a:rPr lang="en-US" sz="1100" dirty="0">
+                <a:solidFill>
+                  <a:srgbClr val="1C2833"/>
+                </a:solidFill>
+                <a:latin typeface="Courier New" pitchFamily="34" charset="0"/>
+                <a:ea typeface="Courier New" pitchFamily="34" charset="-122"/>
+                <a:cs typeface="Courier New" pitchFamily="34" charset="-120"/>
+              </a:rPr>
+              <a:t>= B(B + x − y) + (−xy)</a:t>
+            </a:r>
+            <a:endParaRPr lang="en-US" sz="1100" dirty="0"/>
+          </a:p>
+        </p:txBody>
+      </p:sp>
+      <p:sp>
+        <p:nvSpPr>
+          <p:cNvPr id="9" name="Text 7"/>
+          <p:cNvSpPr/>
+          <p:nvPr/>
+        </p:nvSpPr>
+        <p:spPr>
+          <a:xfrm>
+            <a:off x="631627" y="1762125"/>
+            <a:ext cx="8086939" cy="174575"/>
+          </a:xfrm>
+          <a:prstGeom prst="rect">
+            <a:avLst/>
+          </a:prstGeom>
+          <a:noFill/>
+          <a:ln/>
+        </p:spPr>
+        <p:txBody>
+          <a:bodyPr wrap="square" lIns="0" tIns="0" rIns="0" bIns="0" rtlCol="0" anchor="t"/>
+          <a:lstStyle/>
+          <a:p>
+            <a:pPr algn="l" indent="0" marL="0">
+              <a:lnSpc>
+                <a:spcPts val="1375"/>
+              </a:lnSpc>
+              <a:buNone/>
+            </a:pPr>
+            <a:r>
+              <a:rPr lang="en-US" sz="1100" dirty="0">
+                <a:solidFill>
+                  <a:srgbClr val="1C2833"/>
+                </a:solidFill>
+                <a:latin typeface="Courier New" pitchFamily="34" charset="0"/>
+                <a:ea typeface="Courier New" pitchFamily="34" charset="-122"/>
+                <a:cs typeface="Courier New" pitchFamily="34" charset="-120"/>
+              </a:rPr>
+              <a:t>= B · LEFT + RIGHT</a:t>
+            </a:r>
+            <a:endParaRPr lang="en-US" sz="1100" dirty="0"/>
+          </a:p>
+        </p:txBody>
+      </p:sp>
+      <p:sp>
+        <p:nvSpPr>
+          <p:cNvPr id="10" name="Text 8"/>
+          <p:cNvSpPr/>
+          <p:nvPr/>
+        </p:nvSpPr>
+        <p:spPr>
+          <a:xfrm>
+            <a:off x="406301" y="4434929"/>
+            <a:ext cx="8498026" cy="213271"/>
+          </a:xfrm>
+          <a:prstGeom prst="rect">
+            <a:avLst/>
+          </a:prstGeom>
+          <a:noFill/>
+          <a:ln/>
+        </p:spPr>
+        <p:txBody>
+          <a:bodyPr wrap="square" lIns="0" tIns="0" rIns="0" bIns="0" rtlCol="0" anchor="t"/>
+          <a:lstStyle/>
+          <a:p>
+            <a:pPr algn="l" indent="0" marL="0">
+              <a:lnSpc>
+                <a:spcPts val="1680"/>
+              </a:lnSpc>
+              <a:spcBef>
+                <a:spcPts val="300"/>
+              </a:spcBef>
+              <a:spcAft>
+                <a:spcPts val="300"/>
+              </a:spcAft>
+              <a:buNone/>
+            </a:pPr>
+            <a:r>
+              <a:rPr lang="en-US" sz="1200" dirty="0">
+                <a:solidFill>
+                  <a:srgbClr val="1C2833"/>
+                </a:solidFill>
+                <a:latin typeface="Arial" pitchFamily="34" charset="0"/>
+                <a:ea typeface="Arial" pitchFamily="34" charset="-122"/>
+                <a:cs typeface="Arial" pitchFamily="34" charset="-120"/>
+              </a:rPr>
+              <a:t>Middle ·  · IKS Curriculum</a:t>
+            </a:r>
+            <a:endParaRPr lang="en-US" sz="1200" dirty="0"/>
+          </a:p>
+        </p:txBody>
+      </p:sp>
+    </p:spTree>
+  </p:cSld>
+  <p:clrMapOvr>
+    <a:masterClrMapping/>
+  </p:clrMapOvr>
+</p:sld>
+</file>
+
+<file path=ppt/slides/slide13.xml><?xml version="1.0" encoding="utf-8"?>
+<p:sld xmlns:a="http://schemas.openxmlformats.org/drawingml/2006/main" xmlns:r="http://schemas.openxmlformats.org/officeDocument/2006/relationships" xmlns:p="http://schemas.openxmlformats.org/presentationml/2006/main">
+  <p:cSld name="Slide 13">
+    <p:bg>
+      <p:bgPr>
+        <a:solidFill>
+          <a:srgbClr val="FFFFFF"/>
+        </a:solidFill>
+      </p:bgPr>
+    </p:bg>
+    <p:spTree>
+      <p:nvGrpSpPr>
+        <p:cNvPr id="1" name=""/>
+        <p:cNvGrpSpPr/>
+        <p:nvPr/>
+      </p:nvGrpSpPr>
+      <p:grpSpPr>
+        <a:xfrm>
+          <a:off x="0" y="0"/>
+          <a:ext cx="0" cy="0"/>
+          <a:chOff x="0" y="0"/>
+          <a:chExt cx="0" cy="0"/>
+        </a:xfrm>
+      </p:grpSpPr>
+      <p:sp>
+        <p:nvSpPr>
+          <p:cNvPr id="2" name="Text 0"/>
+          <p:cNvSpPr/>
+          <p:nvPr/>
+        </p:nvSpPr>
+        <p:spPr>
+          <a:xfrm>
+            <a:off x="0" y="0"/>
+            <a:ext cx="9144000" cy="101501"/>
+          </a:xfrm>
+          <a:prstGeom prst="rect">
+            <a:avLst/>
+          </a:prstGeom>
+          <a:solidFill>
+            <a:srgbClr val="277884"/>
+          </a:solidFill>
+          <a:ln/>
+        </p:spPr>
+        <p:txBody>
+          <a:bodyPr wrap="square" rtlCol="0" anchor="ctr"/>
+          <a:lstStyle/>
+          <a:p>
+            <a:pPr indent="0" marL="0">
+              <a:buNone/>
+            </a:pPr>
+            <a:endParaRPr lang="en-US" dirty="0"/>
+          </a:p>
+        </p:txBody>
+      </p:sp>
+      <p:sp>
+        <p:nvSpPr>
+          <p:cNvPr id="3" name="Text 1"/>
+          <p:cNvSpPr/>
+          <p:nvPr/>
+        </p:nvSpPr>
+        <p:spPr>
+          <a:xfrm>
+            <a:off x="406301" y="457051"/>
+            <a:ext cx="8498026" cy="274290"/>
+          </a:xfrm>
+          <a:prstGeom prst="rect">
+            <a:avLst/>
+          </a:prstGeom>
+          <a:noFill/>
+          <a:ln/>
+        </p:spPr>
+        <p:txBody>
+          <a:bodyPr wrap="square" lIns="0" tIns="0" rIns="0" bIns="0" rtlCol="0" anchor="t"/>
+          <a:lstStyle/>
+          <a:p>
+            <a:pPr algn="l" indent="0" marL="0">
+              <a:lnSpc>
+                <a:spcPts val="2160"/>
+              </a:lnSpc>
+              <a:spcBef>
+                <a:spcPts val="600"/>
+              </a:spcBef>
+              <a:spcAft>
+                <a:spcPts val="800"/>
+              </a:spcAft>
+              <a:buNone/>
+            </a:pPr>
+            <a:r>
+              <a:rPr lang="en-US" sz="1800" b="1" dirty="0">
+                <a:solidFill>
+                  <a:srgbClr val="FE4447"/>
+                </a:solidFill>
+                <a:latin typeface="Georgia" pitchFamily="34" charset="0"/>
+                <a:ea typeface="Georgia" pitchFamily="34" charset="-122"/>
+                <a:cs typeface="Georgia" pitchFamily="34" charset="-120"/>
+              </a:rPr>
+              <a:t>Core (20 min) — The algebraic proof (cont.)</a:t>
+            </a:r>
+            <a:endParaRPr lang="en-US" sz="1800" dirty="0"/>
+          </a:p>
+        </p:txBody>
+      </p:sp>
+      <p:sp>
+        <p:nvSpPr>
+          <p:cNvPr id="4" name="Text 2"/>
+          <p:cNvSpPr/>
+          <p:nvPr/>
+        </p:nvSpPr>
+        <p:spPr>
+          <a:xfrm>
+            <a:off x="406301" y="870942"/>
+            <a:ext cx="8498026" cy="222796"/>
+          </a:xfrm>
+          <a:prstGeom prst="rect">
+            <a:avLst/>
+          </a:prstGeom>
+          <a:noFill/>
+          <a:ln/>
+        </p:spPr>
+        <p:txBody>
+          <a:bodyPr wrap="square" lIns="0" tIns="0" rIns="0" bIns="0" rtlCol="0" anchor="t"/>
+          <a:lstStyle/>
+          <a:p>
+            <a:pPr algn="l" indent="0" marL="0">
+              <a:lnSpc>
+                <a:spcPts val="1680"/>
+              </a:lnSpc>
+              <a:spcBef>
+                <a:spcPts val="300"/>
+              </a:spcBef>
+              <a:spcAft>
+                <a:spcPts val="300"/>
+              </a:spcAft>
+              <a:buNone/>
+            </a:pPr>
+            <a:r>
+              <a:rPr lang="en-US" sz="1200" dirty="0">
+                <a:solidFill>
+                  <a:srgbClr val="1C2833"/>
+                </a:solidFill>
+                <a:latin typeface="Arial" pitchFamily="34" charset="0"/>
+                <a:ea typeface="Arial" pitchFamily="34" charset="-122"/>
+                <a:cs typeface="Arial" pitchFamily="34" charset="-120"/>
+              </a:rPr>
+              <a:t>LEFT = </a:t>
+            </a:r>
+            <a:pPr algn="l" indent="0" marL="0">
+              <a:lnSpc>
+                <a:spcPts val="1680"/>
+              </a:lnSpc>
+              <a:spcBef>
+                <a:spcPts val="300"/>
+              </a:spcBef>
+              <a:spcAft>
+                <a:spcPts val="300"/>
+              </a:spcAft>
+              <a:buNone/>
+            </a:pPr>
+            <a:r>
+              <a:rPr lang="en-US" sz="1200" dirty="0">
+                <a:solidFill>
+                  <a:srgbClr val="1C2833"/>
+                </a:solidFill>
+                <a:latin typeface="Arial" pitchFamily="34" charset="0"/>
+                <a:ea typeface="Arial" pitchFamily="34" charset="-122"/>
+                <a:cs typeface="Arial" pitchFamily="34" charset="-120"/>
+              </a:rPr>
+              <a:t>B + x − y</a:t>
+            </a:r>
+            <a:pPr algn="l" indent="0" marL="0">
+              <a:lnSpc>
+                <a:spcPts val="1680"/>
+              </a:lnSpc>
+              <a:spcBef>
+                <a:spcPts val="300"/>
+              </a:spcBef>
+              <a:spcAft>
+                <a:spcPts val="300"/>
+              </a:spcAft>
+              <a:buNone/>
+            </a:pPr>
+            <a:r>
+              <a:rPr lang="en-US" sz="1200" dirty="0">
+                <a:solidFill>
+                  <a:srgbClr val="1C2833"/>
+                </a:solidFill>
+                <a:latin typeface="Arial" pitchFamily="34" charset="0"/>
+                <a:ea typeface="Arial" pitchFamily="34" charset="-122"/>
+                <a:cs typeface="Arial" pitchFamily="34" charset="-120"/>
+              </a:rPr>
+              <a:t> (signed cross). RIGHT = </a:t>
+            </a:r>
+            <a:pPr algn="l" indent="0" marL="0">
+              <a:lnSpc>
+                <a:spcPts val="1680"/>
+              </a:lnSpc>
+              <a:spcBef>
+                <a:spcPts val="300"/>
+              </a:spcBef>
+              <a:spcAft>
+                <a:spcPts val="300"/>
+              </a:spcAft>
+              <a:buNone/>
+            </a:pPr>
+            <a:r>
+              <a:rPr lang="en-US" sz="1200" dirty="0">
+                <a:solidFill>
+                  <a:srgbClr val="1C2833"/>
+                </a:solidFill>
+                <a:latin typeface="Arial" pitchFamily="34" charset="0"/>
+                <a:ea typeface="Arial" pitchFamily="34" charset="-122"/>
+                <a:cs typeface="Arial" pitchFamily="34" charset="-120"/>
+              </a:rPr>
+              <a:t>−xy</a:t>
+            </a:r>
+            <a:pPr algn="l" indent="0" marL="0">
+              <a:lnSpc>
+                <a:spcPts val="1680"/>
+              </a:lnSpc>
+              <a:spcBef>
+                <a:spcPts val="300"/>
+              </a:spcBef>
+              <a:spcAft>
+                <a:spcPts val="300"/>
+              </a:spcAft>
+              <a:buNone/>
+            </a:pPr>
+            <a:r>
+              <a:rPr lang="en-US" sz="1200" dirty="0">
+                <a:solidFill>
+                  <a:srgbClr val="1C2833"/>
+                </a:solidFill>
+                <a:latin typeface="Arial" pitchFamily="34" charset="0"/>
+                <a:ea typeface="Arial" pitchFamily="34" charset="-122"/>
+                <a:cs typeface="Arial" pitchFamily="34" charset="-120"/>
+              </a:rPr>
+              <a:t> (negative). The negative right part is the sign issue from Day 5.</a:t>
+            </a:r>
+            <a:endParaRPr lang="en-US" sz="1200" dirty="0"/>
+          </a:p>
+        </p:txBody>
+      </p:sp>
+      <p:sp>
+        <p:nvSpPr>
+          <p:cNvPr id="5" name="Text 3"/>
+          <p:cNvSpPr/>
+          <p:nvPr/>
+        </p:nvSpPr>
+        <p:spPr>
+          <a:xfrm>
+            <a:off x="634901" y="1182588"/>
+            <a:ext cx="8102798" cy="731341"/>
+          </a:xfrm>
+          <a:prstGeom prst="rect">
+            <a:avLst/>
+          </a:prstGeom>
+          <a:noFill/>
+          <a:ln/>
+        </p:spPr>
+        <p:txBody>
+          <a:bodyPr wrap="square" lIns="0" tIns="0" rIns="0" bIns="0" rtlCol="0" anchor="t"/>
+          <a:lstStyle/>
+          <a:p>
+            <a:pPr algn="l" marL="342900" indent="-342900">
+              <a:lnSpc>
+                <a:spcPts val="1620"/>
+              </a:lnSpc>
+              <a:spcAft>
+                <a:spcPts val="300"/>
+              </a:spcAft>
+              <a:buSzPct val="100000"/>
+              <a:buChar char="•"/>
+            </a:pPr>
+            <a:r>
+              <a:rPr lang="en-US" sz="1200" b="1" dirty="0">
+                <a:solidFill>
+                  <a:srgbClr val="1C2833"/>
+                </a:solidFill>
+                <a:latin typeface="Arial" pitchFamily="34" charset="0"/>
+                <a:ea typeface="Arial" pitchFamily="34" charset="-122"/>
+                <a:cs typeface="Arial" pitchFamily="34" charset="-120"/>
+              </a:rPr>
+              <a:t>Why the pad-width = zeros in base.</a:t>
+            </a:r>
+            <a:pPr algn="l" indent="0" marL="0">
+              <a:lnSpc>
+                <a:spcPts val="1620"/>
+              </a:lnSpc>
+              <a:spcAft>
+                <a:spcPts val="300"/>
+              </a:spcAft>
+              <a:buNone/>
+            </a:pPr>
+            <a:r>
+              <a:rPr lang="en-US" sz="1200" dirty="0">
+                <a:solidFill>
+                  <a:srgbClr val="1C2833"/>
+                </a:solidFill>
+                <a:latin typeface="Arial" pitchFamily="34" charset="0"/>
+                <a:ea typeface="Arial" pitchFamily="34" charset="-122"/>
+                <a:cs typeface="Arial" pitchFamily="34" charset="-120"/>
+              </a:rPr>
+              <a:t> Because </a:t>
+            </a:r>
+            <a:pPr algn="l" indent="0" marL="0">
+              <a:lnSpc>
+                <a:spcPts val="1620"/>
+              </a:lnSpc>
+              <a:spcAft>
+                <a:spcPts val="300"/>
+              </a:spcAft>
+              <a:buNone/>
+            </a:pPr>
+            <a:r>
+              <a:rPr lang="en-US" sz="1200" dirty="0">
+                <a:solidFill>
+                  <a:srgbClr val="1C2833"/>
+                </a:solidFill>
+                <a:latin typeface="Arial" pitchFamily="34" charset="0"/>
+                <a:ea typeface="Arial" pitchFamily="34" charset="-122"/>
+                <a:cs typeface="Arial" pitchFamily="34" charset="-120"/>
+              </a:rPr>
+              <a:t>B · LEFT + RIGHT</a:t>
+            </a:r>
+            <a:pPr algn="l" indent="0" marL="0">
+              <a:lnSpc>
+                <a:spcPts val="1620"/>
+              </a:lnSpc>
+              <a:spcAft>
+                <a:spcPts val="300"/>
+              </a:spcAft>
+              <a:buNone/>
+            </a:pPr>
+            <a:r>
+              <a:rPr lang="en-US" sz="1200" dirty="0">
+                <a:solidFill>
+                  <a:srgbClr val="1C2833"/>
+                </a:solidFill>
+                <a:latin typeface="Arial" pitchFamily="34" charset="0"/>
+                <a:ea typeface="Arial" pitchFamily="34" charset="-122"/>
+                <a:cs typeface="Arial" pitchFamily="34" charset="-120"/>
+              </a:rPr>
+              <a:t> requires RIGHT to occupy the slots from 0 up to </a:t>
+            </a:r>
+            <a:pPr algn="l" indent="0" marL="0">
+              <a:lnSpc>
+                <a:spcPts val="1620"/>
+              </a:lnSpc>
+              <a:spcAft>
+                <a:spcPts val="300"/>
+              </a:spcAft>
+              <a:buNone/>
+            </a:pPr>
+            <a:r>
+              <a:rPr lang="en-US" sz="1200" dirty="0">
+                <a:solidFill>
+                  <a:srgbClr val="1C2833"/>
+                </a:solidFill>
+                <a:latin typeface="Arial" pitchFamily="34" charset="0"/>
+                <a:ea typeface="Arial" pitchFamily="34" charset="-122"/>
+                <a:cs typeface="Arial" pitchFamily="34" charset="-120"/>
+              </a:rPr>
+              <a:t>B − 1</a:t>
+            </a:r>
+            <a:pPr algn="l" indent="0" marL="0">
+              <a:lnSpc>
+                <a:spcPts val="1620"/>
+              </a:lnSpc>
+              <a:spcAft>
+                <a:spcPts val="300"/>
+              </a:spcAft>
+              <a:buNone/>
+            </a:pPr>
+            <a:r>
+              <a:rPr lang="en-US" sz="1200" dirty="0">
+                <a:solidFill>
+                  <a:srgbClr val="1C2833"/>
+                </a:solidFill>
+                <a:latin typeface="Arial" pitchFamily="34" charset="0"/>
+                <a:ea typeface="Arial" pitchFamily="34" charset="-122"/>
+                <a:cs typeface="Arial" pitchFamily="34" charset="-120"/>
+              </a:rPr>
+              <a:t>. If B = 100, RIGHT is at most a 2-digit number; if it overflows to 100 or more, the overflow rolls into LEFT. That's the "carry overflow" rule from Day 3.</a:t>
+            </a:r>
+            <a:endParaRPr lang="en-US" sz="1200" dirty="0"/>
+          </a:p>
+        </p:txBody>
+      </p:sp>
+      <p:sp>
+        <p:nvSpPr>
+          <p:cNvPr id="6" name="Text 4"/>
+          <p:cNvSpPr/>
+          <p:nvPr/>
+        </p:nvSpPr>
+        <p:spPr>
+          <a:xfrm>
+            <a:off x="406301" y="4434929"/>
+            <a:ext cx="8498026" cy="213271"/>
+          </a:xfrm>
+          <a:prstGeom prst="rect">
+            <a:avLst/>
+          </a:prstGeom>
+          <a:noFill/>
+          <a:ln/>
+        </p:spPr>
+        <p:txBody>
+          <a:bodyPr wrap="square" lIns="0" tIns="0" rIns="0" bIns="0" rtlCol="0" anchor="t"/>
+          <a:lstStyle/>
+          <a:p>
+            <a:pPr algn="l" indent="0" marL="0">
+              <a:lnSpc>
+                <a:spcPts val="1680"/>
+              </a:lnSpc>
+              <a:spcBef>
+                <a:spcPts val="300"/>
+              </a:spcBef>
+              <a:spcAft>
+                <a:spcPts val="300"/>
+              </a:spcAft>
+              <a:buNone/>
+            </a:pPr>
+            <a:r>
+              <a:rPr lang="en-US" sz="1200" dirty="0">
+                <a:solidFill>
+                  <a:srgbClr val="1C2833"/>
+                </a:solidFill>
+                <a:latin typeface="Arial" pitchFamily="34" charset="0"/>
+                <a:ea typeface="Arial" pitchFamily="34" charset="-122"/>
+                <a:cs typeface="Arial" pitchFamily="34" charset="-120"/>
+              </a:rPr>
+              <a:t>Middle ·  · IKS Curriculum</a:t>
+            </a:r>
+            <a:endParaRPr lang="en-US" sz="1200" dirty="0"/>
+          </a:p>
+        </p:txBody>
+      </p:sp>
+    </p:spTree>
+  </p:cSld>
+  <p:clrMapOvr>
+    <a:masterClrMapping/>
+  </p:clrMapOvr>
+</p:sld>
+</file>
+
+<file path=ppt/slides/slide14.xml><?xml version="1.0" encoding="utf-8"?>
+<p:sld xmlns:a="http://schemas.openxmlformats.org/drawingml/2006/main" xmlns:r="http://schemas.openxmlformats.org/officeDocument/2006/relationships" xmlns:p="http://schemas.openxmlformats.org/presentationml/2006/main">
+  <p:cSld name="Slide 14">
+    <p:bg>
+      <p:bgPr>
+        <a:solidFill>
+          <a:srgbClr val="FFFFFF"/>
+        </a:solidFill>
+      </p:bgPr>
+    </p:bg>
+    <p:spTree>
+      <p:nvGrpSpPr>
+        <p:cNvPr id="1" name=""/>
+        <p:cNvGrpSpPr/>
+        <p:nvPr/>
+      </p:nvGrpSpPr>
+      <p:grpSpPr>
+        <a:xfrm>
+          <a:off x="0" y="0"/>
+          <a:ext cx="0" cy="0"/>
+          <a:chOff x="0" y="0"/>
+          <a:chExt cx="0" cy="0"/>
+        </a:xfrm>
+      </p:grpSpPr>
+      <p:sp>
+        <p:nvSpPr>
+          <p:cNvPr id="2" name="Text 0"/>
+          <p:cNvSpPr/>
+          <p:nvPr/>
+        </p:nvSpPr>
+        <p:spPr>
+          <a:xfrm>
+            <a:off x="0" y="0"/>
+            <a:ext cx="9144000" cy="101501"/>
+          </a:xfrm>
+          <a:prstGeom prst="rect">
+            <a:avLst/>
+          </a:prstGeom>
+          <a:solidFill>
+            <a:srgbClr val="277884"/>
+          </a:solidFill>
+          <a:ln/>
+        </p:spPr>
+        <p:txBody>
+          <a:bodyPr wrap="square" rtlCol="0" anchor="ctr"/>
+          <a:lstStyle/>
+          <a:p>
+            <a:pPr indent="0" marL="0">
+              <a:buNone/>
+            </a:pPr>
+            <a:endParaRPr lang="en-US" dirty="0"/>
+          </a:p>
+        </p:txBody>
+      </p:sp>
+      <p:sp>
+        <p:nvSpPr>
+          <p:cNvPr id="3" name="Text 1"/>
+          <p:cNvSpPr/>
+          <p:nvPr/>
+        </p:nvSpPr>
+        <p:spPr>
+          <a:xfrm>
+            <a:off x="406301" y="457051"/>
+            <a:ext cx="8498026" cy="274290"/>
+          </a:xfrm>
+          <a:prstGeom prst="rect">
+            <a:avLst/>
+          </a:prstGeom>
+          <a:noFill/>
+          <a:ln/>
+        </p:spPr>
+        <p:txBody>
+          <a:bodyPr wrap="square" lIns="0" tIns="0" rIns="0" bIns="0" rtlCol="0" anchor="t"/>
+          <a:lstStyle/>
+          <a:p>
+            <a:pPr algn="l" indent="0" marL="0">
+              <a:lnSpc>
+                <a:spcPts val="2160"/>
+              </a:lnSpc>
+              <a:spcBef>
+                <a:spcPts val="600"/>
+              </a:spcBef>
+              <a:spcAft>
+                <a:spcPts val="800"/>
+              </a:spcAft>
+              <a:buNone/>
+            </a:pPr>
+            <a:r>
+              <a:rPr lang="en-US" sz="1800" b="1" dirty="0">
+                <a:solidFill>
+                  <a:srgbClr val="FE4447"/>
+                </a:solidFill>
+                <a:latin typeface="Georgia" pitchFamily="34" charset="0"/>
+                <a:ea typeface="Georgia" pitchFamily="34" charset="-122"/>
+                <a:cs typeface="Georgia" pitchFamily="34" charset="-120"/>
+              </a:rPr>
+              <a:t>Activity (15 min) — Explain to a friend</a:t>
+            </a:r>
+            <a:endParaRPr lang="en-US" sz="1800" dirty="0"/>
+          </a:p>
+        </p:txBody>
+      </p:sp>
+      <p:sp>
+        <p:nvSpPr>
+          <p:cNvPr id="4" name="Text 2"/>
+          <p:cNvSpPr/>
+          <p:nvPr/>
+        </p:nvSpPr>
+        <p:spPr>
+          <a:xfrm>
+            <a:off x="634901" y="883593"/>
+            <a:ext cx="8102798" cy="281880"/>
+          </a:xfrm>
+          <a:prstGeom prst="rect">
+            <a:avLst/>
+          </a:prstGeom>
+          <a:noFill/>
+          <a:ln/>
+        </p:spPr>
+        <p:txBody>
+          <a:bodyPr wrap="square" lIns="0" tIns="0" rIns="0" bIns="0" rtlCol="0" anchor="t"/>
+          <a:lstStyle/>
+          <a:p>
+            <a:pPr algn="l" marL="342900" indent="-342900">
+              <a:lnSpc>
+                <a:spcPts val="1620"/>
+              </a:lnSpc>
+              <a:spcAft>
+                <a:spcPts val="300"/>
+              </a:spcAft>
+              <a:buSzPct val="100000"/>
+              <a:buChar char="•"/>
+            </a:pPr>
+            <a:r>
+              <a:rPr lang="en-US" sz="1200" dirty="0">
+                <a:solidFill>
+                  <a:srgbClr val="1C2833"/>
+                </a:solidFill>
+                <a:latin typeface="Arial" pitchFamily="34" charset="0"/>
+                <a:ea typeface="Arial" pitchFamily="34" charset="-122"/>
+                <a:cs typeface="Arial" pitchFamily="34" charset="-120"/>
+              </a:rPr>
+              <a:t>Worksheet prompt:</a:t>
+            </a:r>
+            <a:endParaRPr lang="en-US" sz="1200" dirty="0"/>
+          </a:p>
+        </p:txBody>
+      </p:sp>
+      <p:sp>
+        <p:nvSpPr>
+          <p:cNvPr id="5" name="Text 3"/>
+          <p:cNvSpPr/>
+          <p:nvPr/>
+        </p:nvSpPr>
+        <p:spPr>
+          <a:xfrm>
+            <a:off x="406301" y="1266974"/>
+            <a:ext cx="8331398" cy="842963"/>
+          </a:xfrm>
+          <a:prstGeom prst="rect">
+            <a:avLst/>
+          </a:prstGeom>
+          <a:solidFill>
+            <a:srgbClr val="F4F8F9"/>
+          </a:solidFill>
+          <a:ln/>
+        </p:spPr>
+        <p:txBody>
+          <a:bodyPr wrap="square" rtlCol="0" anchor="ctr"/>
+          <a:lstStyle/>
+          <a:p>
+            <a:pPr indent="0" marL="0">
+              <a:buNone/>
+            </a:pPr>
+            <a:endParaRPr lang="en-US" dirty="0"/>
+          </a:p>
+        </p:txBody>
+      </p:sp>
+      <p:sp>
+        <p:nvSpPr>
+          <p:cNvPr id="6" name="Shape 4"/>
+          <p:cNvSpPr/>
+          <p:nvPr/>
+        </p:nvSpPr>
+        <p:spPr>
+          <a:xfrm>
+            <a:off x="434876" y="1266974"/>
+            <a:ext cx="0" cy="842962"/>
+          </a:xfrm>
+          <a:prstGeom prst="line">
+            <a:avLst/>
+          </a:prstGeom>
+          <a:noFill/>
+          <a:ln w="57150">
+            <a:solidFill>
+              <a:srgbClr val="FE4447"/>
+            </a:solidFill>
+            <a:prstDash val="solid"/>
+          </a:ln>
+        </p:spPr>
+      </p:sp>
+      <p:sp>
+        <p:nvSpPr>
+          <p:cNvPr id="7" name="Text 5"/>
+          <p:cNvSpPr/>
+          <p:nvPr/>
+        </p:nvSpPr>
+        <p:spPr>
+          <a:xfrm>
+            <a:off x="692051" y="1457474"/>
+            <a:ext cx="7973389" cy="461963"/>
+          </a:xfrm>
+          <a:prstGeom prst="rect">
+            <a:avLst/>
+          </a:prstGeom>
+          <a:noFill/>
+          <a:ln/>
+        </p:spPr>
+        <p:txBody>
+          <a:bodyPr wrap="square" lIns="0" tIns="0" rIns="0" bIns="0" rtlCol="0" anchor="t"/>
+          <a:lstStyle/>
+          <a:p>
+            <a:pPr algn="l" indent="0" marL="0">
+              <a:lnSpc>
+                <a:spcPts val="1820"/>
+              </a:lnSpc>
+              <a:spcBef>
+                <a:spcPts val="300"/>
+              </a:spcBef>
+              <a:spcAft>
+                <a:spcPts val="300"/>
+              </a:spcAft>
+              <a:buNone/>
+            </a:pPr>
+            <a:r>
+              <a:rPr lang="en-US" sz="1300" dirty="0">
+                <a:solidFill>
+                  <a:srgbClr val="1C2833"/>
+                </a:solidFill>
+                <a:latin typeface="Georgia" pitchFamily="34" charset="0"/>
+                <a:ea typeface="Georgia" pitchFamily="34" charset="-122"/>
+                <a:cs typeface="Georgia" pitchFamily="34" charset="-120"/>
+              </a:rPr>
+              <a:t>Imagine your Grade 4 cousin asks: </a:t>
+            </a:r>
+            <a:pPr algn="l" indent="0" marL="0">
+              <a:lnSpc>
+                <a:spcPts val="1820"/>
+              </a:lnSpc>
+              <a:spcBef>
+                <a:spcPts val="300"/>
+              </a:spcBef>
+              <a:spcAft>
+                <a:spcPts val="300"/>
+              </a:spcAft>
+              <a:buNone/>
+            </a:pPr>
+            <a:r>
+              <a:rPr lang="en-US" sz="1300" i="1" dirty="0">
+                <a:solidFill>
+                  <a:srgbClr val="1C2833"/>
+                </a:solidFill>
+                <a:latin typeface="Georgia" pitchFamily="34" charset="0"/>
+                <a:ea typeface="Georgia" pitchFamily="34" charset="-122"/>
+                <a:cs typeface="Georgia" pitchFamily="34" charset="-120"/>
+              </a:rPr>
+              <a:t>"Why does that Nikhilam trick work? Is it magic?"</a:t>
+            </a:r>
+            <a:pPr algn="l" indent="0" marL="0">
+              <a:lnSpc>
+                <a:spcPts val="1820"/>
+              </a:lnSpc>
+              <a:spcBef>
+                <a:spcPts val="300"/>
+              </a:spcBef>
+              <a:spcAft>
+                <a:spcPts val="300"/>
+              </a:spcAft>
+              <a:buNone/>
+            </a:pPr>
+            <a:r>
+              <a:rPr lang="en-US" sz="1300" dirty="0">
+                <a:solidFill>
+                  <a:srgbClr val="1C2833"/>
+                </a:solidFill>
+                <a:latin typeface="Georgia" pitchFamily="34" charset="0"/>
+                <a:ea typeface="Georgia" pitchFamily="34" charset="-122"/>
+                <a:cs typeface="Georgia" pitchFamily="34" charset="-120"/>
+              </a:rPr>
+              <a:t> In 5–7 sentences, explain why it's NOT magic. Use the words </a:t>
+            </a:r>
+            <a:pPr algn="l" indent="0" marL="0">
+              <a:lnSpc>
+                <a:spcPts val="1820"/>
+              </a:lnSpc>
+              <a:spcBef>
+                <a:spcPts val="300"/>
+              </a:spcBef>
+              <a:spcAft>
+                <a:spcPts val="300"/>
+              </a:spcAft>
+              <a:buNone/>
+            </a:pPr>
+            <a:r>
+              <a:rPr lang="en-US" sz="1300" b="1" i="1" dirty="0">
+                <a:solidFill>
+                  <a:srgbClr val="1C2833"/>
+                </a:solidFill>
+                <a:latin typeface="Georgia" pitchFamily="34" charset="0"/>
+                <a:ea typeface="Georgia" pitchFamily="34" charset="-122"/>
+                <a:cs typeface="Georgia" pitchFamily="34" charset="-120"/>
+              </a:rPr>
+              <a:t>base</a:t>
+            </a:r>
+            <a:pPr algn="l" indent="0" marL="0">
+              <a:lnSpc>
+                <a:spcPts val="1820"/>
+              </a:lnSpc>
+              <a:spcBef>
+                <a:spcPts val="300"/>
+              </a:spcBef>
+              <a:spcAft>
+                <a:spcPts val="300"/>
+              </a:spcAft>
+              <a:buNone/>
+            </a:pPr>
+            <a:r>
+              <a:rPr lang="en-US" sz="1300" dirty="0">
+                <a:solidFill>
+                  <a:srgbClr val="1C2833"/>
+                </a:solidFill>
+                <a:latin typeface="Georgia" pitchFamily="34" charset="0"/>
+                <a:ea typeface="Georgia" pitchFamily="34" charset="-122"/>
+                <a:cs typeface="Georgia" pitchFamily="34" charset="-120"/>
+              </a:rPr>
+              <a:t>, </a:t>
+            </a:r>
+            <a:pPr algn="l" indent="0" marL="0">
+              <a:lnSpc>
+                <a:spcPts val="1820"/>
+              </a:lnSpc>
+              <a:spcBef>
+                <a:spcPts val="300"/>
+              </a:spcBef>
+              <a:spcAft>
+                <a:spcPts val="300"/>
+              </a:spcAft>
+              <a:buNone/>
+            </a:pPr>
+            <a:r>
+              <a:rPr lang="en-US" sz="1300" b="1" i="1" dirty="0">
+                <a:solidFill>
+                  <a:srgbClr val="1C2833"/>
+                </a:solidFill>
+                <a:latin typeface="Georgia" pitchFamily="34" charset="0"/>
+                <a:ea typeface="Georgia" pitchFamily="34" charset="-122"/>
+                <a:cs typeface="Georgia" pitchFamily="34" charset="-120"/>
+              </a:rPr>
+              <a:t>deficit</a:t>
+            </a:r>
+            <a:pPr algn="l" indent="0" marL="0">
+              <a:lnSpc>
+                <a:spcPts val="1820"/>
+              </a:lnSpc>
+              <a:spcBef>
+                <a:spcPts val="300"/>
+              </a:spcBef>
+              <a:spcAft>
+                <a:spcPts val="300"/>
+              </a:spcAft>
+              <a:buNone/>
+            </a:pPr>
+            <a:r>
+              <a:rPr lang="en-US" sz="1300" dirty="0">
+                <a:solidFill>
+                  <a:srgbClr val="1C2833"/>
+                </a:solidFill>
+                <a:latin typeface="Georgia" pitchFamily="34" charset="0"/>
+                <a:ea typeface="Georgia" pitchFamily="34" charset="-122"/>
+                <a:cs typeface="Georgia" pitchFamily="34" charset="-120"/>
+              </a:rPr>
+              <a:t>, and </a:t>
+            </a:r>
+            <a:pPr algn="l" indent="0" marL="0">
+              <a:lnSpc>
+                <a:spcPts val="1820"/>
+              </a:lnSpc>
+              <a:spcBef>
+                <a:spcPts val="300"/>
+              </a:spcBef>
+              <a:spcAft>
+                <a:spcPts val="300"/>
+              </a:spcAft>
+              <a:buNone/>
+            </a:pPr>
+            <a:r>
+              <a:rPr lang="en-US" sz="1300" b="1" i="1" dirty="0">
+                <a:solidFill>
+                  <a:srgbClr val="1C2833"/>
+                </a:solidFill>
+                <a:latin typeface="Georgia" pitchFamily="34" charset="0"/>
+                <a:ea typeface="Georgia" pitchFamily="34" charset="-122"/>
+                <a:cs typeface="Georgia" pitchFamily="34" charset="-120"/>
+              </a:rPr>
+              <a:t>algebra</a:t>
+            </a:r>
+            <a:pPr algn="l" indent="0" marL="0">
+              <a:lnSpc>
+                <a:spcPts val="1820"/>
+              </a:lnSpc>
+              <a:spcBef>
+                <a:spcPts val="300"/>
+              </a:spcBef>
+              <a:spcAft>
+                <a:spcPts val="300"/>
+              </a:spcAft>
+              <a:buNone/>
+            </a:pPr>
+            <a:r>
+              <a:rPr lang="en-US" sz="1300" dirty="0">
+                <a:solidFill>
+                  <a:srgbClr val="1C2833"/>
+                </a:solidFill>
+                <a:latin typeface="Georgia" pitchFamily="34" charset="0"/>
+                <a:ea typeface="Georgia" pitchFamily="34" charset="-122"/>
+                <a:cs typeface="Georgia" pitchFamily="34" charset="-120"/>
+              </a:rPr>
+              <a:t>.</a:t>
+            </a:r>
+            <a:endParaRPr lang="en-US" sz="1300" dirty="0"/>
+          </a:p>
+        </p:txBody>
+      </p:sp>
+      <p:sp>
+        <p:nvSpPr>
+          <p:cNvPr id="8" name="Text 6"/>
+          <p:cNvSpPr/>
+          <p:nvPr/>
+        </p:nvSpPr>
+        <p:spPr>
+          <a:xfrm>
+            <a:off x="634901" y="2211437"/>
+            <a:ext cx="8102798" cy="487561"/>
+          </a:xfrm>
+          <a:prstGeom prst="rect">
+            <a:avLst/>
+          </a:prstGeom>
+          <a:noFill/>
+          <a:ln/>
+        </p:spPr>
+        <p:txBody>
+          <a:bodyPr wrap="square" lIns="0" tIns="0" rIns="0" bIns="0" rtlCol="0" anchor="t"/>
+          <a:lstStyle/>
+          <a:p>
+            <a:pPr algn="l" marL="342900" indent="-342900">
+              <a:lnSpc>
+                <a:spcPts val="1620"/>
+              </a:lnSpc>
+              <a:spcAft>
+                <a:spcPts val="300"/>
+              </a:spcAft>
+              <a:buSzPct val="100000"/>
+              <a:buChar char="•"/>
+            </a:pPr>
+            <a:r>
+              <a:rPr lang="en-US" sz="1200" dirty="0">
+                <a:solidFill>
+                  <a:srgbClr val="1C2833"/>
+                </a:solidFill>
+                <a:latin typeface="Arial" pitchFamily="34" charset="0"/>
+                <a:ea typeface="Arial" pitchFamily="34" charset="-122"/>
+                <a:cs typeface="Arial" pitchFamily="34" charset="-120"/>
+              </a:rPr>
+              <a:t>10 min individual writing. 5 min pair-sharing: read your paragraph to your partner; they tell you one part that's clear and one part that's unclear.</a:t>
+            </a:r>
+            <a:endParaRPr lang="en-US" sz="1200" dirty="0"/>
+          </a:p>
+        </p:txBody>
+      </p:sp>
+      <p:sp>
+        <p:nvSpPr>
+          <p:cNvPr id="9" name="Text 7"/>
+          <p:cNvSpPr/>
+          <p:nvPr/>
+        </p:nvSpPr>
+        <p:spPr>
+          <a:xfrm>
+            <a:off x="406301" y="4434929"/>
+            <a:ext cx="8498026" cy="213271"/>
+          </a:xfrm>
+          <a:prstGeom prst="rect">
+            <a:avLst/>
+          </a:prstGeom>
+          <a:noFill/>
+          <a:ln/>
+        </p:spPr>
+        <p:txBody>
+          <a:bodyPr wrap="square" lIns="0" tIns="0" rIns="0" bIns="0" rtlCol="0" anchor="t"/>
+          <a:lstStyle/>
+          <a:p>
+            <a:pPr algn="l" indent="0" marL="0">
+              <a:lnSpc>
+                <a:spcPts val="1680"/>
+              </a:lnSpc>
+              <a:spcBef>
+                <a:spcPts val="300"/>
+              </a:spcBef>
+              <a:spcAft>
+                <a:spcPts val="300"/>
+              </a:spcAft>
+              <a:buNone/>
+            </a:pPr>
+            <a:r>
+              <a:rPr lang="en-US" sz="1200" dirty="0">
+                <a:solidFill>
+                  <a:srgbClr val="1C2833"/>
+                </a:solidFill>
+                <a:latin typeface="Arial" pitchFamily="34" charset="0"/>
+                <a:ea typeface="Arial" pitchFamily="34" charset="-122"/>
+                <a:cs typeface="Arial" pitchFamily="34" charset="-120"/>
+              </a:rPr>
+              <a:t>Middle ·  · IKS Curriculum</a:t>
+            </a:r>
+            <a:endParaRPr lang="en-US" sz="1200" dirty="0"/>
+          </a:p>
+        </p:txBody>
+      </p:sp>
+    </p:spTree>
+  </p:cSld>
+  <p:clrMapOvr>
+    <a:masterClrMapping/>
+  </p:clrMapOvr>
+</p:sld>
+</file>
+
+<file path=ppt/slides/slide15.xml><?xml version="1.0" encoding="utf-8"?>
+<p:sld xmlns:a="http://schemas.openxmlformats.org/drawingml/2006/main" xmlns:r="http://schemas.openxmlformats.org/officeDocument/2006/relationships" xmlns:p="http://schemas.openxmlformats.org/presentationml/2006/main">
+  <p:cSld name="Slide 15">
+    <p:bg>
+      <p:bgPr>
+        <a:solidFill>
+          <a:srgbClr val="FFFFFF"/>
+        </a:solidFill>
+      </p:bgPr>
+    </p:bg>
+    <p:spTree>
+      <p:nvGrpSpPr>
+        <p:cNvPr id="1" name=""/>
+        <p:cNvGrpSpPr/>
+        <p:nvPr/>
+      </p:nvGrpSpPr>
+      <p:grpSpPr>
+        <a:xfrm>
+          <a:off x="0" y="0"/>
+          <a:ext cx="0" cy="0"/>
+          <a:chOff x="0" y="0"/>
+          <a:chExt cx="0" cy="0"/>
+        </a:xfrm>
+      </p:grpSpPr>
+      <p:sp>
+        <p:nvSpPr>
+          <p:cNvPr id="2" name="Text 0"/>
+          <p:cNvSpPr/>
+          <p:nvPr/>
+        </p:nvSpPr>
+        <p:spPr>
+          <a:xfrm>
+            <a:off x="0" y="0"/>
+            <a:ext cx="9144000" cy="101501"/>
+          </a:xfrm>
+          <a:prstGeom prst="rect">
+            <a:avLst/>
+          </a:prstGeom>
+          <a:solidFill>
+            <a:srgbClr val="277884"/>
+          </a:solidFill>
+          <a:ln/>
+        </p:spPr>
+        <p:txBody>
+          <a:bodyPr wrap="square" rtlCol="0" anchor="ctr"/>
+          <a:lstStyle/>
+          <a:p>
+            <a:pPr indent="0" marL="0">
+              <a:buNone/>
+            </a:pPr>
+            <a:endParaRPr lang="en-US" dirty="0"/>
+          </a:p>
+        </p:txBody>
+      </p:sp>
+      <p:sp>
+        <p:nvSpPr>
+          <p:cNvPr id="3" name="Text 1"/>
+          <p:cNvSpPr/>
+          <p:nvPr/>
+        </p:nvSpPr>
+        <p:spPr>
+          <a:xfrm>
+            <a:off x="406301" y="457051"/>
+            <a:ext cx="8498026" cy="274290"/>
+          </a:xfrm>
+          <a:prstGeom prst="rect">
+            <a:avLst/>
+          </a:prstGeom>
+          <a:noFill/>
+          <a:ln/>
+        </p:spPr>
+        <p:txBody>
+          <a:bodyPr wrap="square" lIns="0" tIns="0" rIns="0" bIns="0" rtlCol="0" anchor="t"/>
+          <a:lstStyle/>
+          <a:p>
+            <a:pPr algn="l" indent="0" marL="0">
+              <a:lnSpc>
+                <a:spcPts val="2160"/>
+              </a:lnSpc>
+              <a:spcBef>
+                <a:spcPts val="600"/>
+              </a:spcBef>
+              <a:spcAft>
+                <a:spcPts val="800"/>
+              </a:spcAft>
+              <a:buNone/>
+            </a:pPr>
+            <a:r>
+              <a:rPr lang="en-US" sz="1800" b="1" dirty="0">
+                <a:solidFill>
+                  <a:srgbClr val="FE4447"/>
+                </a:solidFill>
+                <a:latin typeface="Georgia" pitchFamily="34" charset="0"/>
+                <a:ea typeface="Georgia" pitchFamily="34" charset="-122"/>
+                <a:cs typeface="Georgia" pitchFamily="34" charset="-120"/>
+              </a:rPr>
+              <a:t>Wrap-up (5 min)</a:t>
+            </a:r>
+            <a:endParaRPr lang="en-US" sz="1800" dirty="0"/>
+          </a:p>
+        </p:txBody>
+      </p:sp>
+      <p:sp>
+        <p:nvSpPr>
+          <p:cNvPr id="4" name="Text 2"/>
+          <p:cNvSpPr/>
+          <p:nvPr/>
+        </p:nvSpPr>
+        <p:spPr>
+          <a:xfrm>
+            <a:off x="634901" y="883593"/>
+            <a:ext cx="8102798" cy="525661"/>
+          </a:xfrm>
+          <a:prstGeom prst="rect">
+            <a:avLst/>
+          </a:prstGeom>
+          <a:noFill/>
+          <a:ln/>
+        </p:spPr>
+        <p:txBody>
+          <a:bodyPr wrap="square" lIns="0" tIns="0" rIns="0" bIns="0" rtlCol="0" anchor="t"/>
+          <a:lstStyle/>
+          <a:p>
+            <a:pPr algn="l" marL="342900" indent="-342900">
+              <a:lnSpc>
+                <a:spcPts val="1620"/>
+              </a:lnSpc>
+              <a:spcAft>
+                <a:spcPts val="300"/>
+              </a:spcAft>
+              <a:buSzPct val="100000"/>
+              <a:buChar char="•"/>
+            </a:pPr>
+            <a:r>
+              <a:rPr lang="en-US" sz="1200" dirty="0">
+                <a:solidFill>
+                  <a:srgbClr val="1C2833"/>
+                </a:solidFill>
+                <a:latin typeface="Arial" pitchFamily="34" charset="0"/>
+                <a:ea typeface="Arial" pitchFamily="34" charset="-122"/>
+                <a:cs typeface="Arial" pitchFamily="34" charset="-120"/>
+              </a:rPr>
+              <a:t>Read aloud one strong paragraph (with permission).</a:t>
+            </a:r>
+            <a:endParaRPr lang="en-US" sz="1200" dirty="0"/>
+          </a:p>
+          <a:p>
+            <a:pPr algn="l" marL="342900" indent="-342900">
+              <a:lnSpc>
+                <a:spcPts val="1620"/>
+              </a:lnSpc>
+              <a:spcAft>
+                <a:spcPts val="300"/>
+              </a:spcAft>
+              <a:buSzPct val="100000"/>
+              <a:buChar char="•"/>
+            </a:pPr>
+            <a:r>
+              <a:rPr lang="en-US" sz="1200" dirty="0">
+                <a:solidFill>
+                  <a:srgbClr val="1C2833"/>
+                </a:solidFill>
+                <a:latin typeface="Arial" pitchFamily="34" charset="0"/>
+                <a:ea typeface="Arial" pitchFamily="34" charset="-122"/>
+                <a:cs typeface="Arial" pitchFamily="34" charset="-120"/>
+              </a:rPr>
+              <a:t>The sūtra connection: write on the board:</a:t>
+            </a:r>
+            <a:endParaRPr lang="en-US" sz="1200" dirty="0"/>
+          </a:p>
+        </p:txBody>
+      </p:sp>
+      <p:sp>
+        <p:nvSpPr>
+          <p:cNvPr id="5" name="Text 3"/>
+          <p:cNvSpPr/>
+          <p:nvPr/>
+        </p:nvSpPr>
+        <p:spPr>
+          <a:xfrm>
+            <a:off x="406301" y="1510754"/>
+            <a:ext cx="8331398" cy="1073944"/>
+          </a:xfrm>
+          <a:prstGeom prst="rect">
+            <a:avLst/>
+          </a:prstGeom>
+          <a:solidFill>
+            <a:srgbClr val="F4F8F9"/>
+          </a:solidFill>
+          <a:ln/>
+        </p:spPr>
+        <p:txBody>
+          <a:bodyPr wrap="square" rtlCol="0" anchor="ctr"/>
+          <a:lstStyle/>
+          <a:p>
+            <a:pPr indent="0" marL="0">
+              <a:buNone/>
+            </a:pPr>
+            <a:endParaRPr lang="en-US" dirty="0"/>
+          </a:p>
+        </p:txBody>
+      </p:sp>
+      <p:sp>
+        <p:nvSpPr>
+          <p:cNvPr id="6" name="Shape 4"/>
+          <p:cNvSpPr/>
+          <p:nvPr/>
+        </p:nvSpPr>
+        <p:spPr>
+          <a:xfrm>
+            <a:off x="434876" y="1510754"/>
+            <a:ext cx="0" cy="1073944"/>
+          </a:xfrm>
+          <a:prstGeom prst="line">
+            <a:avLst/>
+          </a:prstGeom>
+          <a:noFill/>
+          <a:ln w="57150">
+            <a:solidFill>
+              <a:srgbClr val="FE4447"/>
+            </a:solidFill>
+            <a:prstDash val="solid"/>
+          </a:ln>
+        </p:spPr>
+      </p:sp>
+      <p:sp>
+        <p:nvSpPr>
+          <p:cNvPr id="7" name="Text 5"/>
+          <p:cNvSpPr/>
+          <p:nvPr/>
+        </p:nvSpPr>
+        <p:spPr>
+          <a:xfrm>
+            <a:off x="692051" y="1701254"/>
+            <a:ext cx="7973389" cy="692944"/>
+          </a:xfrm>
+          <a:prstGeom prst="rect">
+            <a:avLst/>
+          </a:prstGeom>
+          <a:noFill/>
+          <a:ln/>
+        </p:spPr>
+        <p:txBody>
+          <a:bodyPr wrap="square" lIns="0" tIns="0" rIns="0" bIns="0" rtlCol="0" anchor="t"/>
+          <a:lstStyle/>
+          <a:p>
+            <a:pPr algn="l" indent="0" marL="0">
+              <a:lnSpc>
+                <a:spcPts val="1820"/>
+              </a:lnSpc>
+              <a:spcBef>
+                <a:spcPts val="300"/>
+              </a:spcBef>
+              <a:spcAft>
+                <a:spcPts val="300"/>
+              </a:spcAft>
+              <a:buNone/>
+            </a:pPr>
+            <a:r>
+              <a:rPr lang="en-US" sz="1300" dirty="0">
+                <a:solidFill>
+                  <a:srgbClr val="1C2833"/>
+                </a:solidFill>
+                <a:latin typeface="Georgia" pitchFamily="34" charset="0"/>
+                <a:ea typeface="Georgia" pitchFamily="34" charset="-122"/>
+                <a:cs typeface="Georgia" pitchFamily="34" charset="-120"/>
+              </a:rPr>
+              <a:t>"</a:t>
+            </a:r>
+            <a:pPr algn="l" indent="0" marL="0">
+              <a:lnSpc>
+                <a:spcPts val="1820"/>
+              </a:lnSpc>
+              <a:spcBef>
+                <a:spcPts val="300"/>
+              </a:spcBef>
+              <a:spcAft>
+                <a:spcPts val="300"/>
+              </a:spcAft>
+              <a:buNone/>
+            </a:pPr>
+            <a:r>
+              <a:rPr lang="en-US" sz="1300" i="1" dirty="0">
+                <a:solidFill>
+                  <a:srgbClr val="1C2833"/>
+                </a:solidFill>
+                <a:latin typeface="Georgia" pitchFamily="34" charset="0"/>
+                <a:ea typeface="Georgia" pitchFamily="34" charset="-122"/>
+                <a:cs typeface="Georgia" pitchFamily="34" charset="-120"/>
+              </a:rPr>
+              <a:t>Nikhilam Navataścaramaṁ Daśataḥ</a:t>
+            </a:r>
+            <a:pPr algn="l" indent="0" marL="0">
+              <a:lnSpc>
+                <a:spcPts val="1820"/>
+              </a:lnSpc>
+              <a:spcBef>
+                <a:spcPts val="300"/>
+              </a:spcBef>
+              <a:spcAft>
+                <a:spcPts val="300"/>
+              </a:spcAft>
+              <a:buNone/>
+            </a:pPr>
+            <a:r>
+              <a:rPr lang="en-US" sz="1300" dirty="0">
+                <a:solidFill>
+                  <a:srgbClr val="1C2833"/>
+                </a:solidFill>
+                <a:latin typeface="Georgia" pitchFamily="34" charset="0"/>
+                <a:ea typeface="Georgia" pitchFamily="34" charset="-122"/>
+                <a:cs typeface="Georgia" pitchFamily="34" charset="-120"/>
+              </a:rPr>
+              <a:t>" — "all from 9 and the last from 10" — is the rule for computing the </a:t>
+            </a:r>
+            <a:pPr algn="l" indent="0" marL="0">
+              <a:lnSpc>
+                <a:spcPts val="1820"/>
+              </a:lnSpc>
+              <a:spcBef>
+                <a:spcPts val="300"/>
+              </a:spcBef>
+              <a:spcAft>
+                <a:spcPts val="300"/>
+              </a:spcAft>
+              <a:buNone/>
+            </a:pPr>
+            <a:r>
+              <a:rPr lang="en-US" sz="1300" b="1" i="1" dirty="0">
+                <a:solidFill>
+                  <a:srgbClr val="1C2833"/>
+                </a:solidFill>
+                <a:latin typeface="Georgia" pitchFamily="34" charset="0"/>
+                <a:ea typeface="Georgia" pitchFamily="34" charset="-122"/>
+                <a:cs typeface="Georgia" pitchFamily="34" charset="-120"/>
+              </a:rPr>
+              <a:t>deficit</a:t>
+            </a:r>
+            <a:pPr algn="l" indent="0" marL="0">
+              <a:lnSpc>
+                <a:spcPts val="1820"/>
+              </a:lnSpc>
+              <a:spcBef>
+                <a:spcPts val="300"/>
+              </a:spcBef>
+              <a:spcAft>
+                <a:spcPts val="300"/>
+              </a:spcAft>
+              <a:buNone/>
+            </a:pPr>
+            <a:r>
+              <a:rPr lang="en-US" sz="1300" dirty="0">
+                <a:solidFill>
+                  <a:srgbClr val="1C2833"/>
+                </a:solidFill>
+                <a:latin typeface="Georgia" pitchFamily="34" charset="0"/>
+                <a:ea typeface="Georgia" pitchFamily="34" charset="-122"/>
+                <a:cs typeface="Georgia" pitchFamily="34" charset="-120"/>
+              </a:rPr>
+              <a:t> quickly (which we drilled on Day 2). The </a:t>
+            </a:r>
+            <a:pPr algn="l" indent="0" marL="0">
+              <a:lnSpc>
+                <a:spcPts val="1820"/>
+              </a:lnSpc>
+              <a:spcBef>
+                <a:spcPts val="300"/>
+              </a:spcBef>
+              <a:spcAft>
+                <a:spcPts val="300"/>
+              </a:spcAft>
+              <a:buNone/>
+            </a:pPr>
+            <a:r>
+              <a:rPr lang="en-US" sz="1300" i="1" dirty="0">
+                <a:solidFill>
+                  <a:srgbClr val="1C2833"/>
+                </a:solidFill>
+                <a:latin typeface="Georgia" pitchFamily="34" charset="0"/>
+                <a:ea typeface="Georgia" pitchFamily="34" charset="-122"/>
+                <a:cs typeface="Georgia" pitchFamily="34" charset="-120"/>
+              </a:rPr>
+              <a:t>multiplication</a:t>
+            </a:r>
+            <a:pPr algn="l" indent="0" marL="0">
+              <a:lnSpc>
+                <a:spcPts val="1820"/>
+              </a:lnSpc>
+              <a:spcBef>
+                <a:spcPts val="300"/>
+              </a:spcBef>
+              <a:spcAft>
+                <a:spcPts val="300"/>
+              </a:spcAft>
+              <a:buNone/>
+            </a:pPr>
+            <a:r>
+              <a:rPr lang="en-US" sz="1300" dirty="0">
+                <a:solidFill>
+                  <a:srgbClr val="1C2833"/>
+                </a:solidFill>
+                <a:latin typeface="Georgia" pitchFamily="34" charset="0"/>
+                <a:ea typeface="Georgia" pitchFamily="34" charset="-122"/>
+                <a:cs typeface="Georgia" pitchFamily="34" charset="-120"/>
+              </a:rPr>
+              <a:t> technique uses that deficit via the algebra above.</a:t>
+            </a:r>
+            <a:endParaRPr lang="en-US" sz="1300" dirty="0"/>
+          </a:p>
+        </p:txBody>
+      </p:sp>
+      <p:sp>
+        <p:nvSpPr>
+          <p:cNvPr id="8" name="Text 6"/>
+          <p:cNvSpPr/>
+          <p:nvPr/>
+        </p:nvSpPr>
+        <p:spPr>
+          <a:xfrm>
+            <a:off x="406301" y="4434929"/>
+            <a:ext cx="8498026" cy="213271"/>
+          </a:xfrm>
+          <a:prstGeom prst="rect">
+            <a:avLst/>
+          </a:prstGeom>
+          <a:noFill/>
+          <a:ln/>
+        </p:spPr>
+        <p:txBody>
+          <a:bodyPr wrap="square" lIns="0" tIns="0" rIns="0" bIns="0" rtlCol="0" anchor="t"/>
+          <a:lstStyle/>
+          <a:p>
+            <a:pPr algn="l" indent="0" marL="0">
+              <a:lnSpc>
+                <a:spcPts val="1680"/>
+              </a:lnSpc>
+              <a:spcBef>
+                <a:spcPts val="300"/>
+              </a:spcBef>
+              <a:spcAft>
+                <a:spcPts val="300"/>
+              </a:spcAft>
+              <a:buNone/>
+            </a:pPr>
+            <a:r>
+              <a:rPr lang="en-US" sz="1200" dirty="0">
+                <a:solidFill>
+                  <a:srgbClr val="1C2833"/>
+                </a:solidFill>
+                <a:latin typeface="Arial" pitchFamily="34" charset="0"/>
+                <a:ea typeface="Arial" pitchFamily="34" charset="-122"/>
+                <a:cs typeface="Arial" pitchFamily="34" charset="-120"/>
+              </a:rPr>
+              <a:t>Middle ·  · IKS Curriculum</a:t>
+            </a:r>
+            <a:endParaRPr lang="en-US" sz="1200" dirty="0"/>
+          </a:p>
+        </p:txBody>
+      </p:sp>
+    </p:spTree>
+  </p:cSld>
+  <p:clrMapOvr>
+    <a:masterClrMapping/>
+  </p:clrMapOvr>
+</p:sld>
+</file>
+
+<file path=ppt/slides/slide16.xml><?xml version="1.0" encoding="utf-8"?>
+<p:sld xmlns:a="http://schemas.openxmlformats.org/drawingml/2006/main" xmlns:r="http://schemas.openxmlformats.org/officeDocument/2006/relationships" xmlns:p="http://schemas.openxmlformats.org/presentationml/2006/main">
+  <p:cSld name="Slide 16">
+    <p:bg>
+      <p:bgPr>
+        <a:solidFill>
+          <a:srgbClr val="FFFFFF"/>
+        </a:solidFill>
+      </p:bgPr>
+    </p:bg>
+    <p:spTree>
+      <p:nvGrpSpPr>
+        <p:cNvPr id="1" name=""/>
+        <p:cNvGrpSpPr/>
+        <p:nvPr/>
+      </p:nvGrpSpPr>
+      <p:grpSpPr>
+        <a:xfrm>
+          <a:off x="0" y="0"/>
+          <a:ext cx="0" cy="0"/>
+          <a:chOff x="0" y="0"/>
+          <a:chExt cx="0" cy="0"/>
+        </a:xfrm>
+      </p:grpSpPr>
+      <p:sp>
+        <p:nvSpPr>
+          <p:cNvPr id="2" name="Text 0"/>
+          <p:cNvSpPr/>
+          <p:nvPr/>
+        </p:nvSpPr>
+        <p:spPr>
+          <a:xfrm>
+            <a:off x="0" y="0"/>
+            <a:ext cx="9144000" cy="101501"/>
+          </a:xfrm>
+          <a:prstGeom prst="rect">
+            <a:avLst/>
+          </a:prstGeom>
+          <a:solidFill>
+            <a:srgbClr val="277884"/>
+          </a:solidFill>
+          <a:ln/>
+        </p:spPr>
+        <p:txBody>
+          <a:bodyPr wrap="square" rtlCol="0" anchor="ctr"/>
+          <a:lstStyle/>
+          <a:p>
+            <a:pPr indent="0" marL="0">
+              <a:buNone/>
+            </a:pPr>
+            <a:endParaRPr lang="en-US" dirty="0"/>
+          </a:p>
+        </p:txBody>
+      </p:sp>
+      <p:sp>
+        <p:nvSpPr>
+          <p:cNvPr id="3" name="Text 1"/>
+          <p:cNvSpPr/>
+          <p:nvPr/>
+        </p:nvSpPr>
+        <p:spPr>
+          <a:xfrm>
+            <a:off x="406301" y="457051"/>
+            <a:ext cx="8498026" cy="274290"/>
+          </a:xfrm>
+          <a:prstGeom prst="rect">
+            <a:avLst/>
+          </a:prstGeom>
+          <a:noFill/>
+          <a:ln/>
+        </p:spPr>
+        <p:txBody>
+          <a:bodyPr wrap="square" lIns="0" tIns="0" rIns="0" bIns="0" rtlCol="0" anchor="t"/>
+          <a:lstStyle/>
+          <a:p>
+            <a:pPr algn="l" indent="0" marL="0">
+              <a:lnSpc>
+                <a:spcPts val="2160"/>
+              </a:lnSpc>
+              <a:spcBef>
+                <a:spcPts val="600"/>
+              </a:spcBef>
+              <a:spcAft>
+                <a:spcPts val="800"/>
+              </a:spcAft>
+              <a:buNone/>
+            </a:pPr>
+            <a:r>
+              <a:rPr lang="en-US" sz="1800" b="1" dirty="0">
+                <a:solidFill>
+                  <a:srgbClr val="FE4447"/>
+                </a:solidFill>
+                <a:latin typeface="Georgia" pitchFamily="34" charset="0"/>
+                <a:ea typeface="Georgia" pitchFamily="34" charset="-122"/>
+                <a:cs typeface="Georgia" pitchFamily="34" charset="-120"/>
+              </a:rPr>
+              <a:t>Wrap-up (5 min) (cont.)</a:t>
+            </a:r>
+            <a:endParaRPr lang="en-US" sz="1800" dirty="0"/>
+          </a:p>
+        </p:txBody>
+      </p:sp>
+      <p:sp>
+        <p:nvSpPr>
+          <p:cNvPr id="4" name="Text 2"/>
+          <p:cNvSpPr/>
+          <p:nvPr/>
+        </p:nvSpPr>
+        <p:spPr>
+          <a:xfrm>
+            <a:off x="634901" y="883593"/>
+            <a:ext cx="8102798" cy="281880"/>
+          </a:xfrm>
+          <a:prstGeom prst="rect">
+            <a:avLst/>
+          </a:prstGeom>
+          <a:noFill/>
+          <a:ln/>
+        </p:spPr>
+        <p:txBody>
+          <a:bodyPr wrap="square" lIns="0" tIns="0" rIns="0" bIns="0" rtlCol="0" anchor="t"/>
+          <a:lstStyle/>
+          <a:p>
+            <a:pPr algn="l" marL="342900" indent="-342900">
+              <a:lnSpc>
+                <a:spcPts val="1620"/>
+              </a:lnSpc>
+              <a:spcAft>
+                <a:spcPts val="300"/>
+              </a:spcAft>
+              <a:buSzPct val="100000"/>
+              <a:buChar char="•"/>
+            </a:pPr>
+            <a:r>
+              <a:rPr lang="en-US" sz="1200" dirty="0">
+                <a:solidFill>
+                  <a:srgbClr val="1C2833"/>
+                </a:solidFill>
+                <a:latin typeface="Arial" pitchFamily="34" charset="0"/>
+                <a:ea typeface="Arial" pitchFamily="34" charset="-122"/>
+                <a:cs typeface="Arial" pitchFamily="34" charset="-120"/>
+              </a:rPr>
+              <a:t>Preview Day 8: </a:t>
+            </a:r>
+            <a:pPr algn="l" indent="0" marL="0">
+              <a:lnSpc>
+                <a:spcPts val="1620"/>
+              </a:lnSpc>
+              <a:spcAft>
+                <a:spcPts val="300"/>
+              </a:spcAft>
+              <a:buNone/>
+            </a:pPr>
+            <a:r>
               <a:rPr lang="en-US" sz="1200" i="1" dirty="0">
                 <a:solidFill>
                   <a:srgbClr val="1C2833"/>
@@ -2389,8 +6167,33 @@
                 <a:ea typeface="Arial" pitchFamily="34" charset="-122"/>
                 <a:cs typeface="Arial" pitchFamily="34" charset="-120"/>
               </a:rPr>
-              <a:t>FUNDAMENTAL AND VEDIC MATHEMATICS .pdf</a:t>
-            </a:r>
+              <a:t>"Tomorrow — when is this method actually faster? And when should you use long multiplication?"</a:t>
+            </a:r>
+            <a:endParaRPr lang="en-US" sz="1200" dirty="0"/>
+          </a:p>
+        </p:txBody>
+      </p:sp>
+      <p:sp>
+        <p:nvSpPr>
+          <p:cNvPr id="5" name="Text 3"/>
+          <p:cNvSpPr/>
+          <p:nvPr/>
+        </p:nvSpPr>
+        <p:spPr>
+          <a:xfrm>
+            <a:off x="406301" y="4434929"/>
+            <a:ext cx="8498026" cy="213271"/>
+          </a:xfrm>
+          <a:prstGeom prst="rect">
+            <a:avLst/>
+          </a:prstGeom>
+          <a:noFill/>
+          <a:ln/>
+        </p:spPr>
+        <p:txBody>
+          <a:bodyPr wrap="square" lIns="0" tIns="0" rIns="0" bIns="0" rtlCol="0" anchor="t"/>
+          <a:lstStyle/>
+          <a:p>
             <a:pPr algn="l" indent="0" marL="0">
               <a:lnSpc>
                 <a:spcPts val="1680"/>
@@ -2412,15 +6215,1646 @@
                 <a:ea typeface="Arial" pitchFamily="34" charset="-122"/>
                 <a:cs typeface="Arial" pitchFamily="34" charset="-120"/>
               </a:rPr>
-              <a:t>.</a:t>
+              <a:t>Middle ·  · IKS Curriculum</a:t>
             </a:r>
             <a:endParaRPr lang="en-US" sz="1200" dirty="0"/>
           </a:p>
         </p:txBody>
       </p:sp>
+    </p:spTree>
+  </p:cSld>
+  <p:clrMapOvr>
+    <a:masterClrMapping/>
+  </p:clrMapOvr>
+</p:sld>
+</file>
+
+<file path=ppt/slides/slide17.xml><?xml version="1.0" encoding="utf-8"?>
+<p:sld xmlns:a="http://schemas.openxmlformats.org/drawingml/2006/main" xmlns:r="http://schemas.openxmlformats.org/officeDocument/2006/relationships" xmlns:p="http://schemas.openxmlformats.org/presentationml/2006/main">
+  <p:cSld name="Slide 17">
+    <p:bg>
+      <p:bgPr>
+        <a:solidFill>
+          <a:srgbClr val="FFFFFF"/>
+        </a:solidFill>
+      </p:bgPr>
+    </p:bg>
+    <p:spTree>
+      <p:nvGrpSpPr>
+        <p:cNvPr id="1" name=""/>
+        <p:cNvGrpSpPr/>
+        <p:nvPr/>
+      </p:nvGrpSpPr>
+      <p:grpSpPr>
+        <a:xfrm>
+          <a:off x="0" y="0"/>
+          <a:ext cx="0" cy="0"/>
+          <a:chOff x="0" y="0"/>
+          <a:chExt cx="0" cy="0"/>
+        </a:xfrm>
+      </p:grpSpPr>
+      <p:sp>
+        <p:nvSpPr>
+          <p:cNvPr id="2" name="Text 0"/>
+          <p:cNvSpPr/>
+          <p:nvPr/>
+        </p:nvSpPr>
+        <p:spPr>
+          <a:xfrm>
+            <a:off x="0" y="0"/>
+            <a:ext cx="9144000" cy="101501"/>
+          </a:xfrm>
+          <a:prstGeom prst="rect">
+            <a:avLst/>
+          </a:prstGeom>
+          <a:solidFill>
+            <a:srgbClr val="277884"/>
+          </a:solidFill>
+          <a:ln/>
+        </p:spPr>
+        <p:txBody>
+          <a:bodyPr wrap="square" rtlCol="0" anchor="ctr"/>
+          <a:lstStyle/>
+          <a:p>
+            <a:pPr indent="0" marL="0">
+              <a:buNone/>
+            </a:pPr>
+            <a:endParaRPr lang="en-US" dirty="0"/>
+          </a:p>
+        </p:txBody>
+      </p:sp>
+      <p:sp>
+        <p:nvSpPr>
+          <p:cNvPr id="3" name="Text 1"/>
+          <p:cNvSpPr/>
+          <p:nvPr/>
+        </p:nvSpPr>
+        <p:spPr>
+          <a:xfrm>
+            <a:off x="406301" y="457051"/>
+            <a:ext cx="8498026" cy="274290"/>
+          </a:xfrm>
+          <a:prstGeom prst="rect">
+            <a:avLst/>
+          </a:prstGeom>
+          <a:noFill/>
+          <a:ln/>
+        </p:spPr>
+        <p:txBody>
+          <a:bodyPr wrap="square" lIns="0" tIns="0" rIns="0" bIns="0" rtlCol="0" anchor="t"/>
+          <a:lstStyle/>
+          <a:p>
+            <a:pPr algn="l" indent="0" marL="0">
+              <a:lnSpc>
+                <a:spcPts val="2160"/>
+              </a:lnSpc>
+              <a:spcBef>
+                <a:spcPts val="600"/>
+              </a:spcBef>
+              <a:spcAft>
+                <a:spcPts val="800"/>
+              </a:spcAft>
+              <a:buNone/>
+            </a:pPr>
+            <a:r>
+              <a:rPr lang="en-US" sz="1800" b="1" dirty="0">
+                <a:solidFill>
+                  <a:srgbClr val="FE4447"/>
+                </a:solidFill>
+                <a:latin typeface="Georgia" pitchFamily="34" charset="0"/>
+                <a:ea typeface="Georgia" pitchFamily="34" charset="-122"/>
+                <a:cs typeface="Georgia" pitchFamily="34" charset="-120"/>
+              </a:rPr>
+              <a:t>Student-facing content</a:t>
+            </a:r>
+            <a:endParaRPr lang="en-US" sz="1800" dirty="0"/>
+          </a:p>
+        </p:txBody>
+      </p:sp>
+      <p:sp>
+        <p:nvSpPr>
+          <p:cNvPr id="4" name="Text 2"/>
+          <p:cNvSpPr/>
+          <p:nvPr/>
+        </p:nvSpPr>
+        <p:spPr>
+          <a:xfrm>
+            <a:off x="406301" y="883593"/>
+            <a:ext cx="8331398" cy="3590925"/>
+          </a:xfrm>
+          <a:prstGeom prst="rect">
+            <a:avLst/>
+          </a:prstGeom>
+          <a:solidFill>
+            <a:srgbClr val="F4F8F9"/>
+          </a:solidFill>
+          <a:ln/>
+        </p:spPr>
+        <p:txBody>
+          <a:bodyPr wrap="square" rtlCol="0" anchor="ctr"/>
+          <a:lstStyle/>
+          <a:p>
+            <a:pPr indent="0" marL="0">
+              <a:buNone/>
+            </a:pPr>
+            <a:endParaRPr lang="en-US" dirty="0"/>
+          </a:p>
+        </p:txBody>
+      </p:sp>
+      <p:sp>
+        <p:nvSpPr>
+          <p:cNvPr id="5" name="Shape 3"/>
+          <p:cNvSpPr/>
+          <p:nvPr/>
+        </p:nvSpPr>
+        <p:spPr>
+          <a:xfrm>
+            <a:off x="434876" y="883593"/>
+            <a:ext cx="0" cy="3590925"/>
+          </a:xfrm>
+          <a:prstGeom prst="line">
+            <a:avLst/>
+          </a:prstGeom>
+          <a:noFill/>
+          <a:ln w="57150">
+            <a:solidFill>
+              <a:srgbClr val="FE4447"/>
+            </a:solidFill>
+            <a:prstDash val="solid"/>
+          </a:ln>
+        </p:spPr>
+      </p:sp>
       <p:sp>
         <p:nvSpPr>
           <p:cNvPr id="6" name="Text 4"/>
+          <p:cNvSpPr/>
+          <p:nvPr/>
+        </p:nvSpPr>
+        <p:spPr>
+          <a:xfrm>
+            <a:off x="692051" y="1074093"/>
+            <a:ext cx="7973389" cy="230981"/>
+          </a:xfrm>
+          <a:prstGeom prst="rect">
+            <a:avLst/>
+          </a:prstGeom>
+          <a:noFill/>
+          <a:ln/>
+        </p:spPr>
+        <p:txBody>
+          <a:bodyPr wrap="square" lIns="0" tIns="0" rIns="0" bIns="0" rtlCol="0" anchor="t"/>
+          <a:lstStyle/>
+          <a:p>
+            <a:pPr algn="l" indent="0" marL="0">
+              <a:lnSpc>
+                <a:spcPts val="1820"/>
+              </a:lnSpc>
+              <a:spcBef>
+                <a:spcPts val="300"/>
+              </a:spcBef>
+              <a:spcAft>
+                <a:spcPts val="300"/>
+              </a:spcAft>
+              <a:buNone/>
+            </a:pPr>
+            <a:r>
+              <a:rPr lang="en-US" sz="1300" b="1" i="1" dirty="0">
+                <a:solidFill>
+                  <a:srgbClr val="1C2833"/>
+                </a:solidFill>
+                <a:latin typeface="Georgia" pitchFamily="34" charset="0"/>
+                <a:ea typeface="Georgia" pitchFamily="34" charset="-122"/>
+                <a:cs typeface="Georgia" pitchFamily="34" charset="-120"/>
+              </a:rPr>
+              <a:t>The algebra behind Nikhilam</a:t>
+            </a:r>
+            <a:endParaRPr lang="en-US" sz="1300" dirty="0"/>
+          </a:p>
+        </p:txBody>
+      </p:sp>
+      <p:sp>
+        <p:nvSpPr>
+          <p:cNvPr id="7" name="Text 5"/>
+          <p:cNvSpPr/>
+          <p:nvPr/>
+        </p:nvSpPr>
+        <p:spPr>
+          <a:xfrm>
+            <a:off x="692051" y="1343174"/>
+            <a:ext cx="7973389" cy="250031"/>
+          </a:xfrm>
+          <a:prstGeom prst="rect">
+            <a:avLst/>
+          </a:prstGeom>
+          <a:noFill/>
+          <a:ln/>
+        </p:spPr>
+        <p:txBody>
+          <a:bodyPr wrap="square" lIns="0" tIns="0" rIns="0" bIns="0" rtlCol="0" anchor="t"/>
+          <a:lstStyle/>
+          <a:p>
+            <a:pPr algn="l" indent="0" marL="0">
+              <a:lnSpc>
+                <a:spcPts val="1820"/>
+              </a:lnSpc>
+              <a:spcBef>
+                <a:spcPts val="300"/>
+              </a:spcBef>
+              <a:spcAft>
+                <a:spcPts val="300"/>
+              </a:spcAft>
+              <a:buNone/>
+            </a:pPr>
+            <a:r>
+              <a:rPr lang="en-US" sz="1300" dirty="0">
+                <a:solidFill>
+                  <a:srgbClr val="1C2833"/>
+                </a:solidFill>
+                <a:latin typeface="Georgia" pitchFamily="34" charset="0"/>
+                <a:ea typeface="Georgia" pitchFamily="34" charset="-122"/>
+                <a:cs typeface="Georgia" pitchFamily="34" charset="-120"/>
+              </a:rPr>
+              <a:t>Let </a:t>
+            </a:r>
+            <a:pPr algn="l" indent="0" marL="0">
+              <a:lnSpc>
+                <a:spcPts val="1820"/>
+              </a:lnSpc>
+              <a:spcBef>
+                <a:spcPts val="300"/>
+              </a:spcBef>
+              <a:spcAft>
+                <a:spcPts val="300"/>
+              </a:spcAft>
+              <a:buNone/>
+            </a:pPr>
+            <a:r>
+              <a:rPr lang="en-US" sz="1300" i="1" dirty="0">
+                <a:solidFill>
+                  <a:srgbClr val="1C2833"/>
+                </a:solidFill>
+                <a:latin typeface="Georgia" pitchFamily="34" charset="0"/>
+                <a:ea typeface="Georgia" pitchFamily="34" charset="-122"/>
+                <a:cs typeface="Georgia" pitchFamily="34" charset="-120"/>
+              </a:rPr>
+              <a:t>B</a:t>
+            </a:r>
+            <a:pPr algn="l" indent="0" marL="0">
+              <a:lnSpc>
+                <a:spcPts val="1820"/>
+              </a:lnSpc>
+              <a:spcBef>
+                <a:spcPts val="300"/>
+              </a:spcBef>
+              <a:spcAft>
+                <a:spcPts val="300"/>
+              </a:spcAft>
+              <a:buNone/>
+            </a:pPr>
+            <a:r>
+              <a:rPr lang="en-US" sz="1300" dirty="0">
+                <a:solidFill>
+                  <a:srgbClr val="1C2833"/>
+                </a:solidFill>
+                <a:latin typeface="Georgia" pitchFamily="34" charset="0"/>
+                <a:ea typeface="Georgia" pitchFamily="34" charset="-122"/>
+                <a:cs typeface="Georgia" pitchFamily="34" charset="-120"/>
+              </a:rPr>
+              <a:t> be the base. Let </a:t>
+            </a:r>
+            <a:pPr algn="l" indent="0" marL="0">
+              <a:lnSpc>
+                <a:spcPts val="1820"/>
+              </a:lnSpc>
+              <a:spcBef>
+                <a:spcPts val="300"/>
+              </a:spcBef>
+              <a:spcAft>
+                <a:spcPts val="300"/>
+              </a:spcAft>
+              <a:buNone/>
+            </a:pPr>
+            <a:r>
+              <a:rPr lang="en-US" sz="1300" i="1" dirty="0">
+                <a:solidFill>
+                  <a:srgbClr val="1C2833"/>
+                </a:solidFill>
+                <a:latin typeface="Georgia" pitchFamily="34" charset="0"/>
+                <a:ea typeface="Georgia" pitchFamily="34" charset="-122"/>
+                <a:cs typeface="Georgia" pitchFamily="34" charset="-120"/>
+              </a:rPr>
+              <a:t>a</a:t>
+            </a:r>
+            <a:pPr algn="l" indent="0" marL="0">
+              <a:lnSpc>
+                <a:spcPts val="1820"/>
+              </a:lnSpc>
+              <a:spcBef>
+                <a:spcPts val="300"/>
+              </a:spcBef>
+              <a:spcAft>
+                <a:spcPts val="300"/>
+              </a:spcAft>
+              <a:buNone/>
+            </a:pPr>
+            <a:r>
+              <a:rPr lang="en-US" sz="1300" dirty="0">
+                <a:solidFill>
+                  <a:srgbClr val="1C2833"/>
+                </a:solidFill>
+                <a:latin typeface="Georgia" pitchFamily="34" charset="0"/>
+                <a:ea typeface="Georgia" pitchFamily="34" charset="-122"/>
+                <a:cs typeface="Georgia" pitchFamily="34" charset="-120"/>
+              </a:rPr>
+              <a:t> and </a:t>
+            </a:r>
+            <a:pPr algn="l" indent="0" marL="0">
+              <a:lnSpc>
+                <a:spcPts val="1820"/>
+              </a:lnSpc>
+              <a:spcBef>
+                <a:spcPts val="300"/>
+              </a:spcBef>
+              <a:spcAft>
+                <a:spcPts val="300"/>
+              </a:spcAft>
+              <a:buNone/>
+            </a:pPr>
+            <a:r>
+              <a:rPr lang="en-US" sz="1300" i="1" dirty="0">
+                <a:solidFill>
+                  <a:srgbClr val="1C2833"/>
+                </a:solidFill>
+                <a:latin typeface="Georgia" pitchFamily="34" charset="0"/>
+                <a:ea typeface="Georgia" pitchFamily="34" charset="-122"/>
+                <a:cs typeface="Georgia" pitchFamily="34" charset="-120"/>
+              </a:rPr>
+              <a:t>b</a:t>
+            </a:r>
+            <a:pPr algn="l" indent="0" marL="0">
+              <a:lnSpc>
+                <a:spcPts val="1820"/>
+              </a:lnSpc>
+              <a:spcBef>
+                <a:spcPts val="300"/>
+              </a:spcBef>
+              <a:spcAft>
+                <a:spcPts val="300"/>
+              </a:spcAft>
+              <a:buNone/>
+            </a:pPr>
+            <a:r>
+              <a:rPr lang="en-US" sz="1300" dirty="0">
+                <a:solidFill>
+                  <a:srgbClr val="1C2833"/>
+                </a:solidFill>
+                <a:latin typeface="Georgia" pitchFamily="34" charset="0"/>
+                <a:ea typeface="Georgia" pitchFamily="34" charset="-122"/>
+                <a:cs typeface="Georgia" pitchFamily="34" charset="-120"/>
+              </a:rPr>
+              <a:t> be the deficits.</a:t>
+            </a:r>
+            <a:endParaRPr lang="en-US" sz="1300" dirty="0"/>
+          </a:p>
+        </p:txBody>
+      </p:sp>
+      <p:sp>
+        <p:nvSpPr>
+          <p:cNvPr id="8" name="Text 6"/>
+          <p:cNvSpPr/>
+          <p:nvPr/>
+        </p:nvSpPr>
+        <p:spPr>
+          <a:xfrm>
+            <a:off x="692051" y="1631305"/>
+            <a:ext cx="7973389" cy="250031"/>
+          </a:xfrm>
+          <a:prstGeom prst="rect">
+            <a:avLst/>
+          </a:prstGeom>
+          <a:noFill/>
+          <a:ln/>
+        </p:spPr>
+        <p:txBody>
+          <a:bodyPr wrap="square" lIns="0" tIns="0" rIns="0" bIns="0" rtlCol="0" anchor="t"/>
+          <a:lstStyle/>
+          <a:p>
+            <a:pPr algn="l" indent="0" marL="0">
+              <a:lnSpc>
+                <a:spcPts val="1820"/>
+              </a:lnSpc>
+              <a:spcBef>
+                <a:spcPts val="300"/>
+              </a:spcBef>
+              <a:spcAft>
+                <a:spcPts val="300"/>
+              </a:spcAft>
+              <a:buNone/>
+            </a:pPr>
+            <a:r>
+              <a:rPr lang="en-US" sz="1300" i="1" dirty="0">
+                <a:solidFill>
+                  <a:srgbClr val="1C2833"/>
+                </a:solidFill>
+                <a:latin typeface="Georgia" pitchFamily="34" charset="0"/>
+                <a:ea typeface="Georgia" pitchFamily="34" charset="-122"/>
+                <a:cs typeface="Georgia" pitchFamily="34" charset="-120"/>
+              </a:rPr>
+              <a:t>(B − a)(B − b) = B(B − a − b) + ab</a:t>
+            </a:r>
+            <a:endParaRPr lang="en-US" sz="1300" dirty="0"/>
+          </a:p>
+        </p:txBody>
+      </p:sp>
+      <p:sp>
+        <p:nvSpPr>
+          <p:cNvPr id="9" name="Text 7"/>
+          <p:cNvSpPr/>
+          <p:nvPr/>
+        </p:nvSpPr>
+        <p:spPr>
+          <a:xfrm>
+            <a:off x="692051" y="1919436"/>
+            <a:ext cx="7973389" cy="250031"/>
+          </a:xfrm>
+          <a:prstGeom prst="rect">
+            <a:avLst/>
+          </a:prstGeom>
+          <a:noFill/>
+          <a:ln/>
+        </p:spPr>
+        <p:txBody>
+          <a:bodyPr wrap="square" lIns="0" tIns="0" rIns="0" bIns="0" rtlCol="0" anchor="t"/>
+          <a:lstStyle/>
+          <a:p>
+            <a:pPr algn="l" indent="0" marL="0">
+              <a:lnSpc>
+                <a:spcPts val="1820"/>
+              </a:lnSpc>
+              <a:spcBef>
+                <a:spcPts val="300"/>
+              </a:spcBef>
+              <a:spcAft>
+                <a:spcPts val="300"/>
+              </a:spcAft>
+              <a:buNone/>
+            </a:pPr>
+            <a:r>
+              <a:rPr lang="en-US" sz="1300" i="1" dirty="0">
+                <a:solidFill>
+                  <a:srgbClr val="1C2833"/>
+                </a:solidFill>
+                <a:latin typeface="Georgia" pitchFamily="34" charset="0"/>
+                <a:ea typeface="Georgia" pitchFamily="34" charset="-122"/>
+                <a:cs typeface="Georgia" pitchFamily="34" charset="-120"/>
+              </a:rPr>
+              <a:t>B − a − b</a:t>
+            </a:r>
+            <a:pPr algn="l" indent="0" marL="0">
+              <a:lnSpc>
+                <a:spcPts val="1820"/>
+              </a:lnSpc>
+              <a:spcBef>
+                <a:spcPts val="300"/>
+              </a:spcBef>
+              <a:spcAft>
+                <a:spcPts val="300"/>
+              </a:spcAft>
+              <a:buNone/>
+            </a:pPr>
+            <a:r>
+              <a:rPr lang="en-US" sz="1300" dirty="0">
+                <a:solidFill>
+                  <a:srgbClr val="1C2833"/>
+                </a:solidFill>
+                <a:latin typeface="Georgia" pitchFamily="34" charset="0"/>
+                <a:ea typeface="Georgia" pitchFamily="34" charset="-122"/>
+                <a:cs typeface="Georgia" pitchFamily="34" charset="-120"/>
+              </a:rPr>
+              <a:t> is the LEFT part (cross-subtract).</a:t>
+            </a:r>
+            <a:endParaRPr lang="en-US" sz="1300" dirty="0"/>
+          </a:p>
+        </p:txBody>
+      </p:sp>
+      <p:sp>
+        <p:nvSpPr>
+          <p:cNvPr id="10" name="Text 8"/>
+          <p:cNvSpPr/>
+          <p:nvPr/>
+        </p:nvSpPr>
+        <p:spPr>
+          <a:xfrm>
+            <a:off x="692051" y="2207568"/>
+            <a:ext cx="7973389" cy="250031"/>
+          </a:xfrm>
+          <a:prstGeom prst="rect">
+            <a:avLst/>
+          </a:prstGeom>
+          <a:noFill/>
+          <a:ln/>
+        </p:spPr>
+        <p:txBody>
+          <a:bodyPr wrap="square" lIns="0" tIns="0" rIns="0" bIns="0" rtlCol="0" anchor="t"/>
+          <a:lstStyle/>
+          <a:p>
+            <a:pPr algn="l" indent="0" marL="0">
+              <a:lnSpc>
+                <a:spcPts val="1820"/>
+              </a:lnSpc>
+              <a:spcBef>
+                <a:spcPts val="300"/>
+              </a:spcBef>
+              <a:spcAft>
+                <a:spcPts val="300"/>
+              </a:spcAft>
+              <a:buNone/>
+            </a:pPr>
+            <a:r>
+              <a:rPr lang="en-US" sz="1300" i="1" dirty="0">
+                <a:solidFill>
+                  <a:srgbClr val="1C2833"/>
+                </a:solidFill>
+                <a:latin typeface="Georgia" pitchFamily="34" charset="0"/>
+                <a:ea typeface="Georgia" pitchFamily="34" charset="-122"/>
+                <a:cs typeface="Georgia" pitchFamily="34" charset="-120"/>
+              </a:rPr>
+              <a:t>ab</a:t>
+            </a:r>
+            <a:pPr algn="l" indent="0" marL="0">
+              <a:lnSpc>
+                <a:spcPts val="1820"/>
+              </a:lnSpc>
+              <a:spcBef>
+                <a:spcPts val="300"/>
+              </a:spcBef>
+              <a:spcAft>
+                <a:spcPts val="300"/>
+              </a:spcAft>
+              <a:buNone/>
+            </a:pPr>
+            <a:r>
+              <a:rPr lang="en-US" sz="1300" dirty="0">
+                <a:solidFill>
+                  <a:srgbClr val="1C2833"/>
+                </a:solidFill>
+                <a:latin typeface="Georgia" pitchFamily="34" charset="0"/>
+                <a:ea typeface="Georgia" pitchFamily="34" charset="-122"/>
+                <a:cs typeface="Georgia" pitchFamily="34" charset="-120"/>
+              </a:rPr>
+              <a:t> is the RIGHT part (product of deficits).</a:t>
+            </a:r>
+            <a:endParaRPr lang="en-US" sz="1300" dirty="0"/>
+          </a:p>
+        </p:txBody>
+      </p:sp>
+      <p:sp>
+        <p:nvSpPr>
+          <p:cNvPr id="11" name="Text 9"/>
+          <p:cNvSpPr/>
+          <p:nvPr/>
+        </p:nvSpPr>
+        <p:spPr>
+          <a:xfrm>
+            <a:off x="692051" y="2495699"/>
+            <a:ext cx="7973389" cy="481012"/>
+          </a:xfrm>
+          <a:prstGeom prst="rect">
+            <a:avLst/>
+          </a:prstGeom>
+          <a:noFill/>
+          <a:ln/>
+        </p:spPr>
+        <p:txBody>
+          <a:bodyPr wrap="square" lIns="0" tIns="0" rIns="0" bIns="0" rtlCol="0" anchor="t"/>
+          <a:lstStyle/>
+          <a:p>
+            <a:pPr algn="l" indent="0" marL="0">
+              <a:lnSpc>
+                <a:spcPts val="1820"/>
+              </a:lnSpc>
+              <a:spcBef>
+                <a:spcPts val="300"/>
+              </a:spcBef>
+              <a:spcAft>
+                <a:spcPts val="300"/>
+              </a:spcAft>
+              <a:buNone/>
+            </a:pPr>
+            <a:r>
+              <a:rPr lang="en-US" sz="1300" dirty="0">
+                <a:solidFill>
+                  <a:srgbClr val="1C2833"/>
+                </a:solidFill>
+                <a:latin typeface="Georgia" pitchFamily="34" charset="0"/>
+                <a:ea typeface="Georgia" pitchFamily="34" charset="-122"/>
+                <a:cs typeface="Georgia" pitchFamily="34" charset="-120"/>
+              </a:rPr>
+              <a:t>The concatenation </a:t>
+            </a:r>
+            <a:pPr algn="l" indent="0" marL="0">
+              <a:lnSpc>
+                <a:spcPts val="1820"/>
+              </a:lnSpc>
+              <a:spcBef>
+                <a:spcPts val="300"/>
+              </a:spcBef>
+              <a:spcAft>
+                <a:spcPts val="300"/>
+              </a:spcAft>
+              <a:buNone/>
+            </a:pPr>
+            <a:r>
+              <a:rPr lang="en-US" sz="1300" i="1" dirty="0">
+                <a:solidFill>
+                  <a:srgbClr val="1C2833"/>
+                </a:solidFill>
+                <a:latin typeface="Georgia" pitchFamily="34" charset="0"/>
+                <a:ea typeface="Georgia" pitchFamily="34" charset="-122"/>
+                <a:cs typeface="Georgia" pitchFamily="34" charset="-120"/>
+              </a:rPr>
+              <a:t>LEFT | RIGHT</a:t>
+            </a:r>
+            <a:pPr algn="l" indent="0" marL="0">
+              <a:lnSpc>
+                <a:spcPts val="1820"/>
+              </a:lnSpc>
+              <a:spcBef>
+                <a:spcPts val="300"/>
+              </a:spcBef>
+              <a:spcAft>
+                <a:spcPts val="300"/>
+              </a:spcAft>
+              <a:buNone/>
+            </a:pPr>
+            <a:r>
+              <a:rPr lang="en-US" sz="1300" dirty="0">
+                <a:solidFill>
+                  <a:srgbClr val="1C2833"/>
+                </a:solidFill>
+                <a:latin typeface="Georgia" pitchFamily="34" charset="0"/>
+                <a:ea typeface="Georgia" pitchFamily="34" charset="-122"/>
+                <a:cs typeface="Georgia" pitchFamily="34" charset="-120"/>
+              </a:rPr>
+              <a:t> equals </a:t>
+            </a:r>
+            <a:pPr algn="l" indent="0" marL="0">
+              <a:lnSpc>
+                <a:spcPts val="1820"/>
+              </a:lnSpc>
+              <a:spcBef>
+                <a:spcPts val="300"/>
+              </a:spcBef>
+              <a:spcAft>
+                <a:spcPts val="300"/>
+              </a:spcAft>
+              <a:buNone/>
+            </a:pPr>
+            <a:r>
+              <a:rPr lang="en-US" sz="1300" i="1" dirty="0">
+                <a:solidFill>
+                  <a:srgbClr val="1C2833"/>
+                </a:solidFill>
+                <a:latin typeface="Georgia" pitchFamily="34" charset="0"/>
+                <a:ea typeface="Georgia" pitchFamily="34" charset="-122"/>
+                <a:cs typeface="Georgia" pitchFamily="34" charset="-120"/>
+              </a:rPr>
+              <a:t>B × LEFT + RIGHT</a:t>
+            </a:r>
+            <a:pPr algn="l" indent="0" marL="0">
+              <a:lnSpc>
+                <a:spcPts val="1820"/>
+              </a:lnSpc>
+              <a:spcBef>
+                <a:spcPts val="300"/>
+              </a:spcBef>
+              <a:spcAft>
+                <a:spcPts val="300"/>
+              </a:spcAft>
+              <a:buNone/>
+            </a:pPr>
+            <a:r>
+              <a:rPr lang="en-US" sz="1300" dirty="0">
+                <a:solidFill>
+                  <a:srgbClr val="1C2833"/>
+                </a:solidFill>
+                <a:latin typeface="Georgia" pitchFamily="34" charset="0"/>
+                <a:ea typeface="Georgia" pitchFamily="34" charset="-122"/>
+                <a:cs typeface="Georgia" pitchFamily="34" charset="-120"/>
+              </a:rPr>
+              <a:t> — which is exactly what the algebra produces.</a:t>
+            </a:r>
+            <a:endParaRPr lang="en-US" sz="1300" dirty="0"/>
+          </a:p>
+        </p:txBody>
+      </p:sp>
+      <p:sp>
+        <p:nvSpPr>
+          <p:cNvPr id="12" name="Text 10"/>
+          <p:cNvSpPr/>
+          <p:nvPr/>
+        </p:nvSpPr>
+        <p:spPr>
+          <a:xfrm>
+            <a:off x="692051" y="3014811"/>
+            <a:ext cx="7973389" cy="481012"/>
+          </a:xfrm>
+          <a:prstGeom prst="rect">
+            <a:avLst/>
+          </a:prstGeom>
+          <a:noFill/>
+          <a:ln/>
+        </p:spPr>
+        <p:txBody>
+          <a:bodyPr wrap="square" lIns="0" tIns="0" rIns="0" bIns="0" rtlCol="0" anchor="t"/>
+          <a:lstStyle/>
+          <a:p>
+            <a:pPr algn="l" indent="0" marL="0">
+              <a:lnSpc>
+                <a:spcPts val="1820"/>
+              </a:lnSpc>
+              <a:spcBef>
+                <a:spcPts val="300"/>
+              </a:spcBef>
+              <a:spcAft>
+                <a:spcPts val="300"/>
+              </a:spcAft>
+              <a:buNone/>
+            </a:pPr>
+            <a:r>
+              <a:rPr lang="en-US" sz="1300" b="1" i="1" dirty="0">
+                <a:solidFill>
+                  <a:srgbClr val="1C2833"/>
+                </a:solidFill>
+                <a:latin typeface="Georgia" pitchFamily="34" charset="0"/>
+                <a:ea typeface="Georgia" pitchFamily="34" charset="-122"/>
+                <a:cs typeface="Georgia" pitchFamily="34" charset="-120"/>
+              </a:rPr>
+              <a:t>For excess (both above base):</a:t>
+            </a:r>
+            <a:pPr algn="l" indent="0" marL="0">
+              <a:lnSpc>
+                <a:spcPts val="1820"/>
+              </a:lnSpc>
+              <a:spcBef>
+                <a:spcPts val="300"/>
+              </a:spcBef>
+              <a:spcAft>
+                <a:spcPts val="300"/>
+              </a:spcAft>
+              <a:buNone/>
+            </a:pPr>
+            <a:r>
+              <a:rPr lang="en-US" sz="1300" dirty="0">
+                <a:solidFill>
+                  <a:srgbClr val="1C2833"/>
+                </a:solidFill>
+                <a:latin typeface="Georgia" pitchFamily="34" charset="0"/>
+                <a:ea typeface="Georgia" pitchFamily="34" charset="-122"/>
+                <a:cs typeface="Georgia" pitchFamily="34" charset="-120"/>
+              </a:rPr>
+              <a:t> </a:t>
+            </a:r>
+            <a:pPr algn="l" indent="0" marL="0">
+              <a:lnSpc>
+                <a:spcPts val="1820"/>
+              </a:lnSpc>
+              <a:spcBef>
+                <a:spcPts val="300"/>
+              </a:spcBef>
+              <a:spcAft>
+                <a:spcPts val="300"/>
+              </a:spcAft>
+              <a:buNone/>
+            </a:pPr>
+            <a:r>
+              <a:rPr lang="en-US" sz="1300" i="1" dirty="0">
+                <a:solidFill>
+                  <a:srgbClr val="1C2833"/>
+                </a:solidFill>
+                <a:latin typeface="Georgia" pitchFamily="34" charset="0"/>
+                <a:ea typeface="Georgia" pitchFamily="34" charset="-122"/>
+                <a:cs typeface="Georgia" pitchFamily="34" charset="-120"/>
+              </a:rPr>
+              <a:t>(B + x)(B + y) = B(B + x + y) + xy</a:t>
+            </a:r>
+            <a:pPr algn="l" indent="0" marL="0">
+              <a:lnSpc>
+                <a:spcPts val="1820"/>
+              </a:lnSpc>
+              <a:spcBef>
+                <a:spcPts val="300"/>
+              </a:spcBef>
+              <a:spcAft>
+                <a:spcPts val="300"/>
+              </a:spcAft>
+              <a:buNone/>
+            </a:pPr>
+            <a:r>
+              <a:rPr lang="en-US" sz="1300" dirty="0">
+                <a:solidFill>
+                  <a:srgbClr val="1C2833"/>
+                </a:solidFill>
+                <a:latin typeface="Georgia" pitchFamily="34" charset="0"/>
+                <a:ea typeface="Georgia" pitchFamily="34" charset="-122"/>
+                <a:cs typeface="Georgia" pitchFamily="34" charset="-120"/>
+              </a:rPr>
+              <a:t>. Cross-ADD; right part is positive.</a:t>
+            </a:r>
+            <a:endParaRPr lang="en-US" sz="1300" dirty="0"/>
+          </a:p>
+        </p:txBody>
+      </p:sp>
+      <p:sp>
+        <p:nvSpPr>
+          <p:cNvPr id="13" name="Text 11"/>
+          <p:cNvSpPr/>
+          <p:nvPr/>
+        </p:nvSpPr>
+        <p:spPr>
+          <a:xfrm>
+            <a:off x="692051" y="3533924"/>
+            <a:ext cx="7973389" cy="250031"/>
+          </a:xfrm>
+          <a:prstGeom prst="rect">
+            <a:avLst/>
+          </a:prstGeom>
+          <a:noFill/>
+          <a:ln/>
+        </p:spPr>
+        <p:txBody>
+          <a:bodyPr wrap="square" lIns="0" tIns="0" rIns="0" bIns="0" rtlCol="0" anchor="t"/>
+          <a:lstStyle/>
+          <a:p>
+            <a:pPr algn="l" indent="0" marL="0">
+              <a:lnSpc>
+                <a:spcPts val="1820"/>
+              </a:lnSpc>
+              <a:spcBef>
+                <a:spcPts val="300"/>
+              </a:spcBef>
+              <a:spcAft>
+                <a:spcPts val="300"/>
+              </a:spcAft>
+              <a:buNone/>
+            </a:pPr>
+            <a:r>
+              <a:rPr lang="en-US" sz="1300" b="1" i="1" dirty="0">
+                <a:solidFill>
+                  <a:srgbClr val="1C2833"/>
+                </a:solidFill>
+                <a:latin typeface="Georgia" pitchFamily="34" charset="0"/>
+                <a:ea typeface="Georgia" pitchFamily="34" charset="-122"/>
+                <a:cs typeface="Georgia" pitchFamily="34" charset="-120"/>
+              </a:rPr>
+              <a:t>For mixed:</a:t>
+            </a:r>
+            <a:pPr algn="l" indent="0" marL="0">
+              <a:lnSpc>
+                <a:spcPts val="1820"/>
+              </a:lnSpc>
+              <a:spcBef>
+                <a:spcPts val="300"/>
+              </a:spcBef>
+              <a:spcAft>
+                <a:spcPts val="300"/>
+              </a:spcAft>
+              <a:buNone/>
+            </a:pPr>
+            <a:r>
+              <a:rPr lang="en-US" sz="1300" dirty="0">
+                <a:solidFill>
+                  <a:srgbClr val="1C2833"/>
+                </a:solidFill>
+                <a:latin typeface="Georgia" pitchFamily="34" charset="0"/>
+                <a:ea typeface="Georgia" pitchFamily="34" charset="-122"/>
+                <a:cs typeface="Georgia" pitchFamily="34" charset="-120"/>
+              </a:rPr>
+              <a:t> </a:t>
+            </a:r>
+            <a:pPr algn="l" indent="0" marL="0">
+              <a:lnSpc>
+                <a:spcPts val="1820"/>
+              </a:lnSpc>
+              <a:spcBef>
+                <a:spcPts val="300"/>
+              </a:spcBef>
+              <a:spcAft>
+                <a:spcPts val="300"/>
+              </a:spcAft>
+              <a:buNone/>
+            </a:pPr>
+            <a:r>
+              <a:rPr lang="en-US" sz="1300" i="1" dirty="0">
+                <a:solidFill>
+                  <a:srgbClr val="1C2833"/>
+                </a:solidFill>
+                <a:latin typeface="Georgia" pitchFamily="34" charset="0"/>
+                <a:ea typeface="Georgia" pitchFamily="34" charset="-122"/>
+                <a:cs typeface="Georgia" pitchFamily="34" charset="-120"/>
+              </a:rPr>
+              <a:t>(B + x)(B − y) = B(B + x − y) + (−xy)</a:t>
+            </a:r>
+            <a:pPr algn="l" indent="0" marL="0">
+              <a:lnSpc>
+                <a:spcPts val="1820"/>
+              </a:lnSpc>
+              <a:spcBef>
+                <a:spcPts val="300"/>
+              </a:spcBef>
+              <a:spcAft>
+                <a:spcPts val="300"/>
+              </a:spcAft>
+              <a:buNone/>
+            </a:pPr>
+            <a:r>
+              <a:rPr lang="en-US" sz="1300" dirty="0">
+                <a:solidFill>
+                  <a:srgbClr val="1C2833"/>
+                </a:solidFill>
+                <a:latin typeface="Georgia" pitchFamily="34" charset="0"/>
+                <a:ea typeface="Georgia" pitchFamily="34" charset="-122"/>
+                <a:cs typeface="Georgia" pitchFamily="34" charset="-120"/>
+              </a:rPr>
+              <a:t>. Negative right part.</a:t>
+            </a:r>
+            <a:endParaRPr lang="en-US" sz="1300" dirty="0"/>
+          </a:p>
+        </p:txBody>
+      </p:sp>
+      <p:sp>
+        <p:nvSpPr>
+          <p:cNvPr id="14" name="Text 12"/>
+          <p:cNvSpPr/>
+          <p:nvPr/>
+        </p:nvSpPr>
+        <p:spPr>
+          <a:xfrm>
+            <a:off x="692051" y="3822055"/>
+            <a:ext cx="7973389" cy="461963"/>
+          </a:xfrm>
+          <a:prstGeom prst="rect">
+            <a:avLst/>
+          </a:prstGeom>
+          <a:noFill/>
+          <a:ln/>
+        </p:spPr>
+        <p:txBody>
+          <a:bodyPr wrap="square" lIns="0" tIns="0" rIns="0" bIns="0" rtlCol="0" anchor="t"/>
+          <a:lstStyle/>
+          <a:p>
+            <a:pPr algn="l" indent="0" marL="0">
+              <a:lnSpc>
+                <a:spcPts val="1820"/>
+              </a:lnSpc>
+              <a:spcBef>
+                <a:spcPts val="300"/>
+              </a:spcBef>
+              <a:spcAft>
+                <a:spcPts val="300"/>
+              </a:spcAft>
+              <a:buNone/>
+            </a:pPr>
+            <a:r>
+              <a:rPr lang="en-US" sz="1300" dirty="0">
+                <a:solidFill>
+                  <a:srgbClr val="1C2833"/>
+                </a:solidFill>
+                <a:latin typeface="Georgia" pitchFamily="34" charset="0"/>
+                <a:ea typeface="Georgia" pitchFamily="34" charset="-122"/>
+                <a:cs typeface="Georgia" pitchFamily="34" charset="-120"/>
+              </a:rPr>
+              <a:t>The sūtra </a:t>
+            </a:r>
+            <a:pPr algn="l" indent="0" marL="0">
+              <a:lnSpc>
+                <a:spcPts val="1820"/>
+              </a:lnSpc>
+              <a:spcBef>
+                <a:spcPts val="300"/>
+              </a:spcBef>
+              <a:spcAft>
+                <a:spcPts val="300"/>
+              </a:spcAft>
+              <a:buNone/>
+            </a:pPr>
+            <a:r>
+              <a:rPr lang="en-US" sz="1300" i="1" dirty="0">
+                <a:solidFill>
+                  <a:srgbClr val="1C2833"/>
+                </a:solidFill>
+                <a:latin typeface="Georgia" pitchFamily="34" charset="0"/>
+                <a:ea typeface="Georgia" pitchFamily="34" charset="-122"/>
+                <a:cs typeface="Georgia" pitchFamily="34" charset="-120"/>
+              </a:rPr>
+              <a:t>Nikhilam Navataścaramaṁ Daśataḥ</a:t>
+            </a:r>
+            <a:pPr algn="l" indent="0" marL="0">
+              <a:lnSpc>
+                <a:spcPts val="1820"/>
+              </a:lnSpc>
+              <a:spcBef>
+                <a:spcPts val="300"/>
+              </a:spcBef>
+              <a:spcAft>
+                <a:spcPts val="300"/>
+              </a:spcAft>
+              <a:buNone/>
+            </a:pPr>
+            <a:r>
+              <a:rPr lang="en-US" sz="1300" dirty="0">
+                <a:solidFill>
+                  <a:srgbClr val="1C2833"/>
+                </a:solidFill>
+                <a:latin typeface="Georgia" pitchFamily="34" charset="0"/>
+                <a:ea typeface="Georgia" pitchFamily="34" charset="-122"/>
+                <a:cs typeface="Georgia" pitchFamily="34" charset="-120"/>
+              </a:rPr>
+              <a:t> names the technique for computing the deficit fast. The multiplication shortcut is the algebraic application.</a:t>
+            </a:r>
+            <a:endParaRPr lang="en-US" sz="1300" dirty="0"/>
+          </a:p>
+        </p:txBody>
+      </p:sp>
+      <p:sp>
+        <p:nvSpPr>
+          <p:cNvPr id="15" name="Text 13"/>
+          <p:cNvSpPr/>
+          <p:nvPr/>
+        </p:nvSpPr>
+        <p:spPr>
+          <a:xfrm>
+            <a:off x="406301" y="4639568"/>
+            <a:ext cx="8498026" cy="213271"/>
+          </a:xfrm>
+          <a:prstGeom prst="rect">
+            <a:avLst/>
+          </a:prstGeom>
+          <a:noFill/>
+          <a:ln/>
+        </p:spPr>
+        <p:txBody>
+          <a:bodyPr wrap="square" lIns="0" tIns="0" rIns="0" bIns="0" rtlCol="0" anchor="t"/>
+          <a:lstStyle/>
+          <a:p>
+            <a:pPr algn="l" indent="0" marL="0">
+              <a:lnSpc>
+                <a:spcPts val="1680"/>
+              </a:lnSpc>
+              <a:spcBef>
+                <a:spcPts val="300"/>
+              </a:spcBef>
+              <a:spcAft>
+                <a:spcPts val="300"/>
+              </a:spcAft>
+              <a:buNone/>
+            </a:pPr>
+            <a:r>
+              <a:rPr lang="en-US" sz="1200" dirty="0">
+                <a:solidFill>
+                  <a:srgbClr val="1C2833"/>
+                </a:solidFill>
+                <a:latin typeface="Arial" pitchFamily="34" charset="0"/>
+                <a:ea typeface="Arial" pitchFamily="34" charset="-122"/>
+                <a:cs typeface="Arial" pitchFamily="34" charset="-120"/>
+              </a:rPr>
+              <a:t>Middle ·  · IKS Curriculum</a:t>
+            </a:r>
+            <a:endParaRPr lang="en-US" sz="1200" dirty="0"/>
+          </a:p>
+        </p:txBody>
+      </p:sp>
+    </p:spTree>
+  </p:cSld>
+  <p:clrMapOvr>
+    <a:masterClrMapping/>
+  </p:clrMapOvr>
+</p:sld>
+</file>
+
+<file path=ppt/slides/slide18.xml><?xml version="1.0" encoding="utf-8"?>
+<p:sld xmlns:a="http://schemas.openxmlformats.org/drawingml/2006/main" xmlns:r="http://schemas.openxmlformats.org/officeDocument/2006/relationships" xmlns:p="http://schemas.openxmlformats.org/presentationml/2006/main">
+  <p:cSld name="Slide 18">
+    <p:bg>
+      <p:bgPr>
+        <a:solidFill>
+          <a:srgbClr val="FFFFFF"/>
+        </a:solidFill>
+      </p:bgPr>
+    </p:bg>
+    <p:spTree>
+      <p:nvGrpSpPr>
+        <p:cNvPr id="1" name=""/>
+        <p:cNvGrpSpPr/>
+        <p:nvPr/>
+      </p:nvGrpSpPr>
+      <p:grpSpPr>
+        <a:xfrm>
+          <a:off x="0" y="0"/>
+          <a:ext cx="0" cy="0"/>
+          <a:chOff x="0" y="0"/>
+          <a:chExt cx="0" cy="0"/>
+        </a:xfrm>
+      </p:grpSpPr>
+      <p:sp>
+        <p:nvSpPr>
+          <p:cNvPr id="2" name="Text 0"/>
+          <p:cNvSpPr/>
+          <p:nvPr/>
+        </p:nvSpPr>
+        <p:spPr>
+          <a:xfrm>
+            <a:off x="0" y="0"/>
+            <a:ext cx="9144000" cy="101501"/>
+          </a:xfrm>
+          <a:prstGeom prst="rect">
+            <a:avLst/>
+          </a:prstGeom>
+          <a:solidFill>
+            <a:srgbClr val="277884"/>
+          </a:solidFill>
+          <a:ln/>
+        </p:spPr>
+        <p:txBody>
+          <a:bodyPr wrap="square" rtlCol="0" anchor="ctr"/>
+          <a:lstStyle/>
+          <a:p>
+            <a:pPr indent="0" marL="0">
+              <a:buNone/>
+            </a:pPr>
+            <a:endParaRPr lang="en-US" dirty="0"/>
+          </a:p>
+        </p:txBody>
+      </p:sp>
+      <p:sp>
+        <p:nvSpPr>
+          <p:cNvPr id="3" name="Text 1"/>
+          <p:cNvSpPr/>
+          <p:nvPr/>
+        </p:nvSpPr>
+        <p:spPr>
+          <a:xfrm>
+            <a:off x="406301" y="457051"/>
+            <a:ext cx="8498026" cy="274290"/>
+          </a:xfrm>
+          <a:prstGeom prst="rect">
+            <a:avLst/>
+          </a:prstGeom>
+          <a:noFill/>
+          <a:ln/>
+        </p:spPr>
+        <p:txBody>
+          <a:bodyPr wrap="square" lIns="0" tIns="0" rIns="0" bIns="0" rtlCol="0" anchor="t"/>
+          <a:lstStyle/>
+          <a:p>
+            <a:pPr algn="l" indent="0" marL="0">
+              <a:lnSpc>
+                <a:spcPts val="2160"/>
+              </a:lnSpc>
+              <a:spcBef>
+                <a:spcPts val="600"/>
+              </a:spcBef>
+              <a:spcAft>
+                <a:spcPts val="800"/>
+              </a:spcAft>
+              <a:buNone/>
+            </a:pPr>
+            <a:r>
+              <a:rPr lang="en-US" sz="1800" b="1" dirty="0">
+                <a:solidFill>
+                  <a:srgbClr val="FE4447"/>
+                </a:solidFill>
+                <a:latin typeface="Georgia" pitchFamily="34" charset="0"/>
+                <a:ea typeface="Georgia" pitchFamily="34" charset="-122"/>
+                <a:cs typeface="Georgia" pitchFamily="34" charset="-120"/>
+              </a:rPr>
+              <a:t>Homework</a:t>
+            </a:r>
+            <a:endParaRPr lang="en-US" sz="1800" dirty="0"/>
+          </a:p>
+        </p:txBody>
+      </p:sp>
+      <p:sp>
+        <p:nvSpPr>
+          <p:cNvPr id="4" name="Text 2"/>
+          <p:cNvSpPr/>
+          <p:nvPr/>
+        </p:nvSpPr>
+        <p:spPr>
+          <a:xfrm>
+            <a:off x="634901" y="883593"/>
+            <a:ext cx="8102798" cy="937022"/>
+          </a:xfrm>
+          <a:prstGeom prst="rect">
+            <a:avLst/>
+          </a:prstGeom>
+          <a:noFill/>
+          <a:ln/>
+        </p:spPr>
+        <p:txBody>
+          <a:bodyPr wrap="square" lIns="0" tIns="0" rIns="0" bIns="0" rtlCol="0" anchor="t"/>
+          <a:lstStyle/>
+          <a:p>
+            <a:pPr algn="l" marL="342900" indent="-342900">
+              <a:lnSpc>
+                <a:spcPts val="1620"/>
+              </a:lnSpc>
+              <a:spcAft>
+                <a:spcPts val="300"/>
+              </a:spcAft>
+              <a:buSzPct val="100000"/>
+              <a:buChar char="•"/>
+            </a:pPr>
+            <a:r>
+              <a:rPr lang="en-US" sz="1200" dirty="0">
+                <a:solidFill>
+                  <a:srgbClr val="1C2833"/>
+                </a:solidFill>
+                <a:latin typeface="Arial" pitchFamily="34" charset="0"/>
+                <a:ea typeface="Arial" pitchFamily="34" charset="-122"/>
+                <a:cs typeface="Arial" pitchFamily="34" charset="-120"/>
+              </a:rPr>
+              <a:t>Write a 1-paragraph explanation suitable for a Grade 7 student (your own grade level). Include one worked example with the algebra shown.</a:t>
+            </a:r>
+            <a:endParaRPr lang="en-US" sz="1200" dirty="0"/>
+          </a:p>
+          <a:p>
+            <a:pPr algn="l" marL="342900" indent="-342900">
+              <a:lnSpc>
+                <a:spcPts val="1620"/>
+              </a:lnSpc>
+              <a:spcAft>
+                <a:spcPts val="300"/>
+              </a:spcAft>
+              <a:buSzPct val="100000"/>
+              <a:buChar char="•"/>
+            </a:pPr>
+            <a:r>
+              <a:rPr lang="en-US" sz="1200" dirty="0">
+                <a:solidFill>
+                  <a:srgbClr val="1C2833"/>
+                </a:solidFill>
+                <a:latin typeface="Arial" pitchFamily="34" charset="0"/>
+                <a:ea typeface="Arial" pitchFamily="34" charset="-122"/>
+                <a:cs typeface="Arial" pitchFamily="34" charset="-120"/>
+              </a:rPr>
+              <a:t>Prove (B + x)(B − x) = B² − x² using the above identity. Find an example where this is faster than long multiplication. (Hint: 101 × 99.)</a:t>
+            </a:r>
+            <a:endParaRPr lang="en-US" sz="1200" dirty="0"/>
+          </a:p>
+        </p:txBody>
+      </p:sp>
+      <p:sp>
+        <p:nvSpPr>
+          <p:cNvPr id="5" name="Text 3"/>
+          <p:cNvSpPr/>
+          <p:nvPr/>
+        </p:nvSpPr>
+        <p:spPr>
+          <a:xfrm>
+            <a:off x="406301" y="4434929"/>
+            <a:ext cx="8498026" cy="213271"/>
+          </a:xfrm>
+          <a:prstGeom prst="rect">
+            <a:avLst/>
+          </a:prstGeom>
+          <a:noFill/>
+          <a:ln/>
+        </p:spPr>
+        <p:txBody>
+          <a:bodyPr wrap="square" lIns="0" tIns="0" rIns="0" bIns="0" rtlCol="0" anchor="t"/>
+          <a:lstStyle/>
+          <a:p>
+            <a:pPr algn="l" indent="0" marL="0">
+              <a:lnSpc>
+                <a:spcPts val="1680"/>
+              </a:lnSpc>
+              <a:spcBef>
+                <a:spcPts val="300"/>
+              </a:spcBef>
+              <a:spcAft>
+                <a:spcPts val="300"/>
+              </a:spcAft>
+              <a:buNone/>
+            </a:pPr>
+            <a:r>
+              <a:rPr lang="en-US" sz="1200" dirty="0">
+                <a:solidFill>
+                  <a:srgbClr val="1C2833"/>
+                </a:solidFill>
+                <a:latin typeface="Arial" pitchFamily="34" charset="0"/>
+                <a:ea typeface="Arial" pitchFamily="34" charset="-122"/>
+                <a:cs typeface="Arial" pitchFamily="34" charset="-120"/>
+              </a:rPr>
+              <a:t>Middle ·  · IKS Curriculum</a:t>
+            </a:r>
+            <a:endParaRPr lang="en-US" sz="1200" dirty="0"/>
+          </a:p>
+        </p:txBody>
+      </p:sp>
+    </p:spTree>
+  </p:cSld>
+  <p:clrMapOvr>
+    <a:masterClrMapping/>
+  </p:clrMapOvr>
+</p:sld>
+</file>
+
+<file path=ppt/slides/slide19.xml><?xml version="1.0" encoding="utf-8"?>
+<p:sld xmlns:a="http://schemas.openxmlformats.org/drawingml/2006/main" xmlns:r="http://schemas.openxmlformats.org/officeDocument/2006/relationships" xmlns:p="http://schemas.openxmlformats.org/presentationml/2006/main">
+  <p:cSld name="Slide 19">
+    <p:bg>
+      <p:bgPr>
+        <a:solidFill>
+          <a:srgbClr val="FFFFFF"/>
+        </a:solidFill>
+      </p:bgPr>
+    </p:bg>
+    <p:spTree>
+      <p:nvGrpSpPr>
+        <p:cNvPr id="1" name=""/>
+        <p:cNvGrpSpPr/>
+        <p:nvPr/>
+      </p:nvGrpSpPr>
+      <p:grpSpPr>
+        <a:xfrm>
+          <a:off x="0" y="0"/>
+          <a:ext cx="0" cy="0"/>
+          <a:chOff x="0" y="0"/>
+          <a:chExt cx="0" cy="0"/>
+        </a:xfrm>
+      </p:grpSpPr>
+      <p:sp>
+        <p:nvSpPr>
+          <p:cNvPr id="2" name="Text 0"/>
+          <p:cNvSpPr/>
+          <p:nvPr/>
+        </p:nvSpPr>
+        <p:spPr>
+          <a:xfrm>
+            <a:off x="0" y="0"/>
+            <a:ext cx="9144000" cy="101501"/>
+          </a:xfrm>
+          <a:prstGeom prst="rect">
+            <a:avLst/>
+          </a:prstGeom>
+          <a:solidFill>
+            <a:srgbClr val="277884"/>
+          </a:solidFill>
+          <a:ln/>
+        </p:spPr>
+        <p:txBody>
+          <a:bodyPr wrap="square" rtlCol="0" anchor="ctr"/>
+          <a:lstStyle/>
+          <a:p>
+            <a:pPr indent="0" marL="0">
+              <a:buNone/>
+            </a:pPr>
+            <a:endParaRPr lang="en-US" dirty="0"/>
+          </a:p>
+        </p:txBody>
+      </p:sp>
+      <p:sp>
+        <p:nvSpPr>
+          <p:cNvPr id="3" name="Text 1"/>
+          <p:cNvSpPr/>
+          <p:nvPr/>
+        </p:nvSpPr>
+        <p:spPr>
+          <a:xfrm>
+            <a:off x="406301" y="457051"/>
+            <a:ext cx="8498026" cy="274290"/>
+          </a:xfrm>
+          <a:prstGeom prst="rect">
+            <a:avLst/>
+          </a:prstGeom>
+          <a:noFill/>
+          <a:ln/>
+        </p:spPr>
+        <p:txBody>
+          <a:bodyPr wrap="square" lIns="0" tIns="0" rIns="0" bIns="0" rtlCol="0" anchor="t"/>
+          <a:lstStyle/>
+          <a:p>
+            <a:pPr algn="l" indent="0" marL="0">
+              <a:lnSpc>
+                <a:spcPts val="2160"/>
+              </a:lnSpc>
+              <a:spcBef>
+                <a:spcPts val="600"/>
+              </a:spcBef>
+              <a:spcAft>
+                <a:spcPts val="800"/>
+              </a:spcAft>
+              <a:buNone/>
+            </a:pPr>
+            <a:r>
+              <a:rPr lang="en-US" sz="1800" b="1" dirty="0">
+                <a:solidFill>
+                  <a:srgbClr val="FE4447"/>
+                </a:solidFill>
+                <a:latin typeface="Georgia" pitchFamily="34" charset="0"/>
+                <a:ea typeface="Georgia" pitchFamily="34" charset="-122"/>
+                <a:cs typeface="Georgia" pitchFamily="34" charset="-120"/>
+              </a:rPr>
+              <a:t>Differentiation</a:t>
+            </a:r>
+            <a:endParaRPr lang="en-US" sz="1800" dirty="0"/>
+          </a:p>
+        </p:txBody>
+      </p:sp>
+      <p:sp>
+        <p:nvSpPr>
+          <p:cNvPr id="4" name="Text 2"/>
+          <p:cNvSpPr/>
+          <p:nvPr/>
+        </p:nvSpPr>
+        <p:spPr>
+          <a:xfrm>
+            <a:off x="634901" y="883593"/>
+            <a:ext cx="8102798" cy="956072"/>
+          </a:xfrm>
+          <a:prstGeom prst="rect">
+            <a:avLst/>
+          </a:prstGeom>
+          <a:noFill/>
+          <a:ln/>
+        </p:spPr>
+        <p:txBody>
+          <a:bodyPr wrap="square" lIns="0" tIns="0" rIns="0" bIns="0" rtlCol="0" anchor="t"/>
+          <a:lstStyle/>
+          <a:p>
+            <a:pPr algn="l" marL="342900" indent="-342900">
+              <a:lnSpc>
+                <a:spcPts val="1620"/>
+              </a:lnSpc>
+              <a:spcAft>
+                <a:spcPts val="300"/>
+              </a:spcAft>
+              <a:buSzPct val="100000"/>
+              <a:buChar char="•"/>
+            </a:pPr>
+            <a:r>
+              <a:rPr lang="en-US" sz="1200" b="1" dirty="0">
+                <a:solidFill>
+                  <a:srgbClr val="1C2833"/>
+                </a:solidFill>
+                <a:latin typeface="Arial" pitchFamily="34" charset="0"/>
+                <a:ea typeface="Arial" pitchFamily="34" charset="-122"/>
+                <a:cs typeface="Arial" pitchFamily="34" charset="-120"/>
+              </a:rPr>
+              <a:t>Tier up:</a:t>
+            </a:r>
+            <a:pPr algn="l" indent="0" marL="0">
+              <a:lnSpc>
+                <a:spcPts val="1620"/>
+              </a:lnSpc>
+              <a:spcAft>
+                <a:spcPts val="300"/>
+              </a:spcAft>
+              <a:buNone/>
+            </a:pPr>
+            <a:r>
+              <a:rPr lang="en-US" sz="1200" dirty="0">
+                <a:solidFill>
+                  <a:srgbClr val="1C2833"/>
+                </a:solidFill>
+                <a:latin typeface="Arial" pitchFamily="34" charset="0"/>
+                <a:ea typeface="Arial" pitchFamily="34" charset="-122"/>
+                <a:cs typeface="Arial" pitchFamily="34" charset="-120"/>
+              </a:rPr>
+              <a:t> Generalise. For three factors </a:t>
+            </a:r>
+            <a:pPr algn="l" indent="0" marL="0">
+              <a:lnSpc>
+                <a:spcPts val="1620"/>
+              </a:lnSpc>
+              <a:spcAft>
+                <a:spcPts val="300"/>
+              </a:spcAft>
+              <a:buNone/>
+            </a:pPr>
+            <a:r>
+              <a:rPr lang="en-US" sz="1200" dirty="0">
+                <a:solidFill>
+                  <a:srgbClr val="1C2833"/>
+                </a:solidFill>
+                <a:latin typeface="Arial" pitchFamily="34" charset="0"/>
+                <a:ea typeface="Arial" pitchFamily="34" charset="-122"/>
+                <a:cs typeface="Arial" pitchFamily="34" charset="-120"/>
+              </a:rPr>
+              <a:t>(B − a)(B − b)(B − c)</a:t>
+            </a:r>
+            <a:pPr algn="l" indent="0" marL="0">
+              <a:lnSpc>
+                <a:spcPts val="1620"/>
+              </a:lnSpc>
+              <a:spcAft>
+                <a:spcPts val="300"/>
+              </a:spcAft>
+              <a:buNone/>
+            </a:pPr>
+            <a:r>
+              <a:rPr lang="en-US" sz="1200" dirty="0">
+                <a:solidFill>
+                  <a:srgbClr val="1C2833"/>
+                </a:solidFill>
+                <a:latin typeface="Arial" pitchFamily="34" charset="0"/>
+                <a:ea typeface="Arial" pitchFamily="34" charset="-122"/>
+                <a:cs typeface="Arial" pitchFamily="34" charset="-120"/>
+              </a:rPr>
+              <a:t>, expand. Does the Nikhilam pattern extend? (Yes — for three factors near a base, see </a:t>
+            </a:r>
+            <a:pPr algn="l" indent="0" marL="0">
+              <a:lnSpc>
+                <a:spcPts val="1620"/>
+              </a:lnSpc>
+              <a:spcAft>
+                <a:spcPts val="300"/>
+              </a:spcAft>
+              <a:buNone/>
+            </a:pPr>
+            <a:r>
+              <a:rPr lang="en-US" sz="1200" i="1" dirty="0">
+                <a:solidFill>
+                  <a:srgbClr val="1C2833"/>
+                </a:solidFill>
+                <a:latin typeface="Arial" pitchFamily="34" charset="0"/>
+                <a:ea typeface="Arial" pitchFamily="34" charset="-122"/>
+                <a:cs typeface="Arial" pitchFamily="34" charset="-120"/>
+              </a:rPr>
+              <a:t>Vedic Mathematics Batch1.pdf</a:t>
+            </a:r>
+            <a:pPr algn="l" indent="0" marL="0">
+              <a:lnSpc>
+                <a:spcPts val="1620"/>
+              </a:lnSpc>
+              <a:spcAft>
+                <a:spcPts val="300"/>
+              </a:spcAft>
+              <a:buNone/>
+            </a:pPr>
+            <a:r>
+              <a:rPr lang="en-US" sz="1200" dirty="0">
+                <a:solidFill>
+                  <a:srgbClr val="1C2833"/>
+                </a:solidFill>
+                <a:latin typeface="Arial" pitchFamily="34" charset="0"/>
+                <a:ea typeface="Arial" pitchFamily="34" charset="-122"/>
+                <a:cs typeface="Arial" pitchFamily="34" charset="-120"/>
+              </a:rPr>
+              <a:t> extension section.)</a:t>
+            </a:r>
+            <a:endParaRPr lang="en-US" sz="1200" dirty="0"/>
+          </a:p>
+          <a:p>
+            <a:pPr algn="l" marL="342900" indent="-342900">
+              <a:lnSpc>
+                <a:spcPts val="1620"/>
+              </a:lnSpc>
+              <a:spcAft>
+                <a:spcPts val="300"/>
+              </a:spcAft>
+              <a:buSzPct val="100000"/>
+              <a:buChar char="•"/>
+            </a:pPr>
+            <a:r>
+              <a:rPr lang="en-US" sz="1200" b="1" dirty="0">
+                <a:solidFill>
+                  <a:srgbClr val="1C2833"/>
+                </a:solidFill>
+                <a:latin typeface="Arial" pitchFamily="34" charset="0"/>
+                <a:ea typeface="Arial" pitchFamily="34" charset="-122"/>
+                <a:cs typeface="Arial" pitchFamily="34" charset="-120"/>
+              </a:rPr>
+              <a:t>Tier down:</a:t>
+            </a:r>
+            <a:pPr algn="l" indent="0" marL="0">
+              <a:lnSpc>
+                <a:spcPts val="1620"/>
+              </a:lnSpc>
+              <a:spcAft>
+                <a:spcPts val="300"/>
+              </a:spcAft>
+              <a:buNone/>
+            </a:pPr>
+            <a:r>
+              <a:rPr lang="en-US" sz="1200" dirty="0">
+                <a:solidFill>
+                  <a:srgbClr val="1C2833"/>
+                </a:solidFill>
+                <a:latin typeface="Arial" pitchFamily="34" charset="0"/>
+                <a:ea typeface="Arial" pitchFamily="34" charset="-122"/>
+                <a:cs typeface="Arial" pitchFamily="34" charset="-120"/>
+              </a:rPr>
+              <a:t> Skip the formal algebra. Verify the identity by plugging in numbers (B=100, a=3, b=4 → both sides give 9312).</a:t>
+            </a:r>
+            <a:endParaRPr lang="en-US" sz="1200" dirty="0"/>
+          </a:p>
+        </p:txBody>
+      </p:sp>
+      <p:sp>
+        <p:nvSpPr>
+          <p:cNvPr id="5" name="Text 3"/>
           <p:cNvSpPr/>
           <p:nvPr/>
         </p:nvSpPr>
@@ -2570,7 +8004,7 @@
                 <a:ea typeface="Georgia" pitchFamily="34" charset="-122"/>
                 <a:cs typeface="Georgia" pitchFamily="34" charset="-120"/>
               </a:rPr>
-              <a:t>Materials</a:t>
+              <a:t>Learning objective</a:t>
             </a:r>
             <a:endParaRPr lang="en-US" sz="1800" dirty="0"/>
           </a:p>
@@ -2585,7 +8019,7 @@
         <p:spPr>
           <a:xfrm>
             <a:off x="406301" y="870942"/>
-            <a:ext cx="8498026" cy="436066"/>
+            <a:ext cx="8498026" cy="445591"/>
           </a:xfrm>
           <a:prstGeom prst="rect">
             <a:avLst/>
@@ -2618,7 +8052,7 @@
                 <a:ea typeface="Arial" pitchFamily="34" charset="-122"/>
                 <a:cs typeface="Arial" pitchFamily="34" charset="-120"/>
               </a:rPr>
-              <a:t>– Whiteboard. – The 16-sūtra list (</a:t>
+              <a:t>By the end of this lesson, students will state the algebraic identity behind the Nikhilam method </a:t>
             </a:r>
             <a:pPr algn="l" indent="0" marL="0">
               <a:lnSpc>
@@ -2641,30 +8075,734 @@
                 <a:ea typeface="Arial" pitchFamily="34" charset="-122"/>
                 <a:cs typeface="Arial" pitchFamily="34" charset="-120"/>
               </a:rPr>
+              <a:t>(B − a)(B − b) = B(B − a − b) + ab</a:t>
+            </a:r>
+            <a:pPr algn="l" indent="0" marL="0">
+              <a:lnSpc>
+                <a:spcPts val="1680"/>
+              </a:lnSpc>
+              <a:spcBef>
+                <a:spcPts val="300"/>
+              </a:spcBef>
+              <a:spcAft>
+                <a:spcPts val="300"/>
+              </a:spcAft>
+              <a:buNone/>
+            </a:pPr>
+            <a:r>
+              <a:rPr lang="en-US" sz="1200" dirty="0">
+                <a:solidFill>
+                  <a:srgbClr val="1C2833"/>
+                </a:solidFill>
+                <a:latin typeface="Arial" pitchFamily="34" charset="0"/>
+                <a:ea typeface="Arial" pitchFamily="34" charset="-122"/>
+                <a:cs typeface="Arial" pitchFamily="34" charset="-120"/>
+              </a:rPr>
+              <a:t>, derive it on paper, and explain in their own words why this matches the procedure.</a:t>
+            </a:r>
+            <a:endParaRPr lang="en-US" sz="1200" dirty="0"/>
+          </a:p>
+        </p:txBody>
+      </p:sp>
+      <p:sp>
+        <p:nvSpPr>
+          <p:cNvPr id="5" name="Text 3"/>
+          <p:cNvSpPr/>
+          <p:nvPr/>
+        </p:nvSpPr>
+        <p:spPr>
+          <a:xfrm>
+            <a:off x="406301" y="4434929"/>
+            <a:ext cx="8498026" cy="213271"/>
+          </a:xfrm>
+          <a:prstGeom prst="rect">
+            <a:avLst/>
+          </a:prstGeom>
+          <a:noFill/>
+          <a:ln/>
+        </p:spPr>
+        <p:txBody>
+          <a:bodyPr wrap="square" lIns="0" tIns="0" rIns="0" bIns="0" rtlCol="0" anchor="t"/>
+          <a:lstStyle/>
+          <a:p>
+            <a:pPr algn="l" indent="0" marL="0">
+              <a:lnSpc>
+                <a:spcPts val="1680"/>
+              </a:lnSpc>
+              <a:spcBef>
+                <a:spcPts val="300"/>
+              </a:spcBef>
+              <a:spcAft>
+                <a:spcPts val="300"/>
+              </a:spcAft>
+              <a:buNone/>
+            </a:pPr>
+            <a:r>
+              <a:rPr lang="en-US" sz="1200" dirty="0">
+                <a:solidFill>
+                  <a:srgbClr val="1C2833"/>
+                </a:solidFill>
+                <a:latin typeface="Arial" pitchFamily="34" charset="0"/>
+                <a:ea typeface="Arial" pitchFamily="34" charset="-122"/>
+                <a:cs typeface="Arial" pitchFamily="34" charset="-120"/>
+              </a:rPr>
+              <a:t>Middle ·  · IKS Curriculum</a:t>
+            </a:r>
+            <a:endParaRPr lang="en-US" sz="1200" dirty="0"/>
+          </a:p>
+        </p:txBody>
+      </p:sp>
+    </p:spTree>
+  </p:cSld>
+  <p:clrMapOvr>
+    <a:masterClrMapping/>
+  </p:clrMapOvr>
+</p:sld>
+</file>
+
+<file path=ppt/slides/slide20.xml><?xml version="1.0" encoding="utf-8"?>
+<p:sld xmlns:a="http://schemas.openxmlformats.org/drawingml/2006/main" xmlns:r="http://schemas.openxmlformats.org/officeDocument/2006/relationships" xmlns:p="http://schemas.openxmlformats.org/presentationml/2006/main">
+  <p:cSld name="Slide 20">
+    <p:bg>
+      <p:bgPr>
+        <a:solidFill>
+          <a:srgbClr val="FFFFFF"/>
+        </a:solidFill>
+      </p:bgPr>
+    </p:bg>
+    <p:spTree>
+      <p:nvGrpSpPr>
+        <p:cNvPr id="1" name=""/>
+        <p:cNvGrpSpPr/>
+        <p:nvPr/>
+      </p:nvGrpSpPr>
+      <p:grpSpPr>
+        <a:xfrm>
+          <a:off x="0" y="0"/>
+          <a:ext cx="0" cy="0"/>
+          <a:chOff x="0" y="0"/>
+          <a:chExt cx="0" cy="0"/>
+        </a:xfrm>
+      </p:grpSpPr>
+      <p:sp>
+        <p:nvSpPr>
+          <p:cNvPr id="2" name="Text 0"/>
+          <p:cNvSpPr/>
+          <p:nvPr/>
+        </p:nvSpPr>
+        <p:spPr>
+          <a:xfrm>
+            <a:off x="0" y="0"/>
+            <a:ext cx="9144000" cy="101501"/>
+          </a:xfrm>
+          <a:prstGeom prst="rect">
+            <a:avLst/>
+          </a:prstGeom>
+          <a:solidFill>
+            <a:srgbClr val="277884"/>
+          </a:solidFill>
+          <a:ln/>
+        </p:spPr>
+        <p:txBody>
+          <a:bodyPr wrap="square" rtlCol="0" anchor="ctr"/>
+          <a:lstStyle/>
+          <a:p>
+            <a:pPr indent="0" marL="0">
+              <a:buNone/>
+            </a:pPr>
+            <a:endParaRPr lang="en-US" dirty="0"/>
+          </a:p>
+        </p:txBody>
+      </p:sp>
+      <p:sp>
+        <p:nvSpPr>
+          <p:cNvPr id="3" name="Text 1"/>
+          <p:cNvSpPr/>
+          <p:nvPr/>
+        </p:nvSpPr>
+        <p:spPr>
+          <a:xfrm>
+            <a:off x="406301" y="457051"/>
+            <a:ext cx="8498026" cy="274290"/>
+          </a:xfrm>
+          <a:prstGeom prst="rect">
+            <a:avLst/>
+          </a:prstGeom>
+          <a:noFill/>
+          <a:ln/>
+        </p:spPr>
+        <p:txBody>
+          <a:bodyPr wrap="square" lIns="0" tIns="0" rIns="0" bIns="0" rtlCol="0" anchor="t"/>
+          <a:lstStyle/>
+          <a:p>
+            <a:pPr algn="l" indent="0" marL="0">
+              <a:lnSpc>
+                <a:spcPts val="2160"/>
+              </a:lnSpc>
+              <a:spcBef>
+                <a:spcPts val="600"/>
+              </a:spcBef>
+              <a:spcAft>
+                <a:spcPts val="800"/>
+              </a:spcAft>
+              <a:buNone/>
+            </a:pPr>
+            <a:r>
+              <a:rPr lang="en-US" sz="1800" b="1" dirty="0">
+                <a:solidFill>
+                  <a:srgbClr val="FE4447"/>
+                </a:solidFill>
+                <a:latin typeface="Georgia" pitchFamily="34" charset="0"/>
+                <a:ea typeface="Georgia" pitchFamily="34" charset="-122"/>
+                <a:cs typeface="Georgia" pitchFamily="34" charset="-120"/>
+              </a:rPr>
+              <a:t>Teacher notes</a:t>
+            </a:r>
+            <a:endParaRPr lang="en-US" sz="1800" dirty="0"/>
+          </a:p>
+        </p:txBody>
+      </p:sp>
+      <p:sp>
+        <p:nvSpPr>
+          <p:cNvPr id="4" name="Text 2"/>
+          <p:cNvSpPr/>
+          <p:nvPr/>
+        </p:nvSpPr>
+        <p:spPr>
+          <a:xfrm>
+            <a:off x="634901" y="883593"/>
+            <a:ext cx="8102798" cy="1592163"/>
+          </a:xfrm>
+          <a:prstGeom prst="rect">
+            <a:avLst/>
+          </a:prstGeom>
+          <a:noFill/>
+          <a:ln/>
+        </p:spPr>
+        <p:txBody>
+          <a:bodyPr wrap="square" lIns="0" tIns="0" rIns="0" bIns="0" rtlCol="0" anchor="t"/>
+          <a:lstStyle/>
+          <a:p>
+            <a:pPr algn="l" marL="342900" indent="-342900">
+              <a:lnSpc>
+                <a:spcPts val="1620"/>
+              </a:lnSpc>
+              <a:spcAft>
+                <a:spcPts val="300"/>
+              </a:spcAft>
+              <a:buSzPct val="100000"/>
+              <a:buChar char="•"/>
+            </a:pPr>
+            <a:r>
+              <a:rPr lang="en-US" sz="1200" dirty="0">
+                <a:solidFill>
+                  <a:srgbClr val="1C2833"/>
+                </a:solidFill>
+                <a:latin typeface="Arial" pitchFamily="34" charset="0"/>
+                <a:ea typeface="Arial" pitchFamily="34" charset="-122"/>
+                <a:cs typeface="Arial" pitchFamily="34" charset="-120"/>
+              </a:rPr>
+              <a:t>The honest framing in one sentence: </a:t>
+            </a:r>
+            <a:pPr algn="l" indent="0" marL="0">
+              <a:lnSpc>
+                <a:spcPts val="1620"/>
+              </a:lnSpc>
+              <a:spcAft>
+                <a:spcPts val="300"/>
+              </a:spcAft>
+              <a:buNone/>
+            </a:pPr>
+            <a:r>
+              <a:rPr lang="en-US" sz="1200" i="1" dirty="0">
+                <a:solidFill>
+                  <a:srgbClr val="1C2833"/>
+                </a:solidFill>
+                <a:latin typeface="Arial" pitchFamily="34" charset="0"/>
+                <a:ea typeface="Arial" pitchFamily="34" charset="-122"/>
+                <a:cs typeface="Arial" pitchFamily="34" charset="-120"/>
+              </a:rPr>
+              <a:t>"The Sanskrit sūtra names the deficit-computation rule. The algebraic identity is what makes the multiplication trick work, and that identity is just standard FOIL / distributivity."</a:t>
+            </a:r>
+            <a:endParaRPr lang="en-US" sz="1200" dirty="0"/>
+          </a:p>
+          <a:p>
+            <a:pPr algn="l" marL="342900" indent="-342900">
+              <a:lnSpc>
+                <a:spcPts val="1620"/>
+              </a:lnSpc>
+              <a:spcAft>
+                <a:spcPts val="300"/>
+              </a:spcAft>
+              <a:buSzPct val="100000"/>
+              <a:buChar char="•"/>
+            </a:pPr>
+            <a:r>
+              <a:rPr lang="en-US" sz="1200" dirty="0">
+                <a:solidFill>
+                  <a:srgbClr val="1C2833"/>
+                </a:solidFill>
+                <a:latin typeface="Arial" pitchFamily="34" charset="0"/>
+                <a:ea typeface="Arial" pitchFamily="34" charset="-122"/>
+                <a:cs typeface="Arial" pitchFamily="34" charset="-120"/>
+              </a:rPr>
+              <a:t>A few students will object: </a:t>
+            </a:r>
+            <a:pPr algn="l" indent="0" marL="0">
+              <a:lnSpc>
+                <a:spcPts val="1620"/>
+              </a:lnSpc>
+              <a:spcAft>
+                <a:spcPts val="300"/>
+              </a:spcAft>
+              <a:buNone/>
+            </a:pPr>
+            <a:r>
+              <a:rPr lang="en-US" sz="1200" i="1" dirty="0">
+                <a:solidFill>
+                  <a:srgbClr val="1C2833"/>
+                </a:solidFill>
+                <a:latin typeface="Arial" pitchFamily="34" charset="0"/>
+                <a:ea typeface="Arial" pitchFamily="34" charset="-122"/>
+                <a:cs typeface="Arial" pitchFamily="34" charset="-120"/>
+              </a:rPr>
+              <a:t>"If the algebra is just algebra, why call it Vedic?"</a:t>
+            </a:r>
+            <a:pPr algn="l" indent="0" marL="0">
+              <a:lnSpc>
+                <a:spcPts val="1620"/>
+              </a:lnSpc>
+              <a:spcAft>
+                <a:spcPts val="300"/>
+              </a:spcAft>
+              <a:buNone/>
+            </a:pPr>
+            <a:r>
+              <a:rPr lang="en-US" sz="1200" dirty="0">
+                <a:solidFill>
+                  <a:srgbClr val="1C2833"/>
+                </a:solidFill>
+                <a:latin typeface="Arial" pitchFamily="34" charset="0"/>
+                <a:ea typeface="Arial" pitchFamily="34" charset="-122"/>
+                <a:cs typeface="Arial" pitchFamily="34" charset="-120"/>
+              </a:rPr>
+              <a:t> Honest answer: </a:t>
+            </a:r>
+            <a:pPr algn="l" indent="0" marL="0">
+              <a:lnSpc>
+                <a:spcPts val="1620"/>
+              </a:lnSpc>
+              <a:spcAft>
+                <a:spcPts val="300"/>
+              </a:spcAft>
+              <a:buNone/>
+            </a:pPr>
+            <a:r>
+              <a:rPr lang="en-US" sz="1200" i="1" dirty="0">
+                <a:solidFill>
+                  <a:srgbClr val="1C2833"/>
+                </a:solidFill>
+                <a:latin typeface="Arial" pitchFamily="34" charset="0"/>
+                <a:ea typeface="Arial" pitchFamily="34" charset="-122"/>
+                <a:cs typeface="Arial" pitchFamily="34" charset="-120"/>
+              </a:rPr>
+              <a:t>"Good catch. The procedure has a Sanskrit name and was published in 1965 by Tirthaji. The math itself is older than any name — it's the distributive property. The Vedic-mathematics framing is contested among historians; we'll engage with that more at Senior band."</a:t>
+            </a:r>
+            <a:endParaRPr lang="en-US" sz="1200" dirty="0"/>
+          </a:p>
+          <a:p>
+            <a:pPr algn="l" marL="342900" indent="-342900">
+              <a:lnSpc>
+                <a:spcPts val="1620"/>
+              </a:lnSpc>
+              <a:spcAft>
+                <a:spcPts val="300"/>
+              </a:spcAft>
+              <a:buSzPct val="100000"/>
+              <a:buChar char="•"/>
+            </a:pPr>
+            <a:r>
+              <a:rPr lang="en-US" sz="1200" dirty="0">
+                <a:solidFill>
+                  <a:srgbClr val="1C2833"/>
+                </a:solidFill>
+                <a:latin typeface="Arial" pitchFamily="34" charset="0"/>
+                <a:ea typeface="Arial" pitchFamily="34" charset="-122"/>
+                <a:cs typeface="Arial" pitchFamily="34" charset="-120"/>
+              </a:rPr>
+              <a:t>Reinforce: this is </a:t>
+            </a:r>
+            <a:pPr algn="l" indent="0" marL="0">
+              <a:lnSpc>
+                <a:spcPts val="1620"/>
+              </a:lnSpc>
+              <a:spcAft>
+                <a:spcPts val="300"/>
+              </a:spcAft>
+              <a:buNone/>
+            </a:pPr>
+            <a:r>
+              <a:rPr lang="en-US" sz="1200" i="1" dirty="0">
+                <a:solidFill>
+                  <a:srgbClr val="1C2833"/>
+                </a:solidFill>
+                <a:latin typeface="Arial" pitchFamily="34" charset="0"/>
+                <a:ea typeface="Arial" pitchFamily="34" charset="-122"/>
+                <a:cs typeface="Arial" pitchFamily="34" charset="-120"/>
+              </a:rPr>
+              <a:t>not</a:t>
+            </a:r>
+            <a:pPr algn="l" indent="0" marL="0">
+              <a:lnSpc>
+                <a:spcPts val="1620"/>
+              </a:lnSpc>
+              <a:spcAft>
+                <a:spcPts val="300"/>
+              </a:spcAft>
+              <a:buNone/>
+            </a:pPr>
+            <a:r>
+              <a:rPr lang="en-US" sz="1200" dirty="0">
+                <a:solidFill>
+                  <a:srgbClr val="1C2833"/>
+                </a:solidFill>
+                <a:latin typeface="Arial" pitchFamily="34" charset="0"/>
+                <a:ea typeface="Arial" pitchFamily="34" charset="-122"/>
+                <a:cs typeface="Arial" pitchFamily="34" charset="-120"/>
+              </a:rPr>
+              <a:t> a debunking. It's an honesty about what's old (algebra), what's modern (the packaging as 16 sūtras), and what's contested (the Vedic provenance).</a:t>
+            </a:r>
+            <a:endParaRPr lang="en-US" sz="1200" dirty="0"/>
+          </a:p>
+        </p:txBody>
+      </p:sp>
+      <p:sp>
+        <p:nvSpPr>
+          <p:cNvPr id="5" name="Text 3"/>
+          <p:cNvSpPr/>
+          <p:nvPr/>
+        </p:nvSpPr>
+        <p:spPr>
+          <a:xfrm>
+            <a:off x="406301" y="4434929"/>
+            <a:ext cx="8498026" cy="213271"/>
+          </a:xfrm>
+          <a:prstGeom prst="rect">
+            <a:avLst/>
+          </a:prstGeom>
+          <a:noFill/>
+          <a:ln/>
+        </p:spPr>
+        <p:txBody>
+          <a:bodyPr wrap="square" lIns="0" tIns="0" rIns="0" bIns="0" rtlCol="0" anchor="t"/>
+          <a:lstStyle/>
+          <a:p>
+            <a:pPr algn="l" indent="0" marL="0">
+              <a:lnSpc>
+                <a:spcPts val="1680"/>
+              </a:lnSpc>
+              <a:spcBef>
+                <a:spcPts val="300"/>
+              </a:spcBef>
+              <a:spcAft>
+                <a:spcPts val="300"/>
+              </a:spcAft>
+              <a:buNone/>
+            </a:pPr>
+            <a:r>
+              <a:rPr lang="en-US" sz="1200" dirty="0">
+                <a:solidFill>
+                  <a:srgbClr val="1C2833"/>
+                </a:solidFill>
+                <a:latin typeface="Arial" pitchFamily="34" charset="0"/>
+                <a:ea typeface="Arial" pitchFamily="34" charset="-122"/>
+                <a:cs typeface="Arial" pitchFamily="34" charset="-120"/>
+              </a:rPr>
+              <a:t>Middle ·  · IKS Curriculum</a:t>
+            </a:r>
+            <a:endParaRPr lang="en-US" sz="1200" dirty="0"/>
+          </a:p>
+        </p:txBody>
+      </p:sp>
+    </p:spTree>
+  </p:cSld>
+  <p:clrMapOvr>
+    <a:masterClrMapping/>
+  </p:clrMapOvr>
+</p:sld>
+</file>
+
+<file path=ppt/slides/slide21.xml><?xml version="1.0" encoding="utf-8"?>
+<p:sld xmlns:a="http://schemas.openxmlformats.org/drawingml/2006/main" xmlns:r="http://schemas.openxmlformats.org/officeDocument/2006/relationships" xmlns:p="http://schemas.openxmlformats.org/presentationml/2006/main">
+  <p:cSld name="Slide 21">
+    <p:bg>
+      <p:bgPr>
+        <a:solidFill>
+          <a:srgbClr val="FFFFFF"/>
+        </a:solidFill>
+      </p:bgPr>
+    </p:bg>
+    <p:spTree>
+      <p:nvGrpSpPr>
+        <p:cNvPr id="1" name=""/>
+        <p:cNvGrpSpPr/>
+        <p:nvPr/>
+      </p:nvGrpSpPr>
+      <p:grpSpPr>
+        <a:xfrm>
+          <a:off x="0" y="0"/>
+          <a:ext cx="0" cy="0"/>
+          <a:chOff x="0" y="0"/>
+          <a:chExt cx="0" cy="0"/>
+        </a:xfrm>
+      </p:grpSpPr>
+      <p:sp>
+        <p:nvSpPr>
+          <p:cNvPr id="2" name="Text 0"/>
+          <p:cNvSpPr/>
+          <p:nvPr/>
+        </p:nvSpPr>
+        <p:spPr>
+          <a:xfrm>
+            <a:off x="0" y="0"/>
+            <a:ext cx="9144000" cy="101501"/>
+          </a:xfrm>
+          <a:prstGeom prst="rect">
+            <a:avLst/>
+          </a:prstGeom>
+          <a:solidFill>
+            <a:srgbClr val="277884"/>
+          </a:solidFill>
+          <a:ln/>
+        </p:spPr>
+        <p:txBody>
+          <a:bodyPr wrap="square" rtlCol="0" anchor="ctr"/>
+          <a:lstStyle/>
+          <a:p>
+            <a:pPr indent="0" marL="0">
+              <a:buNone/>
+            </a:pPr>
+            <a:endParaRPr lang="en-US" dirty="0"/>
+          </a:p>
+        </p:txBody>
+      </p:sp>
+      <p:sp>
+        <p:nvSpPr>
+          <p:cNvPr id="3" name="Text 1"/>
+          <p:cNvSpPr/>
+          <p:nvPr/>
+        </p:nvSpPr>
+        <p:spPr>
+          <a:xfrm>
+            <a:off x="406301" y="457051"/>
+            <a:ext cx="8498026" cy="274290"/>
+          </a:xfrm>
+          <a:prstGeom prst="rect">
+            <a:avLst/>
+          </a:prstGeom>
+          <a:noFill/>
+          <a:ln/>
+        </p:spPr>
+        <p:txBody>
+          <a:bodyPr wrap="square" lIns="0" tIns="0" rIns="0" bIns="0" rtlCol="0" anchor="t"/>
+          <a:lstStyle/>
+          <a:p>
+            <a:pPr algn="l" indent="0" marL="0">
+              <a:lnSpc>
+                <a:spcPts val="2160"/>
+              </a:lnSpc>
+              <a:spcBef>
+                <a:spcPts val="600"/>
+              </a:spcBef>
+              <a:spcAft>
+                <a:spcPts val="800"/>
+              </a:spcAft>
+              <a:buNone/>
+            </a:pPr>
+            <a:r>
+              <a:rPr lang="en-US" sz="1800" b="1" dirty="0">
+                <a:solidFill>
+                  <a:srgbClr val="FE4447"/>
+                </a:solidFill>
+                <a:latin typeface="Georgia" pitchFamily="34" charset="0"/>
+                <a:ea typeface="Georgia" pitchFamily="34" charset="-122"/>
+                <a:cs typeface="Georgia" pitchFamily="34" charset="-120"/>
+              </a:rPr>
+              <a:t>Citation(s) used in this lesson</a:t>
+            </a:r>
+            <a:endParaRPr lang="en-US" sz="1800" dirty="0"/>
+          </a:p>
+        </p:txBody>
+      </p:sp>
+      <p:sp>
+        <p:nvSpPr>
+          <p:cNvPr id="4" name="Text 2"/>
+          <p:cNvSpPr/>
+          <p:nvPr/>
+        </p:nvSpPr>
+        <p:spPr>
+          <a:xfrm>
+            <a:off x="634901" y="883593"/>
+            <a:ext cx="8102798" cy="975122"/>
+          </a:xfrm>
+          <a:prstGeom prst="rect">
+            <a:avLst/>
+          </a:prstGeom>
+          <a:noFill/>
+          <a:ln/>
+        </p:spPr>
+        <p:txBody>
+          <a:bodyPr wrap="square" lIns="0" tIns="0" rIns="0" bIns="0" rtlCol="0" anchor="t"/>
+          <a:lstStyle/>
+          <a:p>
+            <a:pPr algn="l" marL="342900" indent="-342900">
+              <a:lnSpc>
+                <a:spcPts val="1620"/>
+              </a:lnSpc>
+              <a:spcAft>
+                <a:spcPts val="300"/>
+              </a:spcAft>
+              <a:buSzPct val="100000"/>
+              <a:buChar char="•"/>
+            </a:pPr>
+            <a:r>
+              <a:rPr lang="en-US" sz="1200" i="1" dirty="0">
+                <a:solidFill>
+                  <a:srgbClr val="1C2833"/>
+                </a:solidFill>
+                <a:latin typeface="Arial" pitchFamily="34" charset="0"/>
+                <a:ea typeface="Arial" pitchFamily="34" charset="-122"/>
+                <a:cs typeface="Arial" pitchFamily="34" charset="-120"/>
+              </a:rPr>
+              <a:t>Vedic Mathematics Batch1.pdf</a:t>
+            </a:r>
+            <a:pPr algn="l" indent="0" marL="0">
+              <a:lnSpc>
+                <a:spcPts val="1620"/>
+              </a:lnSpc>
+              <a:spcAft>
+                <a:spcPts val="300"/>
+              </a:spcAft>
+              <a:buNone/>
+            </a:pPr>
+            <a:r>
+              <a:rPr lang="en-US" sz="1200" dirty="0">
+                <a:solidFill>
+                  <a:srgbClr val="1C2833"/>
+                </a:solidFill>
+                <a:latin typeface="Arial" pitchFamily="34" charset="0"/>
+                <a:ea typeface="Arial" pitchFamily="34" charset="-122"/>
+                <a:cs typeface="Arial" pitchFamily="34" charset="-120"/>
+              </a:rPr>
+              <a:t> (Vedic Cultural Center, Sammamish WA) — Nikhilam multiplication, "why it works" section.</a:t>
+            </a:r>
+            <a:endParaRPr lang="en-US" sz="1200" dirty="0"/>
+          </a:p>
+          <a:p>
+            <a:pPr algn="l" marL="342900" indent="-342900">
+              <a:lnSpc>
+                <a:spcPts val="1620"/>
+              </a:lnSpc>
+              <a:spcAft>
+                <a:spcPts val="300"/>
+              </a:spcAft>
+              <a:buSzPct val="100000"/>
+              <a:buChar char="•"/>
+            </a:pPr>
+            <a:r>
+              <a:rPr lang="en-US" sz="1200" i="1" dirty="0">
+                <a:solidFill>
+                  <a:srgbClr val="1C2833"/>
+                </a:solidFill>
+                <a:latin typeface="Arial" pitchFamily="34" charset="0"/>
+                <a:ea typeface="Arial" pitchFamily="34" charset="-122"/>
+                <a:cs typeface="Arial" pitchFamily="34" charset="-120"/>
+              </a:rPr>
               <a:t>Microsoft Word - sutras1.pdf</a:t>
             </a:r>
             <a:pPr algn="l" indent="0" marL="0">
               <a:lnSpc>
-                <a:spcPts val="1680"/>
-              </a:lnSpc>
-              <a:spcBef>
-                <a:spcPts val="300"/>
-              </a:spcBef>
-              <a:spcAft>
-                <a:spcPts val="300"/>
-              </a:spcAft>
-              <a:buNone/>
-            </a:pPr>
-            <a:r>
-              <a:rPr lang="en-US" sz="1200" dirty="0">
-                <a:solidFill>
-                  <a:srgbClr val="1C2833"/>
-                </a:solidFill>
-                <a:latin typeface="Arial" pitchFamily="34" charset="0"/>
-                <a:ea typeface="Arial" pitchFamily="34" charset="-122"/>
-                <a:cs typeface="Arial" pitchFamily="34" charset="-120"/>
-              </a:rPr>
-              <a:t>) — printed and visible. – Worksheet: "explain to a friend" prompt + space.</a:t>
+                <a:spcPts val="1620"/>
+              </a:lnSpc>
+              <a:spcAft>
+                <a:spcPts val="300"/>
+              </a:spcAft>
+              <a:buNone/>
+            </a:pPr>
+            <a:r>
+              <a:rPr lang="en-US" sz="1200" dirty="0">
+                <a:solidFill>
+                  <a:srgbClr val="1C2833"/>
+                </a:solidFill>
+                <a:latin typeface="Arial" pitchFamily="34" charset="0"/>
+                <a:ea typeface="Arial" pitchFamily="34" charset="-122"/>
+                <a:cs typeface="Arial" pitchFamily="34" charset="-120"/>
+              </a:rPr>
+              <a:t> — list of 16 Tirthaji sūtras.</a:t>
+            </a:r>
+            <a:endParaRPr lang="en-US" sz="1200" dirty="0"/>
+          </a:p>
+          <a:p>
+            <a:pPr algn="l" marL="342900" indent="-342900">
+              <a:lnSpc>
+                <a:spcPts val="1620"/>
+              </a:lnSpc>
+              <a:spcAft>
+                <a:spcPts val="300"/>
+              </a:spcAft>
+              <a:buSzPct val="100000"/>
+              <a:buChar char="•"/>
+            </a:pPr>
+            <a:r>
+              <a:rPr lang="en-US" sz="1200" dirty="0">
+                <a:solidFill>
+                  <a:srgbClr val="1C2833"/>
+                </a:solidFill>
+                <a:latin typeface="Arial" pitchFamily="34" charset="0"/>
+                <a:ea typeface="Arial" pitchFamily="34" charset="-122"/>
+                <a:cs typeface="Arial" pitchFamily="34" charset="-120"/>
+              </a:rPr>
+              <a:t>Optional teacher reference: </a:t>
+            </a:r>
+            <a:pPr algn="l" indent="0" marL="0">
+              <a:lnSpc>
+                <a:spcPts val="1620"/>
+              </a:lnSpc>
+              <a:spcAft>
+                <a:spcPts val="300"/>
+              </a:spcAft>
+              <a:buNone/>
+            </a:pPr>
+            <a:r>
+              <a:rPr lang="en-US" sz="1200" i="1" dirty="0">
+                <a:solidFill>
+                  <a:srgbClr val="1C2833"/>
+                </a:solidFill>
+                <a:latin typeface="Arial" pitchFamily="34" charset="0"/>
+                <a:ea typeface="Arial" pitchFamily="34" charset="-122"/>
+                <a:cs typeface="Arial" pitchFamily="34" charset="-120"/>
+              </a:rPr>
+              <a:t>FUNDAMENTAL AND VEDIC MATHEMATICS .pdf</a:t>
+            </a:r>
+            <a:pPr algn="l" indent="0" marL="0">
+              <a:lnSpc>
+                <a:spcPts val="1620"/>
+              </a:lnSpc>
+              <a:spcAft>
+                <a:spcPts val="300"/>
+              </a:spcAft>
+              <a:buNone/>
+            </a:pPr>
+            <a:r>
+              <a:rPr lang="en-US" sz="1200" dirty="0">
+                <a:solidFill>
+                  <a:srgbClr val="1C2833"/>
+                </a:solidFill>
+                <a:latin typeface="Arial" pitchFamily="34" charset="0"/>
+                <a:ea typeface="Arial" pitchFamily="34" charset="-122"/>
+                <a:cs typeface="Arial" pitchFamily="34" charset="-120"/>
+              </a:rPr>
+              <a:t>.</a:t>
             </a:r>
             <a:endParaRPr lang="en-US" sz="1200" dirty="0"/>
           </a:p>
@@ -2822,7 +8960,7 @@
                 <a:ea typeface="Georgia" pitchFamily="34" charset="-122"/>
                 <a:cs typeface="Georgia" pitchFamily="34" charset="-120"/>
               </a:rPr>
-              <a:t>Lesson flow</a:t>
+              <a:t>Materials</a:t>
             </a:r>
             <a:endParaRPr lang="en-US" sz="1800" dirty="0"/>
           </a:p>
@@ -2831,6 +8969,140 @@
       <p:sp>
         <p:nvSpPr>
           <p:cNvPr id="4" name="Text 2"/>
+          <p:cNvSpPr/>
+          <p:nvPr/>
+        </p:nvSpPr>
+        <p:spPr>
+          <a:xfrm>
+            <a:off x="634901" y="883593"/>
+            <a:ext cx="8102798" cy="788491"/>
+          </a:xfrm>
+          <a:prstGeom prst="rect">
+            <a:avLst/>
+          </a:prstGeom>
+          <a:noFill/>
+          <a:ln/>
+        </p:spPr>
+        <p:txBody>
+          <a:bodyPr wrap="square" lIns="0" tIns="0" rIns="0" bIns="0" rtlCol="0" anchor="t"/>
+          <a:lstStyle/>
+          <a:p>
+            <a:pPr algn="l" marL="342900" indent="-342900">
+              <a:lnSpc>
+                <a:spcPts val="1620"/>
+              </a:lnSpc>
+              <a:spcAft>
+                <a:spcPts val="300"/>
+              </a:spcAft>
+              <a:buSzPct val="100000"/>
+              <a:buChar char="•"/>
+            </a:pPr>
+            <a:r>
+              <a:rPr lang="en-US" sz="1200" dirty="0">
+                <a:solidFill>
+                  <a:srgbClr val="1C2833"/>
+                </a:solidFill>
+                <a:latin typeface="Arial" pitchFamily="34" charset="0"/>
+                <a:ea typeface="Arial" pitchFamily="34" charset="-122"/>
+                <a:cs typeface="Arial" pitchFamily="34" charset="-120"/>
+              </a:rPr>
+              <a:t>Whiteboard.</a:t>
+            </a:r>
+            <a:endParaRPr lang="en-US" sz="1200" dirty="0"/>
+          </a:p>
+          <a:p>
+            <a:pPr algn="l" marL="342900" indent="-342900">
+              <a:lnSpc>
+                <a:spcPts val="1620"/>
+              </a:lnSpc>
+              <a:spcAft>
+                <a:spcPts val="300"/>
+              </a:spcAft>
+              <a:buSzPct val="100000"/>
+              <a:buChar char="•"/>
+            </a:pPr>
+            <a:r>
+              <a:rPr lang="en-US" sz="1200" dirty="0">
+                <a:solidFill>
+                  <a:srgbClr val="1C2833"/>
+                </a:solidFill>
+                <a:latin typeface="Arial" pitchFamily="34" charset="0"/>
+                <a:ea typeface="Arial" pitchFamily="34" charset="-122"/>
+                <a:cs typeface="Arial" pitchFamily="34" charset="-120"/>
+              </a:rPr>
+              <a:t>The 16-sūtra list (</a:t>
+            </a:r>
+            <a:pPr algn="l" indent="0" marL="0">
+              <a:lnSpc>
+                <a:spcPts val="1620"/>
+              </a:lnSpc>
+              <a:spcAft>
+                <a:spcPts val="300"/>
+              </a:spcAft>
+              <a:buNone/>
+            </a:pPr>
+            <a:r>
+              <a:rPr lang="en-US" sz="1200" dirty="0">
+                <a:solidFill>
+                  <a:srgbClr val="1C2833"/>
+                </a:solidFill>
+                <a:latin typeface="Arial" pitchFamily="34" charset="0"/>
+                <a:ea typeface="Arial" pitchFamily="34" charset="-122"/>
+                <a:cs typeface="Arial" pitchFamily="34" charset="-120"/>
+              </a:rPr>
+              <a:t>Microsoft Word - sutras1.pdf</a:t>
+            </a:r>
+            <a:pPr algn="l" indent="0" marL="0">
+              <a:lnSpc>
+                <a:spcPts val="1620"/>
+              </a:lnSpc>
+              <a:spcAft>
+                <a:spcPts val="300"/>
+              </a:spcAft>
+              <a:buNone/>
+            </a:pPr>
+            <a:r>
+              <a:rPr lang="en-US" sz="1200" dirty="0">
+                <a:solidFill>
+                  <a:srgbClr val="1C2833"/>
+                </a:solidFill>
+                <a:latin typeface="Arial" pitchFamily="34" charset="0"/>
+                <a:ea typeface="Arial" pitchFamily="34" charset="-122"/>
+                <a:cs typeface="Arial" pitchFamily="34" charset="-120"/>
+              </a:rPr>
+              <a:t>) — printed and visible.</a:t>
+            </a:r>
+            <a:endParaRPr lang="en-US" sz="1200" dirty="0"/>
+          </a:p>
+          <a:p>
+            <a:pPr algn="l" marL="342900" indent="-342900">
+              <a:lnSpc>
+                <a:spcPts val="1620"/>
+              </a:lnSpc>
+              <a:spcAft>
+                <a:spcPts val="300"/>
+              </a:spcAft>
+              <a:buSzPct val="100000"/>
+              <a:buChar char="•"/>
+            </a:pPr>
+            <a:r>
+              <a:rPr lang="en-US" sz="1200" dirty="0">
+                <a:solidFill>
+                  <a:srgbClr val="1C2833"/>
+                </a:solidFill>
+                <a:latin typeface="Arial" pitchFamily="34" charset="0"/>
+                <a:ea typeface="Arial" pitchFamily="34" charset="-122"/>
+                <a:cs typeface="Arial" pitchFamily="34" charset="-120"/>
+              </a:rPr>
+              <a:t>Worksheet: "explain to a friend" prompt + space.</a:t>
+            </a:r>
+            <a:endParaRPr lang="en-US" sz="1200" dirty="0"/>
+          </a:p>
+        </p:txBody>
+      </p:sp>
+      <p:sp>
+        <p:nvSpPr>
+          <p:cNvPr id="5" name="Text 3"/>
           <p:cNvSpPr/>
           <p:nvPr/>
         </p:nvSpPr>
@@ -2980,7 +9252,7 @@
                 <a:ea typeface="Georgia" pitchFamily="34" charset="-122"/>
                 <a:cs typeface="Georgia" pitchFamily="34" charset="-120"/>
               </a:rPr>
-              <a:t>Warm-up (5 min)</a:t>
+              <a:t>Lesson flow</a:t>
             </a:r>
             <a:endParaRPr lang="en-US" sz="1800" dirty="0"/>
           </a:p>
@@ -2989,192 +9261,6 @@
       <p:sp>
         <p:nvSpPr>
           <p:cNvPr id="4" name="Text 2"/>
-          <p:cNvSpPr/>
-          <p:nvPr/>
-        </p:nvSpPr>
-        <p:spPr>
-          <a:xfrm>
-            <a:off x="406301" y="870942"/>
-            <a:ext cx="8498026" cy="222796"/>
-          </a:xfrm>
-          <a:prstGeom prst="rect">
-            <a:avLst/>
-          </a:prstGeom>
-          <a:noFill/>
-          <a:ln/>
-        </p:spPr>
-        <p:txBody>
-          <a:bodyPr wrap="square" lIns="0" tIns="0" rIns="0" bIns="0" rtlCol="0" anchor="t"/>
-          <a:lstStyle/>
-          <a:p>
-            <a:pPr algn="l" indent="0" marL="0">
-              <a:lnSpc>
-                <a:spcPts val="1680"/>
-              </a:lnSpc>
-              <a:spcBef>
-                <a:spcPts val="300"/>
-              </a:spcBef>
-              <a:spcAft>
-                <a:spcPts val="300"/>
-              </a:spcAft>
-              <a:buNone/>
-            </a:pPr>
-            <a:r>
-              <a:rPr lang="en-US" sz="1200" dirty="0">
-                <a:solidFill>
-                  <a:srgbClr val="1C2833"/>
-                </a:solidFill>
-                <a:latin typeface="Arial" pitchFamily="34" charset="0"/>
-                <a:ea typeface="Arial" pitchFamily="34" charset="-122"/>
-                <a:cs typeface="Arial" pitchFamily="34" charset="-120"/>
-              </a:rPr>
-              <a:t>– Quick Nikhilam round on </a:t>
-            </a:r>
-            <a:pPr algn="l" indent="0" marL="0">
-              <a:lnSpc>
-                <a:spcPts val="1680"/>
-              </a:lnSpc>
-              <a:spcBef>
-                <a:spcPts val="300"/>
-              </a:spcBef>
-              <a:spcAft>
-                <a:spcPts val="300"/>
-              </a:spcAft>
-              <a:buNone/>
-            </a:pPr>
-            <a:r>
-              <a:rPr lang="en-US" sz="1200" dirty="0">
-                <a:solidFill>
-                  <a:srgbClr val="1C2833"/>
-                </a:solidFill>
-                <a:latin typeface="Arial" pitchFamily="34" charset="0"/>
-                <a:ea typeface="Arial" pitchFamily="34" charset="-122"/>
-                <a:cs typeface="Arial" pitchFamily="34" charset="-120"/>
-              </a:rPr>
-              <a:t>97 × 96</a:t>
-            </a:r>
-            <a:pPr algn="l" indent="0" marL="0">
-              <a:lnSpc>
-                <a:spcPts val="1680"/>
-              </a:lnSpc>
-              <a:spcBef>
-                <a:spcPts val="300"/>
-              </a:spcBef>
-              <a:spcAft>
-                <a:spcPts val="300"/>
-              </a:spcAft>
-              <a:buNone/>
-            </a:pPr>
-            <a:r>
-              <a:rPr lang="en-US" sz="1200" dirty="0">
-                <a:solidFill>
-                  <a:srgbClr val="1C2833"/>
-                </a:solidFill>
-                <a:latin typeface="Arial" pitchFamily="34" charset="0"/>
-                <a:ea typeface="Arial" pitchFamily="34" charset="-122"/>
-                <a:cs typeface="Arial" pitchFamily="34" charset="-120"/>
-              </a:rPr>
-              <a:t> (chorus answer: 9312) and </a:t>
-            </a:r>
-            <a:pPr algn="l" indent="0" marL="0">
-              <a:lnSpc>
-                <a:spcPts val="1680"/>
-              </a:lnSpc>
-              <a:spcBef>
-                <a:spcPts val="300"/>
-              </a:spcBef>
-              <a:spcAft>
-                <a:spcPts val="300"/>
-              </a:spcAft>
-              <a:buNone/>
-            </a:pPr>
-            <a:r>
-              <a:rPr lang="en-US" sz="1200" dirty="0">
-                <a:solidFill>
-                  <a:srgbClr val="1C2833"/>
-                </a:solidFill>
-                <a:latin typeface="Arial" pitchFamily="34" charset="0"/>
-                <a:ea typeface="Arial" pitchFamily="34" charset="-122"/>
-                <a:cs typeface="Arial" pitchFamily="34" charset="-120"/>
-              </a:rPr>
-              <a:t>103 × 104</a:t>
-            </a:r>
-            <a:pPr algn="l" indent="0" marL="0">
-              <a:lnSpc>
-                <a:spcPts val="1680"/>
-              </a:lnSpc>
-              <a:spcBef>
-                <a:spcPts val="300"/>
-              </a:spcBef>
-              <a:spcAft>
-                <a:spcPts val="300"/>
-              </a:spcAft>
-              <a:buNone/>
-            </a:pPr>
-            <a:r>
-              <a:rPr lang="en-US" sz="1200" dirty="0">
-                <a:solidFill>
-                  <a:srgbClr val="1C2833"/>
-                </a:solidFill>
-                <a:latin typeface="Arial" pitchFamily="34" charset="0"/>
-                <a:ea typeface="Arial" pitchFamily="34" charset="-122"/>
-                <a:cs typeface="Arial" pitchFamily="34" charset="-120"/>
-              </a:rPr>
-              <a:t> (10712).</a:t>
-            </a:r>
-            <a:endParaRPr lang="en-US" sz="1200" dirty="0"/>
-          </a:p>
-        </p:txBody>
-      </p:sp>
-      <p:sp>
-        <p:nvSpPr>
-          <p:cNvPr id="5" name="Text 3"/>
-          <p:cNvSpPr/>
-          <p:nvPr/>
-        </p:nvSpPr>
-        <p:spPr>
-          <a:xfrm>
-            <a:off x="634901" y="1182588"/>
-            <a:ext cx="8102798" cy="281880"/>
-          </a:xfrm>
-          <a:prstGeom prst="rect">
-            <a:avLst/>
-          </a:prstGeom>
-          <a:noFill/>
-          <a:ln/>
-        </p:spPr>
-        <p:txBody>
-          <a:bodyPr wrap="square" lIns="0" tIns="0" rIns="0" bIns="0" rtlCol="0" anchor="t"/>
-          <a:lstStyle/>
-          <a:p>
-            <a:pPr algn="l" marL="342900" indent="-342900">
-              <a:lnSpc>
-                <a:spcPts val="1620"/>
-              </a:lnSpc>
-              <a:spcAft>
-                <a:spcPts val="300"/>
-              </a:spcAft>
-              <a:buSzPct val="100000"/>
-              <a:buChar char="•"/>
-            </a:pPr>
-            <a:r>
-              <a:rPr lang="en-US" sz="1200" i="1" dirty="0">
-                <a:solidFill>
-                  <a:srgbClr val="1C2833"/>
-                </a:solidFill>
-                <a:latin typeface="Arial" pitchFamily="34" charset="0"/>
-                <a:ea typeface="Arial" pitchFamily="34" charset="-122"/>
-                <a:cs typeface="Arial" pitchFamily="34" charset="-120"/>
-              </a:rPr>
-              <a:t>"You've been doing this for a week. Today we prove why it works."</a:t>
-            </a:r>
-            <a:endParaRPr lang="en-US" sz="1200" dirty="0"/>
-          </a:p>
-        </p:txBody>
-      </p:sp>
-      <p:sp>
-        <p:nvSpPr>
-          <p:cNvPr id="6" name="Text 4"/>
           <p:cNvSpPr/>
           <p:nvPr/>
         </p:nvSpPr>
@@ -3324,7 +9410,7 @@
                 <a:ea typeface="Georgia" pitchFamily="34" charset="-122"/>
                 <a:cs typeface="Georgia" pitchFamily="34" charset="-120"/>
               </a:rPr>
-              <a:t>Activity (15 min) — Explain to a friend</a:t>
+              <a:t>Warm-up (5 min)</a:t>
             </a:r>
             <a:endParaRPr lang="en-US" sz="1800" dirty="0"/>
           </a:p>
@@ -3338,8 +9424,8 @@
         </p:nvSpPr>
         <p:spPr>
           <a:xfrm>
-            <a:off x="406301" y="870942"/>
-            <a:ext cx="8498026" cy="426541"/>
+            <a:off x="634901" y="883593"/>
+            <a:ext cx="8102798" cy="544711"/>
           </a:xfrm>
           <a:prstGeom prst="rect">
             <a:avLst/>
@@ -3351,40 +9437,119 @@
           <a:bodyPr wrap="square" lIns="0" tIns="0" rIns="0" bIns="0" rtlCol="0" anchor="t"/>
           <a:lstStyle/>
           <a:p>
-            <a:pPr algn="l" indent="0" marL="0">
-              <a:lnSpc>
-                <a:spcPts val="1680"/>
-              </a:lnSpc>
-              <a:spcBef>
-                <a:spcPts val="300"/>
-              </a:spcBef>
-              <a:spcAft>
-                <a:spcPts val="300"/>
-              </a:spcAft>
-              <a:buNone/>
-            </a:pPr>
-            <a:r>
-              <a:rPr lang="en-US" sz="1200" dirty="0">
-                <a:solidFill>
-                  <a:srgbClr val="1C2833"/>
-                </a:solidFill>
-                <a:latin typeface="Arial" pitchFamily="34" charset="0"/>
-                <a:ea typeface="Arial" pitchFamily="34" charset="-122"/>
-                <a:cs typeface="Arial" pitchFamily="34" charset="-120"/>
-              </a:rPr>
-              <a:t>– Worksheet prompt: &gt; Imagine your Grade 4 cousin asks: </a:t>
-            </a:r>
-            <a:pPr algn="l" indent="0" marL="0">
-              <a:lnSpc>
-                <a:spcPts val="1680"/>
-              </a:lnSpc>
-              <a:spcBef>
-                <a:spcPts val="300"/>
-              </a:spcBef>
-              <a:spcAft>
-                <a:spcPts val="300"/>
-              </a:spcAft>
-              <a:buNone/>
+            <a:pPr algn="l" marL="342900" indent="-342900">
+              <a:lnSpc>
+                <a:spcPts val="1620"/>
+              </a:lnSpc>
+              <a:spcAft>
+                <a:spcPts val="300"/>
+              </a:spcAft>
+              <a:buSzPct val="100000"/>
+              <a:buChar char="•"/>
+            </a:pPr>
+            <a:r>
+              <a:rPr lang="en-US" sz="1200" dirty="0">
+                <a:solidFill>
+                  <a:srgbClr val="1C2833"/>
+                </a:solidFill>
+                <a:latin typeface="Arial" pitchFamily="34" charset="0"/>
+                <a:ea typeface="Arial" pitchFamily="34" charset="-122"/>
+                <a:cs typeface="Arial" pitchFamily="34" charset="-120"/>
+              </a:rPr>
+              <a:t>Quick Nikhilam round on </a:t>
+            </a:r>
+            <a:pPr algn="l" indent="0" marL="0">
+              <a:lnSpc>
+                <a:spcPts val="1620"/>
+              </a:lnSpc>
+              <a:spcAft>
+                <a:spcPts val="300"/>
+              </a:spcAft>
+              <a:buNone/>
+            </a:pPr>
+            <a:r>
+              <a:rPr lang="en-US" sz="1200" dirty="0">
+                <a:solidFill>
+                  <a:srgbClr val="1C2833"/>
+                </a:solidFill>
+                <a:latin typeface="Arial" pitchFamily="34" charset="0"/>
+                <a:ea typeface="Arial" pitchFamily="34" charset="-122"/>
+                <a:cs typeface="Arial" pitchFamily="34" charset="-120"/>
+              </a:rPr>
+              <a:t>97 × 96</a:t>
+            </a:r>
+            <a:pPr algn="l" indent="0" marL="0">
+              <a:lnSpc>
+                <a:spcPts val="1620"/>
+              </a:lnSpc>
+              <a:spcAft>
+                <a:spcPts val="300"/>
+              </a:spcAft>
+              <a:buNone/>
+            </a:pPr>
+            <a:r>
+              <a:rPr lang="en-US" sz="1200" dirty="0">
+                <a:solidFill>
+                  <a:srgbClr val="1C2833"/>
+                </a:solidFill>
+                <a:latin typeface="Arial" pitchFamily="34" charset="0"/>
+                <a:ea typeface="Arial" pitchFamily="34" charset="-122"/>
+                <a:cs typeface="Arial" pitchFamily="34" charset="-120"/>
+              </a:rPr>
+              <a:t> (chorus answer: 9312) and </a:t>
+            </a:r>
+            <a:pPr algn="l" indent="0" marL="0">
+              <a:lnSpc>
+                <a:spcPts val="1620"/>
+              </a:lnSpc>
+              <a:spcAft>
+                <a:spcPts val="300"/>
+              </a:spcAft>
+              <a:buNone/>
+            </a:pPr>
+            <a:r>
+              <a:rPr lang="en-US" sz="1200" dirty="0">
+                <a:solidFill>
+                  <a:srgbClr val="1C2833"/>
+                </a:solidFill>
+                <a:latin typeface="Arial" pitchFamily="34" charset="0"/>
+                <a:ea typeface="Arial" pitchFamily="34" charset="-122"/>
+                <a:cs typeface="Arial" pitchFamily="34" charset="-120"/>
+              </a:rPr>
+              <a:t>103 × 104</a:t>
+            </a:r>
+            <a:pPr algn="l" indent="0" marL="0">
+              <a:lnSpc>
+                <a:spcPts val="1620"/>
+              </a:lnSpc>
+              <a:spcAft>
+                <a:spcPts val="300"/>
+              </a:spcAft>
+              <a:buNone/>
+            </a:pPr>
+            <a:r>
+              <a:rPr lang="en-US" sz="1200" dirty="0">
+                <a:solidFill>
+                  <a:srgbClr val="1C2833"/>
+                </a:solidFill>
+                <a:latin typeface="Arial" pitchFamily="34" charset="0"/>
+                <a:ea typeface="Arial" pitchFamily="34" charset="-122"/>
+                <a:cs typeface="Arial" pitchFamily="34" charset="-120"/>
+              </a:rPr>
+              <a:t> (10712).</a:t>
+            </a:r>
+            <a:endParaRPr lang="en-US" sz="1200" dirty="0"/>
+          </a:p>
+          <a:p>
+            <a:pPr algn="l" marL="342900" indent="-342900">
+              <a:lnSpc>
+                <a:spcPts val="1620"/>
+              </a:lnSpc>
+              <a:spcAft>
+                <a:spcPts val="300"/>
+              </a:spcAft>
+              <a:buSzPct val="100000"/>
+              <a:buChar char="•"/>
             </a:pPr>
             <a:r>
               <a:rPr lang="en-US" sz="1200" i="1" dirty="0">
@@ -3395,168 +9560,7 @@
                 <a:ea typeface="Arial" pitchFamily="34" charset="-122"/>
                 <a:cs typeface="Arial" pitchFamily="34" charset="-120"/>
               </a:rPr>
-              <a:t>"Why does that Nikhilam trick work? Is it magic?"</a:t>
-            </a:r>
-            <a:pPr algn="l" indent="0" marL="0">
-              <a:lnSpc>
-                <a:spcPts val="1680"/>
-              </a:lnSpc>
-              <a:spcBef>
-                <a:spcPts val="300"/>
-              </a:spcBef>
-              <a:spcAft>
-                <a:spcPts val="300"/>
-              </a:spcAft>
-              <a:buNone/>
-            </a:pPr>
-            <a:r>
-              <a:rPr lang="en-US" sz="1200" dirty="0">
-                <a:solidFill>
-                  <a:srgbClr val="1C2833"/>
-                </a:solidFill>
-                <a:latin typeface="Arial" pitchFamily="34" charset="0"/>
-                <a:ea typeface="Arial" pitchFamily="34" charset="-122"/>
-                <a:cs typeface="Arial" pitchFamily="34" charset="-120"/>
-              </a:rPr>
-              <a:t> In 5–7 sentences, explain why it's NOT magic. Use the words </a:t>
-            </a:r>
-            <a:pPr algn="l" indent="0" marL="0">
-              <a:lnSpc>
-                <a:spcPts val="1680"/>
-              </a:lnSpc>
-              <a:spcBef>
-                <a:spcPts val="300"/>
-              </a:spcBef>
-              <a:spcAft>
-                <a:spcPts val="300"/>
-              </a:spcAft>
-              <a:buNone/>
-            </a:pPr>
-            <a:r>
-              <a:rPr lang="en-US" sz="1200" b="1" dirty="0">
-                <a:solidFill>
-                  <a:srgbClr val="1C2833"/>
-                </a:solidFill>
-                <a:latin typeface="Arial" pitchFamily="34" charset="0"/>
-                <a:ea typeface="Arial" pitchFamily="34" charset="-122"/>
-                <a:cs typeface="Arial" pitchFamily="34" charset="-120"/>
-              </a:rPr>
-              <a:t>base</a:t>
-            </a:r>
-            <a:pPr algn="l" indent="0" marL="0">
-              <a:lnSpc>
-                <a:spcPts val="1680"/>
-              </a:lnSpc>
-              <a:spcBef>
-                <a:spcPts val="300"/>
-              </a:spcBef>
-              <a:spcAft>
-                <a:spcPts val="300"/>
-              </a:spcAft>
-              <a:buNone/>
-            </a:pPr>
-            <a:r>
-              <a:rPr lang="en-US" sz="1200" dirty="0">
-                <a:solidFill>
-                  <a:srgbClr val="1C2833"/>
-                </a:solidFill>
-                <a:latin typeface="Arial" pitchFamily="34" charset="0"/>
-                <a:ea typeface="Arial" pitchFamily="34" charset="-122"/>
-                <a:cs typeface="Arial" pitchFamily="34" charset="-120"/>
-              </a:rPr>
-              <a:t>, </a:t>
-            </a:r>
-            <a:pPr algn="l" indent="0" marL="0">
-              <a:lnSpc>
-                <a:spcPts val="1680"/>
-              </a:lnSpc>
-              <a:spcBef>
-                <a:spcPts val="300"/>
-              </a:spcBef>
-              <a:spcAft>
-                <a:spcPts val="300"/>
-              </a:spcAft>
-              <a:buNone/>
-            </a:pPr>
-            <a:r>
-              <a:rPr lang="en-US" sz="1200" b="1" dirty="0">
-                <a:solidFill>
-                  <a:srgbClr val="1C2833"/>
-                </a:solidFill>
-                <a:latin typeface="Arial" pitchFamily="34" charset="0"/>
-                <a:ea typeface="Arial" pitchFamily="34" charset="-122"/>
-                <a:cs typeface="Arial" pitchFamily="34" charset="-120"/>
-              </a:rPr>
-              <a:t>deficit</a:t>
-            </a:r>
-            <a:pPr algn="l" indent="0" marL="0">
-              <a:lnSpc>
-                <a:spcPts val="1680"/>
-              </a:lnSpc>
-              <a:spcBef>
-                <a:spcPts val="300"/>
-              </a:spcBef>
-              <a:spcAft>
-                <a:spcPts val="300"/>
-              </a:spcAft>
-              <a:buNone/>
-            </a:pPr>
-            <a:r>
-              <a:rPr lang="en-US" sz="1200" dirty="0">
-                <a:solidFill>
-                  <a:srgbClr val="1C2833"/>
-                </a:solidFill>
-                <a:latin typeface="Arial" pitchFamily="34" charset="0"/>
-                <a:ea typeface="Arial" pitchFamily="34" charset="-122"/>
-                <a:cs typeface="Arial" pitchFamily="34" charset="-120"/>
-              </a:rPr>
-              <a:t>, and </a:t>
-            </a:r>
-            <a:pPr algn="l" indent="0" marL="0">
-              <a:lnSpc>
-                <a:spcPts val="1680"/>
-              </a:lnSpc>
-              <a:spcBef>
-                <a:spcPts val="300"/>
-              </a:spcBef>
-              <a:spcAft>
-                <a:spcPts val="300"/>
-              </a:spcAft>
-              <a:buNone/>
-            </a:pPr>
-            <a:r>
-              <a:rPr lang="en-US" sz="1200" b="1" dirty="0">
-                <a:solidFill>
-                  <a:srgbClr val="1C2833"/>
-                </a:solidFill>
-                <a:latin typeface="Arial" pitchFamily="34" charset="0"/>
-                <a:ea typeface="Arial" pitchFamily="34" charset="-122"/>
-                <a:cs typeface="Arial" pitchFamily="34" charset="-120"/>
-              </a:rPr>
-              <a:t>algebra</a:t>
-            </a:r>
-            <a:pPr algn="l" indent="0" marL="0">
-              <a:lnSpc>
-                <a:spcPts val="1680"/>
-              </a:lnSpc>
-              <a:spcBef>
-                <a:spcPts val="300"/>
-              </a:spcBef>
-              <a:spcAft>
-                <a:spcPts val="300"/>
-              </a:spcAft>
-              <a:buNone/>
-            </a:pPr>
-            <a:r>
-              <a:rPr lang="en-US" sz="1200" dirty="0">
-                <a:solidFill>
-                  <a:srgbClr val="1C2833"/>
-                </a:solidFill>
-                <a:latin typeface="Arial" pitchFamily="34" charset="0"/>
-                <a:ea typeface="Arial" pitchFamily="34" charset="-122"/>
-                <a:cs typeface="Arial" pitchFamily="34" charset="-120"/>
-              </a:rPr>
-              <a:t>.</a:t>
+              <a:t>"You've been doing this for a week. Today we prove why it works."</a:t>
             </a:r>
             <a:endParaRPr lang="en-US" sz="1200" dirty="0"/>
           </a:p>
@@ -3565,54 +9569,6 @@
       <p:sp>
         <p:nvSpPr>
           <p:cNvPr id="5" name="Text 3"/>
-          <p:cNvSpPr/>
-          <p:nvPr/>
-        </p:nvSpPr>
-        <p:spPr>
-          <a:xfrm>
-            <a:off x="406301" y="1373684"/>
-            <a:ext cx="8498026" cy="426541"/>
-          </a:xfrm>
-          <a:prstGeom prst="rect">
-            <a:avLst/>
-          </a:prstGeom>
-          <a:noFill/>
-          <a:ln/>
-        </p:spPr>
-        <p:txBody>
-          <a:bodyPr wrap="square" lIns="0" tIns="0" rIns="0" bIns="0" rtlCol="0" anchor="t"/>
-          <a:lstStyle/>
-          <a:p>
-            <a:pPr algn="l" indent="0" marL="0">
-              <a:lnSpc>
-                <a:spcPts val="1680"/>
-              </a:lnSpc>
-              <a:spcBef>
-                <a:spcPts val="300"/>
-              </a:spcBef>
-              <a:spcAft>
-                <a:spcPts val="300"/>
-              </a:spcAft>
-              <a:buNone/>
-            </a:pPr>
-            <a:r>
-              <a:rPr lang="en-US" sz="1200" dirty="0">
-                <a:solidFill>
-                  <a:srgbClr val="1C2833"/>
-                </a:solidFill>
-                <a:latin typeface="Arial" pitchFamily="34" charset="0"/>
-                <a:ea typeface="Arial" pitchFamily="34" charset="-122"/>
-                <a:cs typeface="Arial" pitchFamily="34" charset="-120"/>
-              </a:rPr>
-              <a:t>– 10 min individual writing. 5 min pair-sharing: read your paragraph to your partner; they tell you one part that's clear and one part that's unclear.</a:t>
-            </a:r>
-            <a:endParaRPr lang="en-US" sz="1200" dirty="0"/>
-          </a:p>
-        </p:txBody>
-      </p:sp>
-      <p:sp>
-        <p:nvSpPr>
-          <p:cNvPr id="6" name="Text 4"/>
           <p:cNvSpPr/>
           <p:nvPr/>
         </p:nvSpPr>
@@ -3762,7 +9718,7 @@
                 <a:ea typeface="Georgia" pitchFamily="34" charset="-122"/>
                 <a:cs typeface="Georgia" pitchFamily="34" charset="-120"/>
               </a:rPr>
-              <a:t>Wrap-up (5 min)</a:t>
+              <a:t>Core (20 min) — The algebraic proof</a:t>
             </a:r>
             <a:endParaRPr lang="en-US" sz="1800" dirty="0"/>
           </a:p>
@@ -3776,8 +9732,8 @@
         </p:nvSpPr>
         <p:spPr>
           <a:xfrm>
-            <a:off x="406301" y="870942"/>
-            <a:ext cx="8498026" cy="213271"/>
+            <a:off x="634901" y="883593"/>
+            <a:ext cx="8102798" cy="300930"/>
           </a:xfrm>
           <a:prstGeom prst="rect">
             <a:avLst/>
@@ -3789,28 +9745,246 @@
           <a:bodyPr wrap="square" lIns="0" tIns="0" rIns="0" bIns="0" rtlCol="0" anchor="t"/>
           <a:lstStyle/>
           <a:p>
-            <a:pPr algn="l" indent="0" marL="0">
-              <a:lnSpc>
-                <a:spcPts val="1680"/>
-              </a:lnSpc>
-              <a:spcBef>
-                <a:spcPts val="300"/>
-              </a:spcBef>
-              <a:spcAft>
-                <a:spcPts val="300"/>
-              </a:spcAft>
-              <a:buNone/>
-            </a:pPr>
-            <a:r>
-              <a:rPr lang="en-US" sz="1200" dirty="0">
-                <a:solidFill>
-                  <a:srgbClr val="1C2833"/>
-                </a:solidFill>
-                <a:latin typeface="Arial" pitchFamily="34" charset="0"/>
-                <a:ea typeface="Arial" pitchFamily="34" charset="-122"/>
-                <a:cs typeface="Arial" pitchFamily="34" charset="-120"/>
-              </a:rPr>
-              <a:t>– Read aloud one strong paragraph (with permission). – The sūtra connection: write on the board:</a:t>
+            <a:pPr algn="l" marL="342900" indent="-342900">
+              <a:lnSpc>
+                <a:spcPts val="1620"/>
+              </a:lnSpc>
+              <a:spcAft>
+                <a:spcPts val="300"/>
+              </a:spcAft>
+              <a:buSzPct val="100000"/>
+              <a:buChar char="•"/>
+            </a:pPr>
+            <a:r>
+              <a:rPr lang="en-US" sz="1200" b="1" dirty="0">
+                <a:solidFill>
+                  <a:srgbClr val="1C2833"/>
+                </a:solidFill>
+                <a:latin typeface="Arial" pitchFamily="34" charset="0"/>
+                <a:ea typeface="Arial" pitchFamily="34" charset="-122"/>
+                <a:cs typeface="Arial" pitchFamily="34" charset="-120"/>
+              </a:rPr>
+              <a:t>Set the variables.</a:t>
+            </a:r>
+            <a:pPr algn="l" indent="0" marL="0">
+              <a:lnSpc>
+                <a:spcPts val="1620"/>
+              </a:lnSpc>
+              <a:spcAft>
+                <a:spcPts val="300"/>
+              </a:spcAft>
+              <a:buNone/>
+            </a:pPr>
+            <a:r>
+              <a:rPr lang="en-US" sz="1200" dirty="0">
+                <a:solidFill>
+                  <a:srgbClr val="1C2833"/>
+                </a:solidFill>
+                <a:latin typeface="Arial" pitchFamily="34" charset="0"/>
+                <a:ea typeface="Arial" pitchFamily="34" charset="-122"/>
+                <a:cs typeface="Arial" pitchFamily="34" charset="-120"/>
+              </a:rPr>
+              <a:t> Call the base </a:t>
+            </a:r>
+            <a:pPr algn="l" indent="0" marL="0">
+              <a:lnSpc>
+                <a:spcPts val="1620"/>
+              </a:lnSpc>
+              <a:spcAft>
+                <a:spcPts val="300"/>
+              </a:spcAft>
+              <a:buNone/>
+            </a:pPr>
+            <a:r>
+              <a:rPr lang="en-US" sz="1200" dirty="0">
+                <a:solidFill>
+                  <a:srgbClr val="1C2833"/>
+                </a:solidFill>
+                <a:latin typeface="Arial" pitchFamily="34" charset="0"/>
+                <a:ea typeface="Arial" pitchFamily="34" charset="-122"/>
+                <a:cs typeface="Arial" pitchFamily="34" charset="-120"/>
+              </a:rPr>
+              <a:t>B</a:t>
+            </a:r>
+            <a:pPr algn="l" indent="0" marL="0">
+              <a:lnSpc>
+                <a:spcPts val="1620"/>
+              </a:lnSpc>
+              <a:spcAft>
+                <a:spcPts val="300"/>
+              </a:spcAft>
+              <a:buNone/>
+            </a:pPr>
+            <a:r>
+              <a:rPr lang="en-US" sz="1200" dirty="0">
+                <a:solidFill>
+                  <a:srgbClr val="1C2833"/>
+                </a:solidFill>
+                <a:latin typeface="Arial" pitchFamily="34" charset="0"/>
+                <a:ea typeface="Arial" pitchFamily="34" charset="-122"/>
+                <a:cs typeface="Arial" pitchFamily="34" charset="-120"/>
+              </a:rPr>
+              <a:t> (= 100, say). Call the two factors </a:t>
+            </a:r>
+            <a:pPr algn="l" indent="0" marL="0">
+              <a:lnSpc>
+                <a:spcPts val="1620"/>
+              </a:lnSpc>
+              <a:spcAft>
+                <a:spcPts val="300"/>
+              </a:spcAft>
+              <a:buNone/>
+            </a:pPr>
+            <a:r>
+              <a:rPr lang="en-US" sz="1200" dirty="0">
+                <a:solidFill>
+                  <a:srgbClr val="1C2833"/>
+                </a:solidFill>
+                <a:latin typeface="Arial" pitchFamily="34" charset="0"/>
+                <a:ea typeface="Arial" pitchFamily="34" charset="-122"/>
+                <a:cs typeface="Arial" pitchFamily="34" charset="-120"/>
+              </a:rPr>
+              <a:t>B − a</a:t>
+            </a:r>
+            <a:pPr algn="l" indent="0" marL="0">
+              <a:lnSpc>
+                <a:spcPts val="1620"/>
+              </a:lnSpc>
+              <a:spcAft>
+                <a:spcPts val="300"/>
+              </a:spcAft>
+              <a:buNone/>
+            </a:pPr>
+            <a:r>
+              <a:rPr lang="en-US" sz="1200" dirty="0">
+                <a:solidFill>
+                  <a:srgbClr val="1C2833"/>
+                </a:solidFill>
+                <a:latin typeface="Arial" pitchFamily="34" charset="0"/>
+                <a:ea typeface="Arial" pitchFamily="34" charset="-122"/>
+                <a:cs typeface="Arial" pitchFamily="34" charset="-120"/>
+              </a:rPr>
+              <a:t> and </a:t>
+            </a:r>
+            <a:pPr algn="l" indent="0" marL="0">
+              <a:lnSpc>
+                <a:spcPts val="1620"/>
+              </a:lnSpc>
+              <a:spcAft>
+                <a:spcPts val="300"/>
+              </a:spcAft>
+              <a:buNone/>
+            </a:pPr>
+            <a:r>
+              <a:rPr lang="en-US" sz="1200" dirty="0">
+                <a:solidFill>
+                  <a:srgbClr val="1C2833"/>
+                </a:solidFill>
+                <a:latin typeface="Arial" pitchFamily="34" charset="0"/>
+                <a:ea typeface="Arial" pitchFamily="34" charset="-122"/>
+                <a:cs typeface="Arial" pitchFamily="34" charset="-120"/>
+              </a:rPr>
+              <a:t>B − b</a:t>
+            </a:r>
+            <a:pPr algn="l" indent="0" marL="0">
+              <a:lnSpc>
+                <a:spcPts val="1620"/>
+              </a:lnSpc>
+              <a:spcAft>
+                <a:spcPts val="300"/>
+              </a:spcAft>
+              <a:buNone/>
+            </a:pPr>
+            <a:r>
+              <a:rPr lang="en-US" sz="1200" dirty="0">
+                <a:solidFill>
+                  <a:srgbClr val="1C2833"/>
+                </a:solidFill>
+                <a:latin typeface="Arial" pitchFamily="34" charset="0"/>
+                <a:ea typeface="Arial" pitchFamily="34" charset="-122"/>
+                <a:cs typeface="Arial" pitchFamily="34" charset="-120"/>
+              </a:rPr>
+              <a:t>, where </a:t>
+            </a:r>
+            <a:pPr algn="l" indent="0" marL="0">
+              <a:lnSpc>
+                <a:spcPts val="1620"/>
+              </a:lnSpc>
+              <a:spcAft>
+                <a:spcPts val="300"/>
+              </a:spcAft>
+              <a:buNone/>
+            </a:pPr>
+            <a:r>
+              <a:rPr lang="en-US" sz="1200" dirty="0">
+                <a:solidFill>
+                  <a:srgbClr val="1C2833"/>
+                </a:solidFill>
+                <a:latin typeface="Arial" pitchFamily="34" charset="0"/>
+                <a:ea typeface="Arial" pitchFamily="34" charset="-122"/>
+                <a:cs typeface="Arial" pitchFamily="34" charset="-120"/>
+              </a:rPr>
+              <a:t>a</a:t>
+            </a:r>
+            <a:pPr algn="l" indent="0" marL="0">
+              <a:lnSpc>
+                <a:spcPts val="1620"/>
+              </a:lnSpc>
+              <a:spcAft>
+                <a:spcPts val="300"/>
+              </a:spcAft>
+              <a:buNone/>
+            </a:pPr>
+            <a:r>
+              <a:rPr lang="en-US" sz="1200" dirty="0">
+                <a:solidFill>
+                  <a:srgbClr val="1C2833"/>
+                </a:solidFill>
+                <a:latin typeface="Arial" pitchFamily="34" charset="0"/>
+                <a:ea typeface="Arial" pitchFamily="34" charset="-122"/>
+                <a:cs typeface="Arial" pitchFamily="34" charset="-120"/>
+              </a:rPr>
+              <a:t> and </a:t>
+            </a:r>
+            <a:pPr algn="l" indent="0" marL="0">
+              <a:lnSpc>
+                <a:spcPts val="1620"/>
+              </a:lnSpc>
+              <a:spcAft>
+                <a:spcPts val="300"/>
+              </a:spcAft>
+              <a:buNone/>
+            </a:pPr>
+            <a:r>
+              <a:rPr lang="en-US" sz="1200" dirty="0">
+                <a:solidFill>
+                  <a:srgbClr val="1C2833"/>
+                </a:solidFill>
+                <a:latin typeface="Arial" pitchFamily="34" charset="0"/>
+                <a:ea typeface="Arial" pitchFamily="34" charset="-122"/>
+                <a:cs typeface="Arial" pitchFamily="34" charset="-120"/>
+              </a:rPr>
+              <a:t>b</a:t>
+            </a:r>
+            <a:pPr algn="l" indent="0" marL="0">
+              <a:lnSpc>
+                <a:spcPts val="1620"/>
+              </a:lnSpc>
+              <a:spcAft>
+                <a:spcPts val="300"/>
+              </a:spcAft>
+              <a:buNone/>
+            </a:pPr>
+            <a:r>
+              <a:rPr lang="en-US" sz="1200" dirty="0">
+                <a:solidFill>
+                  <a:srgbClr val="1C2833"/>
+                </a:solidFill>
+                <a:latin typeface="Arial" pitchFamily="34" charset="0"/>
+                <a:ea typeface="Arial" pitchFamily="34" charset="-122"/>
+                <a:cs typeface="Arial" pitchFamily="34" charset="-120"/>
+              </a:rPr>
+              <a:t> are the deficits.</a:t>
             </a:r>
             <a:endParaRPr lang="en-US" sz="1200" dirty="0"/>
           </a:p>
@@ -3824,8 +9998,8 @@
         </p:nvSpPr>
         <p:spPr>
           <a:xfrm>
-            <a:off x="406301" y="1160413"/>
-            <a:ext cx="8498026" cy="426541"/>
+            <a:off x="406301" y="1273373"/>
+            <a:ext cx="8498026" cy="222796"/>
           </a:xfrm>
           <a:prstGeom prst="rect">
             <a:avLst/>
@@ -3858,7 +10032,7 @@
                 <a:ea typeface="Arial" pitchFamily="34" charset="-122"/>
                 <a:cs typeface="Arial" pitchFamily="34" charset="-120"/>
               </a:rPr>
-              <a:t>&gt; "</a:t>
+              <a:t>For 97 × 96: </a:t>
             </a:r>
             <a:pPr algn="l" indent="0" marL="0">
               <a:lnSpc>
@@ -3873,15 +10047,15 @@
               <a:buNone/>
             </a:pPr>
             <a:r>
-              <a:rPr lang="en-US" sz="1200" i="1" dirty="0">
-                <a:solidFill>
-                  <a:srgbClr val="1C2833"/>
-                </a:solidFill>
-                <a:latin typeface="Arial" pitchFamily="34" charset="0"/>
-                <a:ea typeface="Arial" pitchFamily="34" charset="-122"/>
-                <a:cs typeface="Arial" pitchFamily="34" charset="-120"/>
-              </a:rPr>
-              <a:t>Nikhilam Navataścaramaṁ Daśataḥ</a:t>
+              <a:rPr lang="en-US" sz="1200" dirty="0">
+                <a:solidFill>
+                  <a:srgbClr val="1C2833"/>
+                </a:solidFill>
+                <a:latin typeface="Arial" pitchFamily="34" charset="0"/>
+                <a:ea typeface="Arial" pitchFamily="34" charset="-122"/>
+                <a:cs typeface="Arial" pitchFamily="34" charset="-120"/>
+              </a:rPr>
+              <a:t>B = 100</a:t>
             </a:r>
             <a:pPr algn="l" indent="0" marL="0">
               <a:lnSpc>
@@ -3904,7 +10078,7 @@
                 <a:ea typeface="Arial" pitchFamily="34" charset="-122"/>
                 <a:cs typeface="Arial" pitchFamily="34" charset="-120"/>
               </a:rPr>
-              <a:t>" — "all from 9 and the last from 10" — is the rule for computing the </a:t>
+              <a:t>, </a:t>
             </a:r>
             <a:pPr algn="l" indent="0" marL="0">
               <a:lnSpc>
@@ -3919,15 +10093,15 @@
               <a:buNone/>
             </a:pPr>
             <a:r>
-              <a:rPr lang="en-US" sz="1200" b="1" dirty="0">
-                <a:solidFill>
-                  <a:srgbClr val="1C2833"/>
-                </a:solidFill>
-                <a:latin typeface="Arial" pitchFamily="34" charset="0"/>
-                <a:ea typeface="Arial" pitchFamily="34" charset="-122"/>
-                <a:cs typeface="Arial" pitchFamily="34" charset="-120"/>
-              </a:rPr>
-              <a:t>deficit</a:t>
+              <a:rPr lang="en-US" sz="1200" dirty="0">
+                <a:solidFill>
+                  <a:srgbClr val="1C2833"/>
+                </a:solidFill>
+                <a:latin typeface="Arial" pitchFamily="34" charset="0"/>
+                <a:ea typeface="Arial" pitchFamily="34" charset="-122"/>
+                <a:cs typeface="Arial" pitchFamily="34" charset="-120"/>
+              </a:rPr>
+              <a:t>a = 3</a:t>
             </a:r>
             <a:pPr algn="l" indent="0" marL="0">
               <a:lnSpc>
@@ -3950,7 +10124,7 @@
                 <a:ea typeface="Arial" pitchFamily="34" charset="-122"/>
                 <a:cs typeface="Arial" pitchFamily="34" charset="-120"/>
               </a:rPr>
-              <a:t> quickly (which we drilled on Day 2). The </a:t>
+              <a:t>, </a:t>
             </a:r>
             <a:pPr algn="l" indent="0" marL="0">
               <a:lnSpc>
@@ -3965,15 +10139,15 @@
               <a:buNone/>
             </a:pPr>
             <a:r>
-              <a:rPr lang="en-US" sz="1200" i="1" dirty="0">
-                <a:solidFill>
-                  <a:srgbClr val="1C2833"/>
-                </a:solidFill>
-                <a:latin typeface="Arial" pitchFamily="34" charset="0"/>
-                <a:ea typeface="Arial" pitchFamily="34" charset="-122"/>
-                <a:cs typeface="Arial" pitchFamily="34" charset="-120"/>
-              </a:rPr>
-              <a:t>multiplication</a:t>
+              <a:rPr lang="en-US" sz="1200" dirty="0">
+                <a:solidFill>
+                  <a:srgbClr val="1C2833"/>
+                </a:solidFill>
+                <a:latin typeface="Arial" pitchFamily="34" charset="0"/>
+                <a:ea typeface="Arial" pitchFamily="34" charset="-122"/>
+                <a:cs typeface="Arial" pitchFamily="34" charset="-120"/>
+              </a:rPr>
+              <a:t>b = 4</a:t>
             </a:r>
             <a:pPr algn="l" indent="0" marL="0">
               <a:lnSpc>
@@ -3996,7 +10170,99 @@
                 <a:ea typeface="Arial" pitchFamily="34" charset="-122"/>
                 <a:cs typeface="Arial" pitchFamily="34" charset="-120"/>
               </a:rPr>
-              <a:t> technique uses that deficit via the algebra above.</a:t>
+              <a:t>. Then 97 = </a:t>
+            </a:r>
+            <a:pPr algn="l" indent="0" marL="0">
+              <a:lnSpc>
+                <a:spcPts val="1680"/>
+              </a:lnSpc>
+              <a:spcBef>
+                <a:spcPts val="300"/>
+              </a:spcBef>
+              <a:spcAft>
+                <a:spcPts val="300"/>
+              </a:spcAft>
+              <a:buNone/>
+            </a:pPr>
+            <a:r>
+              <a:rPr lang="en-US" sz="1200" dirty="0">
+                <a:solidFill>
+                  <a:srgbClr val="1C2833"/>
+                </a:solidFill>
+                <a:latin typeface="Arial" pitchFamily="34" charset="0"/>
+                <a:ea typeface="Arial" pitchFamily="34" charset="-122"/>
+                <a:cs typeface="Arial" pitchFamily="34" charset="-120"/>
+              </a:rPr>
+              <a:t>B − a</a:t>
+            </a:r>
+            <a:pPr algn="l" indent="0" marL="0">
+              <a:lnSpc>
+                <a:spcPts val="1680"/>
+              </a:lnSpc>
+              <a:spcBef>
+                <a:spcPts val="300"/>
+              </a:spcBef>
+              <a:spcAft>
+                <a:spcPts val="300"/>
+              </a:spcAft>
+              <a:buNone/>
+            </a:pPr>
+            <a:r>
+              <a:rPr lang="en-US" sz="1200" dirty="0">
+                <a:solidFill>
+                  <a:srgbClr val="1C2833"/>
+                </a:solidFill>
+                <a:latin typeface="Arial" pitchFamily="34" charset="0"/>
+                <a:ea typeface="Arial" pitchFamily="34" charset="-122"/>
+                <a:cs typeface="Arial" pitchFamily="34" charset="-120"/>
+              </a:rPr>
+              <a:t> and 96 = </a:t>
+            </a:r>
+            <a:pPr algn="l" indent="0" marL="0">
+              <a:lnSpc>
+                <a:spcPts val="1680"/>
+              </a:lnSpc>
+              <a:spcBef>
+                <a:spcPts val="300"/>
+              </a:spcBef>
+              <a:spcAft>
+                <a:spcPts val="300"/>
+              </a:spcAft>
+              <a:buNone/>
+            </a:pPr>
+            <a:r>
+              <a:rPr lang="en-US" sz="1200" dirty="0">
+                <a:solidFill>
+                  <a:srgbClr val="1C2833"/>
+                </a:solidFill>
+                <a:latin typeface="Arial" pitchFamily="34" charset="0"/>
+                <a:ea typeface="Arial" pitchFamily="34" charset="-122"/>
+                <a:cs typeface="Arial" pitchFamily="34" charset="-120"/>
+              </a:rPr>
+              <a:t>B − b</a:t>
+            </a:r>
+            <a:pPr algn="l" indent="0" marL="0">
+              <a:lnSpc>
+                <a:spcPts val="1680"/>
+              </a:lnSpc>
+              <a:spcBef>
+                <a:spcPts val="300"/>
+              </a:spcBef>
+              <a:spcAft>
+                <a:spcPts val="300"/>
+              </a:spcAft>
+              <a:buNone/>
+            </a:pPr>
+            <a:r>
+              <a:rPr lang="en-US" sz="1200" dirty="0">
+                <a:solidFill>
+                  <a:srgbClr val="1C2833"/>
+                </a:solidFill>
+                <a:latin typeface="Arial" pitchFamily="34" charset="0"/>
+                <a:ea typeface="Arial" pitchFamily="34" charset="-122"/>
+                <a:cs typeface="Arial" pitchFamily="34" charset="-120"/>
+              </a:rPr>
+              <a:t>.</a:t>
             </a:r>
             <a:endParaRPr lang="en-US" sz="1200" dirty="0"/>
           </a:p>
@@ -4010,8 +10276,8 @@
         </p:nvSpPr>
         <p:spPr>
           <a:xfrm>
-            <a:off x="406301" y="1663154"/>
-            <a:ext cx="8498026" cy="213271"/>
+            <a:off x="634901" y="1585020"/>
+            <a:ext cx="8102798" cy="281880"/>
           </a:xfrm>
           <a:prstGeom prst="rect">
             <a:avLst/>
@@ -4023,51 +10289,26 @@
           <a:bodyPr wrap="square" lIns="0" tIns="0" rIns="0" bIns="0" rtlCol="0" anchor="t"/>
           <a:lstStyle/>
           <a:p>
-            <a:pPr algn="l" indent="0" marL="0">
-              <a:lnSpc>
-                <a:spcPts val="1680"/>
-              </a:lnSpc>
-              <a:spcBef>
-                <a:spcPts val="300"/>
-              </a:spcBef>
-              <a:spcAft>
-                <a:spcPts val="300"/>
-              </a:spcAft>
-              <a:buNone/>
-            </a:pPr>
-            <a:r>
-              <a:rPr lang="en-US" sz="1200" dirty="0">
-                <a:solidFill>
-                  <a:srgbClr val="1C2833"/>
-                </a:solidFill>
-                <a:latin typeface="Arial" pitchFamily="34" charset="0"/>
-                <a:ea typeface="Arial" pitchFamily="34" charset="-122"/>
-                <a:cs typeface="Arial" pitchFamily="34" charset="-120"/>
-              </a:rPr>
-              <a:t>– Preview Day 8: </a:t>
-            </a:r>
-            <a:pPr algn="l" indent="0" marL="0">
-              <a:lnSpc>
-                <a:spcPts val="1680"/>
-              </a:lnSpc>
-              <a:spcBef>
-                <a:spcPts val="300"/>
-              </a:spcBef>
-              <a:spcAft>
-                <a:spcPts val="300"/>
-              </a:spcAft>
-              <a:buNone/>
-            </a:pPr>
-            <a:r>
-              <a:rPr lang="en-US" sz="1200" i="1" dirty="0">
-                <a:solidFill>
-                  <a:srgbClr val="1C2833"/>
-                </a:solidFill>
-                <a:latin typeface="Arial" pitchFamily="34" charset="0"/>
-                <a:ea typeface="Arial" pitchFamily="34" charset="-122"/>
-                <a:cs typeface="Arial" pitchFamily="34" charset="-120"/>
-              </a:rPr>
-              <a:t>"Tomorrow — when is this method actually faster? And when should you use long multiplication?"</a:t>
+            <a:pPr algn="l" marL="342900" indent="-342900">
+              <a:lnSpc>
+                <a:spcPts val="1620"/>
+              </a:lnSpc>
+              <a:spcAft>
+                <a:spcPts val="300"/>
+              </a:spcAft>
+              <a:buSzPct val="100000"/>
+              <a:buChar char="•"/>
+            </a:pPr>
+            <a:r>
+              <a:rPr lang="en-US" sz="1200" b="1" dirty="0">
+                <a:solidFill>
+                  <a:srgbClr val="1C2833"/>
+                </a:solidFill>
+                <a:latin typeface="Arial" pitchFamily="34" charset="0"/>
+                <a:ea typeface="Arial" pitchFamily="34" charset="-122"/>
+                <a:cs typeface="Arial" pitchFamily="34" charset="-120"/>
+              </a:rPr>
+              <a:t>Multiply directly:</a:t>
             </a:r>
             <a:endParaRPr lang="en-US" sz="1200" dirty="0"/>
           </a:p>
@@ -4225,7 +10466,7 @@
                 <a:ea typeface="Georgia" pitchFamily="34" charset="-122"/>
                 <a:cs typeface="Georgia" pitchFamily="34" charset="-120"/>
               </a:rPr>
-              <a:t>Homework</a:t>
+              <a:t>Core (20 min) — The algebraic proof (cont.)</a:t>
             </a:r>
             <a:endParaRPr lang="en-US" sz="1800" dirty="0"/>
           </a:p>
@@ -4239,8 +10480,61 @@
         </p:nvSpPr>
         <p:spPr>
           <a:xfrm>
-            <a:off x="406301" y="870942"/>
-            <a:ext cx="8498026" cy="639812"/>
+            <a:off x="406301" y="883593"/>
+            <a:ext cx="8331398" cy="952202"/>
+          </a:xfrm>
+          <a:prstGeom prst="rect">
+            <a:avLst/>
+          </a:prstGeom>
+          <a:solidFill>
+            <a:srgbClr val="F4F8F9"/>
+          </a:solidFill>
+          <a:ln/>
+        </p:spPr>
+        <p:txBody>
+          <a:bodyPr wrap="square" rtlCol="0" anchor="ctr"/>
+          <a:lstStyle/>
+          <a:p>
+            <a:pPr indent="0" marL="0">
+              <a:buNone/>
+            </a:pPr>
+            <a:endParaRPr lang="en-US" dirty="0"/>
+          </a:p>
+        </p:txBody>
+      </p:sp>
+      <p:sp>
+        <p:nvSpPr>
+          <p:cNvPr id="5" name="Shape 3"/>
+          <p:cNvSpPr/>
+          <p:nvPr/>
+        </p:nvSpPr>
+        <p:spPr>
+          <a:xfrm>
+            <a:off x="430113" y="883593"/>
+            <a:ext cx="0" cy="952202"/>
+          </a:xfrm>
+          <a:prstGeom prst="line">
+            <a:avLst/>
+          </a:prstGeom>
+          <a:noFill/>
+          <a:ln w="47625">
+            <a:solidFill>
+              <a:srgbClr val="277884"/>
+            </a:solidFill>
+            <a:prstDash val="solid"/>
+          </a:ln>
+        </p:spPr>
+      </p:sp>
+      <p:sp>
+        <p:nvSpPr>
+          <p:cNvPr id="6" name="Text 4"/>
+          <p:cNvSpPr/>
+          <p:nvPr/>
+        </p:nvSpPr>
+        <p:spPr>
+          <a:xfrm>
+            <a:off x="631627" y="1010543"/>
+            <a:ext cx="8086939" cy="174575"/>
           </a:xfrm>
           <a:prstGeom prst="rect">
             <a:avLst/>
@@ -4254,6 +10548,174 @@
           <a:p>
             <a:pPr algn="l" indent="0" marL="0">
               <a:lnSpc>
+                <a:spcPts val="1375"/>
+              </a:lnSpc>
+              <a:buNone/>
+            </a:pPr>
+            <a:r>
+              <a:rPr lang="en-US" sz="1100" dirty="0">
+                <a:solidFill>
+                  <a:srgbClr val="1C2833"/>
+                </a:solidFill>
+                <a:latin typeface="Courier New" pitchFamily="34" charset="0"/>
+                <a:ea typeface="Courier New" pitchFamily="34" charset="-122"/>
+                <a:cs typeface="Courier New" pitchFamily="34" charset="-120"/>
+              </a:rPr>
+              <a:t>(B − a)(B − b) = B² − Ba − Bb + ab</a:t>
+            </a:r>
+            <a:endParaRPr lang="en-US" sz="1100" dirty="0"/>
+          </a:p>
+        </p:txBody>
+      </p:sp>
+      <p:sp>
+        <p:nvSpPr>
+          <p:cNvPr id="7" name="Text 5"/>
+          <p:cNvSpPr/>
+          <p:nvPr/>
+        </p:nvSpPr>
+        <p:spPr>
+          <a:xfrm>
+            <a:off x="631627" y="1185118"/>
+            <a:ext cx="8086939" cy="174575"/>
+          </a:xfrm>
+          <a:prstGeom prst="rect">
+            <a:avLst/>
+          </a:prstGeom>
+          <a:noFill/>
+          <a:ln/>
+        </p:spPr>
+        <p:txBody>
+          <a:bodyPr wrap="square" lIns="0" tIns="0" rIns="0" bIns="0" rtlCol="0" anchor="t"/>
+          <a:lstStyle/>
+          <a:p>
+            <a:pPr algn="l" indent="0" marL="0">
+              <a:lnSpc>
+                <a:spcPts val="1375"/>
+              </a:lnSpc>
+              <a:buNone/>
+            </a:pPr>
+            <a:r>
+              <a:rPr lang="en-US" sz="1100" dirty="0">
+                <a:solidFill>
+                  <a:srgbClr val="1C2833"/>
+                </a:solidFill>
+                <a:latin typeface="Courier New" pitchFamily="34" charset="0"/>
+                <a:ea typeface="Courier New" pitchFamily="34" charset="-122"/>
+                <a:cs typeface="Courier New" pitchFamily="34" charset="-120"/>
+              </a:rPr>
+              <a:t>= B² − B(a + b) + ab</a:t>
+            </a:r>
+            <a:endParaRPr lang="en-US" sz="1100" dirty="0"/>
+          </a:p>
+        </p:txBody>
+      </p:sp>
+      <p:sp>
+        <p:nvSpPr>
+          <p:cNvPr id="8" name="Text 6"/>
+          <p:cNvSpPr/>
+          <p:nvPr/>
+        </p:nvSpPr>
+        <p:spPr>
+          <a:xfrm>
+            <a:off x="631627" y="1359694"/>
+            <a:ext cx="8086939" cy="174575"/>
+          </a:xfrm>
+          <a:prstGeom prst="rect">
+            <a:avLst/>
+          </a:prstGeom>
+          <a:noFill/>
+          <a:ln/>
+        </p:spPr>
+        <p:txBody>
+          <a:bodyPr wrap="square" lIns="0" tIns="0" rIns="0" bIns="0" rtlCol="0" anchor="t"/>
+          <a:lstStyle/>
+          <a:p>
+            <a:pPr algn="l" indent="0" marL="0">
+              <a:lnSpc>
+                <a:spcPts val="1375"/>
+              </a:lnSpc>
+              <a:buNone/>
+            </a:pPr>
+            <a:r>
+              <a:rPr lang="en-US" sz="1100" dirty="0">
+                <a:solidFill>
+                  <a:srgbClr val="1C2833"/>
+                </a:solidFill>
+                <a:latin typeface="Courier New" pitchFamily="34" charset="0"/>
+                <a:ea typeface="Courier New" pitchFamily="34" charset="-122"/>
+                <a:cs typeface="Courier New" pitchFamily="34" charset="-120"/>
+              </a:rPr>
+              <a:t>= B(B − a − b) + ab</a:t>
+            </a:r>
+            <a:endParaRPr lang="en-US" sz="1100" dirty="0"/>
+          </a:p>
+        </p:txBody>
+      </p:sp>
+      <p:sp>
+        <p:nvSpPr>
+          <p:cNvPr id="9" name="Text 7"/>
+          <p:cNvSpPr/>
+          <p:nvPr/>
+        </p:nvSpPr>
+        <p:spPr>
+          <a:xfrm>
+            <a:off x="631627" y="1534269"/>
+            <a:ext cx="8086939" cy="174575"/>
+          </a:xfrm>
+          <a:prstGeom prst="rect">
+            <a:avLst/>
+          </a:prstGeom>
+          <a:noFill/>
+          <a:ln/>
+        </p:spPr>
+        <p:txBody>
+          <a:bodyPr wrap="square" lIns="0" tIns="0" rIns="0" bIns="0" rtlCol="0" anchor="t"/>
+          <a:lstStyle/>
+          <a:p>
+            <a:pPr algn="l" indent="0" marL="0">
+              <a:lnSpc>
+                <a:spcPts val="1375"/>
+              </a:lnSpc>
+              <a:buNone/>
+            </a:pPr>
+            <a:r>
+              <a:rPr lang="en-US" sz="1100" dirty="0">
+                <a:solidFill>
+                  <a:srgbClr val="1C2833"/>
+                </a:solidFill>
+                <a:latin typeface="Courier New" pitchFamily="34" charset="0"/>
+                <a:ea typeface="Courier New" pitchFamily="34" charset="-122"/>
+                <a:cs typeface="Courier New" pitchFamily="34" charset="-120"/>
+              </a:rPr>
+              <a:t>= B · LEFT + RIGHT</a:t>
+            </a:r>
+            <a:endParaRPr lang="en-US" sz="1100" dirty="0"/>
+          </a:p>
+        </p:txBody>
+      </p:sp>
+      <p:sp>
+        <p:nvSpPr>
+          <p:cNvPr id="10" name="Text 8"/>
+          <p:cNvSpPr/>
+          <p:nvPr/>
+        </p:nvSpPr>
+        <p:spPr>
+          <a:xfrm>
+            <a:off x="406301" y="1924645"/>
+            <a:ext cx="8498026" cy="222796"/>
+          </a:xfrm>
+          <a:prstGeom prst="rect">
+            <a:avLst/>
+          </a:prstGeom>
+          <a:noFill/>
+          <a:ln/>
+        </p:spPr>
+        <p:txBody>
+          <a:bodyPr wrap="square" lIns="0" tIns="0" rIns="0" bIns="0" rtlCol="0" anchor="t"/>
+          <a:lstStyle/>
+          <a:p>
+            <a:pPr algn="l" indent="0" marL="0">
+              <a:lnSpc>
                 <a:spcPts val="1680"/>
               </a:lnSpc>
               <a:spcBef>
@@ -4273,7 +10735,99 @@
                 <a:ea typeface="Arial" pitchFamily="34" charset="-122"/>
                 <a:cs typeface="Arial" pitchFamily="34" charset="-120"/>
               </a:rPr>
-              <a:t>– Write a 1-paragraph explanation suitable for a Grade 7 student (your own grade level). Include one worked example with the algebra shown. – Prove (B + x)(B − x) = B² − x² using the above identity. Find an example where this is faster than long multiplication. (Hint: 101 × 99.)</a:t>
+              <a:t>where </a:t>
+            </a:r>
+            <a:pPr algn="l" indent="0" marL="0">
+              <a:lnSpc>
+                <a:spcPts val="1680"/>
+              </a:lnSpc>
+              <a:spcBef>
+                <a:spcPts val="300"/>
+              </a:spcBef>
+              <a:spcAft>
+                <a:spcPts val="300"/>
+              </a:spcAft>
+              <a:buNone/>
+            </a:pPr>
+            <a:r>
+              <a:rPr lang="en-US" sz="1200" dirty="0">
+                <a:solidFill>
+                  <a:srgbClr val="1C2833"/>
+                </a:solidFill>
+                <a:latin typeface="Arial" pitchFamily="34" charset="0"/>
+                <a:ea typeface="Arial" pitchFamily="34" charset="-122"/>
+                <a:cs typeface="Arial" pitchFamily="34" charset="-120"/>
+              </a:rPr>
+              <a:t>LEFT = B − a − b</a:t>
+            </a:r>
+            <a:pPr algn="l" indent="0" marL="0">
+              <a:lnSpc>
+                <a:spcPts val="1680"/>
+              </a:lnSpc>
+              <a:spcBef>
+                <a:spcPts val="300"/>
+              </a:spcBef>
+              <a:spcAft>
+                <a:spcPts val="300"/>
+              </a:spcAft>
+              <a:buNone/>
+            </a:pPr>
+            <a:r>
+              <a:rPr lang="en-US" sz="1200" dirty="0">
+                <a:solidFill>
+                  <a:srgbClr val="1C2833"/>
+                </a:solidFill>
+                <a:latin typeface="Arial" pitchFamily="34" charset="0"/>
+                <a:ea typeface="Arial" pitchFamily="34" charset="-122"/>
+                <a:cs typeface="Arial" pitchFamily="34" charset="-120"/>
+              </a:rPr>
+              <a:t> and </a:t>
+            </a:r>
+            <a:pPr algn="l" indent="0" marL="0">
+              <a:lnSpc>
+                <a:spcPts val="1680"/>
+              </a:lnSpc>
+              <a:spcBef>
+                <a:spcPts val="300"/>
+              </a:spcBef>
+              <a:spcAft>
+                <a:spcPts val="300"/>
+              </a:spcAft>
+              <a:buNone/>
+            </a:pPr>
+            <a:r>
+              <a:rPr lang="en-US" sz="1200" dirty="0">
+                <a:solidFill>
+                  <a:srgbClr val="1C2833"/>
+                </a:solidFill>
+                <a:latin typeface="Arial" pitchFamily="34" charset="0"/>
+                <a:ea typeface="Arial" pitchFamily="34" charset="-122"/>
+                <a:cs typeface="Arial" pitchFamily="34" charset="-120"/>
+              </a:rPr>
+              <a:t>RIGHT = ab</a:t>
+            </a:r>
+            <a:pPr algn="l" indent="0" marL="0">
+              <a:lnSpc>
+                <a:spcPts val="1680"/>
+              </a:lnSpc>
+              <a:spcBef>
+                <a:spcPts val="300"/>
+              </a:spcBef>
+              <a:spcAft>
+                <a:spcPts val="300"/>
+              </a:spcAft>
+              <a:buNone/>
+            </a:pPr>
+            <a:r>
+              <a:rPr lang="en-US" sz="1200" dirty="0">
+                <a:solidFill>
+                  <a:srgbClr val="1C2833"/>
+                </a:solidFill>
+                <a:latin typeface="Arial" pitchFamily="34" charset="0"/>
+                <a:ea typeface="Arial" pitchFamily="34" charset="-122"/>
+                <a:cs typeface="Arial" pitchFamily="34" charset="-120"/>
+              </a:rPr>
+              <a:t>.</a:t>
             </a:r>
             <a:endParaRPr lang="en-US" sz="1200" dirty="0"/>
           </a:p>
@@ -4281,7 +10835,7 @@
       </p:sp>
       <p:sp>
         <p:nvSpPr>
-          <p:cNvPr id="5" name="Text 3"/>
+          <p:cNvPr id="11" name="Text 9"/>
           <p:cNvSpPr/>
           <p:nvPr/>
         </p:nvSpPr>
@@ -4431,7 +10985,7 @@
                 <a:ea typeface="Georgia" pitchFamily="34" charset="-122"/>
                 <a:cs typeface="Georgia" pitchFamily="34" charset="-120"/>
               </a:rPr>
-              <a:t>Differentiation</a:t>
+              <a:t>Core (20 min) — The algebraic proof (cont.)</a:t>
             </a:r>
             <a:endParaRPr lang="en-US" sz="1800" dirty="0"/>
           </a:p>
@@ -4446,7 +11000,7 @@
         <p:spPr>
           <a:xfrm>
             <a:off x="634901" y="883593"/>
-            <a:ext cx="8102798" cy="956072"/>
+            <a:ext cx="8102798" cy="281880"/>
           </a:xfrm>
           <a:prstGeom prst="rect">
             <a:avLst/>
@@ -4477,72 +11031,40 @@
                 <a:ea typeface="Arial" pitchFamily="34" charset="-122"/>
                 <a:cs typeface="Arial" pitchFamily="34" charset="-120"/>
               </a:rPr>
-              <a:t>Tier up:</a:t>
-            </a:r>
-            <a:pPr algn="l" indent="0" marL="0">
-              <a:lnSpc>
-                <a:spcPts val="1620"/>
-              </a:lnSpc>
-              <a:spcAft>
-                <a:spcPts val="300"/>
-              </a:spcAft>
-              <a:buNone/>
-            </a:pPr>
-            <a:r>
-              <a:rPr lang="en-US" sz="1200" dirty="0">
-                <a:solidFill>
-                  <a:srgbClr val="1C2833"/>
-                </a:solidFill>
-                <a:latin typeface="Arial" pitchFamily="34" charset="0"/>
-                <a:ea typeface="Arial" pitchFamily="34" charset="-122"/>
-                <a:cs typeface="Arial" pitchFamily="34" charset="-120"/>
-              </a:rPr>
-              <a:t> Generalise. For three factors </a:t>
-            </a:r>
-            <a:pPr algn="l" indent="0" marL="0">
-              <a:lnSpc>
-                <a:spcPts val="1620"/>
-              </a:lnSpc>
-              <a:spcAft>
-                <a:spcPts val="300"/>
-              </a:spcAft>
-              <a:buNone/>
-            </a:pPr>
-            <a:r>
-              <a:rPr lang="en-US" sz="1200" dirty="0">
-                <a:solidFill>
-                  <a:srgbClr val="1C2833"/>
-                </a:solidFill>
-                <a:latin typeface="Arial" pitchFamily="34" charset="0"/>
-                <a:ea typeface="Arial" pitchFamily="34" charset="-122"/>
-                <a:cs typeface="Arial" pitchFamily="34" charset="-120"/>
-              </a:rPr>
-              <a:t>(B − a)(B − b)(B − c)</a:t>
-            </a:r>
-            <a:pPr algn="l" indent="0" marL="0">
-              <a:lnSpc>
-                <a:spcPts val="1620"/>
-              </a:lnSpc>
-              <a:spcAft>
-                <a:spcPts val="300"/>
-              </a:spcAft>
-              <a:buNone/>
-            </a:pPr>
-            <a:r>
-              <a:rPr lang="en-US" sz="1200" dirty="0">
-                <a:solidFill>
-                  <a:srgbClr val="1C2833"/>
-                </a:solidFill>
-                <a:latin typeface="Arial" pitchFamily="34" charset="0"/>
-                <a:ea typeface="Arial" pitchFamily="34" charset="-122"/>
-                <a:cs typeface="Arial" pitchFamily="34" charset="-120"/>
-              </a:rPr>
-              <a:t>, expand. Does the Nikhilam pattern extend? (Yes — for three factors near a base, see </a:t>
-            </a:r>
-            <a:pPr algn="l" indent="0" marL="0">
-              <a:lnSpc>
-                <a:spcPts val="1620"/>
-              </a:lnSpc>
+              <a:t>Match this to the Nikhilam procedure.</a:t>
+            </a:r>
+            <a:endParaRPr lang="en-US" sz="1200" dirty="0"/>
+          </a:p>
+        </p:txBody>
+      </p:sp>
+      <p:sp>
+        <p:nvSpPr>
+          <p:cNvPr id="5" name="Text 3"/>
+          <p:cNvSpPr/>
+          <p:nvPr/>
+        </p:nvSpPr>
+        <p:spPr>
+          <a:xfrm>
+            <a:off x="406301" y="1254323"/>
+            <a:ext cx="8498026" cy="213271"/>
+          </a:xfrm>
+          <a:prstGeom prst="rect">
+            <a:avLst/>
+          </a:prstGeom>
+          <a:noFill/>
+          <a:ln/>
+        </p:spPr>
+        <p:txBody>
+          <a:bodyPr wrap="square" lIns="0" tIns="0" rIns="0" bIns="0" rtlCol="0" anchor="t"/>
+          <a:lstStyle/>
+          <a:p>
+            <a:pPr algn="l" indent="0" marL="0">
+              <a:lnSpc>
+                <a:spcPts val="1680"/>
+              </a:lnSpc>
+              <a:spcBef>
+                <a:spcPts val="300"/>
+              </a:spcBef>
               <a:spcAft>
                 <a:spcPts val="300"/>
               </a:spcAft>
@@ -4557,30 +11079,32 @@
                 <a:ea typeface="Arial" pitchFamily="34" charset="-122"/>
                 <a:cs typeface="Arial" pitchFamily="34" charset="-120"/>
               </a:rPr>
-              <a:t>Vedic Mathematics Batch1.pdf</a:t>
-            </a:r>
-            <a:pPr algn="l" indent="0" marL="0">
-              <a:lnSpc>
-                <a:spcPts val="1620"/>
-              </a:lnSpc>
-              <a:spcAft>
-                <a:spcPts val="300"/>
-              </a:spcAft>
-              <a:buNone/>
-            </a:pPr>
-            <a:r>
-              <a:rPr lang="en-US" sz="1200" dirty="0">
-                <a:solidFill>
-                  <a:srgbClr val="1C2833"/>
-                </a:solidFill>
-                <a:latin typeface="Arial" pitchFamily="34" charset="0"/>
-                <a:ea typeface="Arial" pitchFamily="34" charset="-122"/>
-                <a:cs typeface="Arial" pitchFamily="34" charset="-120"/>
-              </a:rPr>
-              <a:t> extension section.)</a:t>
+              <a:t>Each row: Algebra · Nikhilam step.</a:t>
             </a:r>
             <a:endParaRPr lang="en-US" sz="1200" dirty="0"/>
           </a:p>
+        </p:txBody>
+      </p:sp>
+      <p:sp>
+        <p:nvSpPr>
+          <p:cNvPr id="6" name="Text 4"/>
+          <p:cNvSpPr/>
+          <p:nvPr/>
+        </p:nvSpPr>
+        <p:spPr>
+          <a:xfrm>
+            <a:off x="634901" y="1556445"/>
+            <a:ext cx="8102798" cy="826591"/>
+          </a:xfrm>
+          <a:prstGeom prst="rect">
+            <a:avLst/>
+          </a:prstGeom>
+          <a:noFill/>
+          <a:ln/>
+        </p:spPr>
+        <p:txBody>
+          <a:bodyPr wrap="square" lIns="0" tIns="0" rIns="0" bIns="0" rtlCol="0" anchor="t"/>
+          <a:lstStyle/>
           <a:p>
             <a:pPr algn="l" marL="342900" indent="-342900">
               <a:lnSpc>
@@ -4601,7 +11125,7 @@
                 <a:ea typeface="Arial" pitchFamily="34" charset="-122"/>
                 <a:cs typeface="Arial" pitchFamily="34" charset="-120"/>
               </a:rPr>
-              <a:t>Tier down:</a:t>
+              <a:t>B − a − b</a:t>
             </a:r>
             <a:pPr algn="l" indent="0" marL="0">
               <a:lnSpc>
@@ -4621,15 +11145,143 @@
                 <a:ea typeface="Arial" pitchFamily="34" charset="-122"/>
                 <a:cs typeface="Arial" pitchFamily="34" charset="-120"/>
               </a:rPr>
-              <a:t> Skip the formal algebra. Verify the identity by plugging in numbers (B=100, a=3, b=4 → both sides give 9312).</a:t>
+              <a:t> — Cross-subtract: take one number minus the </a:t>
+            </a:r>
+            <a:pPr algn="l" indent="0" marL="0">
+              <a:lnSpc>
+                <a:spcPts val="1620"/>
+              </a:lnSpc>
+              <a:spcAft>
+                <a:spcPts val="300"/>
+              </a:spcAft>
+              <a:buNone/>
+            </a:pPr>
+            <a:r>
+              <a:rPr lang="en-US" sz="1200" i="1" dirty="0">
+                <a:solidFill>
+                  <a:srgbClr val="1C2833"/>
+                </a:solidFill>
+                <a:latin typeface="Arial" pitchFamily="34" charset="0"/>
+                <a:ea typeface="Arial" pitchFamily="34" charset="-122"/>
+                <a:cs typeface="Arial" pitchFamily="34" charset="-120"/>
+              </a:rPr>
+              <a:t>other's</a:t>
+            </a:r>
+            <a:pPr algn="l" indent="0" marL="0">
+              <a:lnSpc>
+                <a:spcPts val="1620"/>
+              </a:lnSpc>
+              <a:spcAft>
+                <a:spcPts val="300"/>
+              </a:spcAft>
+              <a:buNone/>
+            </a:pPr>
+            <a:r>
+              <a:rPr lang="en-US" sz="1200" dirty="0">
+                <a:solidFill>
+                  <a:srgbClr val="1C2833"/>
+                </a:solidFill>
+                <a:latin typeface="Arial" pitchFamily="34" charset="0"/>
+                <a:ea typeface="Arial" pitchFamily="34" charset="-122"/>
+                <a:cs typeface="Arial" pitchFamily="34" charset="-120"/>
+              </a:rPr>
+              <a:t> deficit</a:t>
             </a:r>
             <a:endParaRPr lang="en-US" sz="1200" dirty="0"/>
           </a:p>
-        </p:txBody>
-      </p:sp>
-      <p:sp>
-        <p:nvSpPr>
-          <p:cNvPr id="5" name="Text 3"/>
+          <a:p>
+            <a:pPr algn="l" marL="342900" indent="-342900">
+              <a:lnSpc>
+                <a:spcPts val="1620"/>
+              </a:lnSpc>
+              <a:spcAft>
+                <a:spcPts val="300"/>
+              </a:spcAft>
+              <a:buSzPct val="100000"/>
+              <a:buChar char="•"/>
+            </a:pPr>
+            <a:r>
+              <a:rPr lang="en-US" sz="1200" b="1" dirty="0">
+                <a:solidFill>
+                  <a:srgbClr val="1C2833"/>
+                </a:solidFill>
+                <a:latin typeface="Arial" pitchFamily="34" charset="0"/>
+                <a:ea typeface="Arial" pitchFamily="34" charset="-122"/>
+                <a:cs typeface="Arial" pitchFamily="34" charset="-120"/>
+              </a:rPr>
+              <a:t>ab</a:t>
+            </a:r>
+            <a:pPr algn="l" indent="0" marL="0">
+              <a:lnSpc>
+                <a:spcPts val="1620"/>
+              </a:lnSpc>
+              <a:spcAft>
+                <a:spcPts val="300"/>
+              </a:spcAft>
+              <a:buNone/>
+            </a:pPr>
+            <a:r>
+              <a:rPr lang="en-US" sz="1200" dirty="0">
+                <a:solidFill>
+                  <a:srgbClr val="1C2833"/>
+                </a:solidFill>
+                <a:latin typeface="Arial" pitchFamily="34" charset="0"/>
+                <a:ea typeface="Arial" pitchFamily="34" charset="-122"/>
+                <a:cs typeface="Arial" pitchFamily="34" charset="-120"/>
+              </a:rPr>
+              <a:t> — Multiply the deficits for the RIGHT part</a:t>
+            </a:r>
+            <a:endParaRPr lang="en-US" sz="1200" dirty="0"/>
+          </a:p>
+          <a:p>
+            <a:pPr algn="l" marL="342900" indent="-342900">
+              <a:lnSpc>
+                <a:spcPts val="1620"/>
+              </a:lnSpc>
+              <a:spcAft>
+                <a:spcPts val="300"/>
+              </a:spcAft>
+              <a:buSzPct val="100000"/>
+              <a:buChar char="•"/>
+            </a:pPr>
+            <a:r>
+              <a:rPr lang="en-US" sz="1200" b="1" dirty="0">
+                <a:solidFill>
+                  <a:srgbClr val="1C2833"/>
+                </a:solidFill>
+                <a:latin typeface="Arial" pitchFamily="34" charset="0"/>
+                <a:ea typeface="Arial" pitchFamily="34" charset="-122"/>
+                <a:cs typeface="Arial" pitchFamily="34" charset="-120"/>
+              </a:rPr>
+              <a:t>B · LEFT + RIGHT</a:t>
+            </a:r>
+            <a:pPr algn="l" indent="0" marL="0">
+              <a:lnSpc>
+                <a:spcPts val="1620"/>
+              </a:lnSpc>
+              <a:spcAft>
+                <a:spcPts val="300"/>
+              </a:spcAft>
+              <a:buNone/>
+            </a:pPr>
+            <a:r>
+              <a:rPr lang="en-US" sz="1200" dirty="0">
+                <a:solidFill>
+                  <a:srgbClr val="1C2833"/>
+                </a:solidFill>
+                <a:latin typeface="Arial" pitchFamily="34" charset="0"/>
+                <a:ea typeface="Arial" pitchFamily="34" charset="-122"/>
+                <a:cs typeface="Arial" pitchFamily="34" charset="-120"/>
+              </a:rPr>
+              <a:t> — Concatenate (with the right pad)</a:t>
+            </a:r>
+            <a:endParaRPr lang="en-US" sz="1200" dirty="0"/>
+          </a:p>
+        </p:txBody>
+      </p:sp>
+      <p:sp>
+        <p:nvSpPr>
+          <p:cNvPr id="7" name="Text 5"/>
           <p:cNvSpPr/>
           <p:nvPr/>
         </p:nvSpPr>
@@ -4779,7 +11431,7 @@
                 <a:ea typeface="Georgia" pitchFamily="34" charset="-122"/>
                 <a:cs typeface="Georgia" pitchFamily="34" charset="-120"/>
               </a:rPr>
-              <a:t>Teacher notes</a:t>
+              <a:t>Core (20 min) — The algebraic proof (cont.)</a:t>
             </a:r>
             <a:endParaRPr lang="en-US" sz="1800" dirty="0"/>
           </a:p>
@@ -4793,8 +11445,8 @@
         </p:nvSpPr>
         <p:spPr>
           <a:xfrm>
-            <a:off x="406301" y="870942"/>
-            <a:ext cx="8498026" cy="1492895"/>
+            <a:off x="634901" y="883593"/>
+            <a:ext cx="8102798" cy="300930"/>
           </a:xfrm>
           <a:prstGeom prst="rect">
             <a:avLst/>
@@ -4806,212 +11458,66 @@
           <a:bodyPr wrap="square" lIns="0" tIns="0" rIns="0" bIns="0" rtlCol="0" anchor="t"/>
           <a:lstStyle/>
           <a:p>
-            <a:pPr algn="l" indent="0" marL="0">
-              <a:lnSpc>
-                <a:spcPts val="1680"/>
-              </a:lnSpc>
-              <a:spcBef>
-                <a:spcPts val="300"/>
-              </a:spcBef>
-              <a:spcAft>
-                <a:spcPts val="300"/>
-              </a:spcAft>
-              <a:buNone/>
-            </a:pPr>
-            <a:r>
-              <a:rPr lang="en-US" sz="1200" dirty="0">
-                <a:solidFill>
-                  <a:srgbClr val="1C2833"/>
-                </a:solidFill>
-                <a:latin typeface="Arial" pitchFamily="34" charset="0"/>
-                <a:ea typeface="Arial" pitchFamily="34" charset="-122"/>
-                <a:cs typeface="Arial" pitchFamily="34" charset="-120"/>
-              </a:rPr>
-              <a:t>– The honest framing in one sentence: </a:t>
-            </a:r>
-            <a:pPr algn="l" indent="0" marL="0">
-              <a:lnSpc>
-                <a:spcPts val="1680"/>
-              </a:lnSpc>
-              <a:spcBef>
-                <a:spcPts val="300"/>
-              </a:spcBef>
-              <a:spcAft>
-                <a:spcPts val="300"/>
-              </a:spcAft>
-              <a:buNone/>
-            </a:pPr>
-            <a:r>
-              <a:rPr lang="en-US" sz="1200" i="1" dirty="0">
-                <a:solidFill>
-                  <a:srgbClr val="1C2833"/>
-                </a:solidFill>
-                <a:latin typeface="Arial" pitchFamily="34" charset="0"/>
-                <a:ea typeface="Arial" pitchFamily="34" charset="-122"/>
-                <a:cs typeface="Arial" pitchFamily="34" charset="-120"/>
-              </a:rPr>
-              <a:t>"The Sanskrit sūtra names the deficit-computation rule. The algebraic identity is what makes the multiplication trick work, and that identity is just standard FOIL / distributivity."</a:t>
-            </a:r>
-            <a:pPr algn="l" indent="0" marL="0">
-              <a:lnSpc>
-                <a:spcPts val="1680"/>
-              </a:lnSpc>
-              <a:spcBef>
-                <a:spcPts val="300"/>
-              </a:spcBef>
-              <a:spcAft>
-                <a:spcPts val="300"/>
-              </a:spcAft>
-              <a:buNone/>
-            </a:pPr>
-            <a:r>
-              <a:rPr lang="en-US" sz="1200" dirty="0">
-                <a:solidFill>
-                  <a:srgbClr val="1C2833"/>
-                </a:solidFill>
-                <a:latin typeface="Arial" pitchFamily="34" charset="0"/>
-                <a:ea typeface="Arial" pitchFamily="34" charset="-122"/>
-                <a:cs typeface="Arial" pitchFamily="34" charset="-120"/>
-              </a:rPr>
-              <a:t> – A few students will object: </a:t>
-            </a:r>
-            <a:pPr algn="l" indent="0" marL="0">
-              <a:lnSpc>
-                <a:spcPts val="1680"/>
-              </a:lnSpc>
-              <a:spcBef>
-                <a:spcPts val="300"/>
-              </a:spcBef>
-              <a:spcAft>
-                <a:spcPts val="300"/>
-              </a:spcAft>
-              <a:buNone/>
-            </a:pPr>
-            <a:r>
-              <a:rPr lang="en-US" sz="1200" i="1" dirty="0">
-                <a:solidFill>
-                  <a:srgbClr val="1C2833"/>
-                </a:solidFill>
-                <a:latin typeface="Arial" pitchFamily="34" charset="0"/>
-                <a:ea typeface="Arial" pitchFamily="34" charset="-122"/>
-                <a:cs typeface="Arial" pitchFamily="34" charset="-120"/>
-              </a:rPr>
-              <a:t>"If the algebra is just algebra, why call it Vedic?"</a:t>
-            </a:r>
-            <a:pPr algn="l" indent="0" marL="0">
-              <a:lnSpc>
-                <a:spcPts val="1680"/>
-              </a:lnSpc>
-              <a:spcBef>
-                <a:spcPts val="300"/>
-              </a:spcBef>
-              <a:spcAft>
-                <a:spcPts val="300"/>
-              </a:spcAft>
-              <a:buNone/>
-            </a:pPr>
-            <a:r>
-              <a:rPr lang="en-US" sz="1200" dirty="0">
-                <a:solidFill>
-                  <a:srgbClr val="1C2833"/>
-                </a:solidFill>
-                <a:latin typeface="Arial" pitchFamily="34" charset="0"/>
-                <a:ea typeface="Arial" pitchFamily="34" charset="-122"/>
-                <a:cs typeface="Arial" pitchFamily="34" charset="-120"/>
-              </a:rPr>
-              <a:t> Honest answer: </a:t>
-            </a:r>
-            <a:pPr algn="l" indent="0" marL="0">
-              <a:lnSpc>
-                <a:spcPts val="1680"/>
-              </a:lnSpc>
-              <a:spcBef>
-                <a:spcPts val="300"/>
-              </a:spcBef>
-              <a:spcAft>
-                <a:spcPts val="300"/>
-              </a:spcAft>
-              <a:buNone/>
-            </a:pPr>
-            <a:r>
-              <a:rPr lang="en-US" sz="1200" i="1" dirty="0">
-                <a:solidFill>
-                  <a:srgbClr val="1C2833"/>
-                </a:solidFill>
-                <a:latin typeface="Arial" pitchFamily="34" charset="0"/>
-                <a:ea typeface="Arial" pitchFamily="34" charset="-122"/>
-                <a:cs typeface="Arial" pitchFamily="34" charset="-120"/>
-              </a:rPr>
-              <a:t>"Good catch. The procedure has a Sanskrit name and was published in 1965 by Tirthaji. The math itself is older than any name — it's the distributive property. The Vedic-mathematics framing is contested among historians; we'll engage with that more at Senior band."</a:t>
-            </a:r>
-            <a:pPr algn="l" indent="0" marL="0">
-              <a:lnSpc>
-                <a:spcPts val="1680"/>
-              </a:lnSpc>
-              <a:spcBef>
-                <a:spcPts val="300"/>
-              </a:spcBef>
-              <a:spcAft>
-                <a:spcPts val="300"/>
-              </a:spcAft>
-              <a:buNone/>
-            </a:pPr>
-            <a:r>
-              <a:rPr lang="en-US" sz="1200" dirty="0">
-                <a:solidFill>
-                  <a:srgbClr val="1C2833"/>
-                </a:solidFill>
-                <a:latin typeface="Arial" pitchFamily="34" charset="0"/>
-                <a:ea typeface="Arial" pitchFamily="34" charset="-122"/>
-                <a:cs typeface="Arial" pitchFamily="34" charset="-120"/>
-              </a:rPr>
-              <a:t> – Reinforce: this is </a:t>
-            </a:r>
-            <a:pPr algn="l" indent="0" marL="0">
-              <a:lnSpc>
-                <a:spcPts val="1680"/>
-              </a:lnSpc>
-              <a:spcBef>
-                <a:spcPts val="300"/>
-              </a:spcBef>
-              <a:spcAft>
-                <a:spcPts val="300"/>
-              </a:spcAft>
-              <a:buNone/>
-            </a:pPr>
-            <a:r>
-              <a:rPr lang="en-US" sz="1200" i="1" dirty="0">
-                <a:solidFill>
-                  <a:srgbClr val="1C2833"/>
-                </a:solidFill>
-                <a:latin typeface="Arial" pitchFamily="34" charset="0"/>
-                <a:ea typeface="Arial" pitchFamily="34" charset="-122"/>
-                <a:cs typeface="Arial" pitchFamily="34" charset="-120"/>
-              </a:rPr>
-              <a:t>not</a:t>
-            </a:r>
-            <a:pPr algn="l" indent="0" marL="0">
-              <a:lnSpc>
-                <a:spcPts val="1680"/>
-              </a:lnSpc>
-              <a:spcBef>
-                <a:spcPts val="300"/>
-              </a:spcBef>
-              <a:spcAft>
-                <a:spcPts val="300"/>
-              </a:spcAft>
-              <a:buNone/>
-            </a:pPr>
-            <a:r>
-              <a:rPr lang="en-US" sz="1200" dirty="0">
-                <a:solidFill>
-                  <a:srgbClr val="1C2833"/>
-                </a:solidFill>
-                <a:latin typeface="Arial" pitchFamily="34" charset="0"/>
-                <a:ea typeface="Arial" pitchFamily="34" charset="-122"/>
-                <a:cs typeface="Arial" pitchFamily="34" charset="-120"/>
-              </a:rPr>
-              <a:t> a debunking. It's an honesty about what's old (algebra), what's modern (the packaging as 16 sūtras), and what's contested (the Vedic provenance).</a:t>
+            <a:pPr algn="l" marL="342900" indent="-342900">
+              <a:lnSpc>
+                <a:spcPts val="1620"/>
+              </a:lnSpc>
+              <a:spcAft>
+                <a:spcPts val="300"/>
+              </a:spcAft>
+              <a:buSzPct val="100000"/>
+              <a:buChar char="•"/>
+            </a:pPr>
+            <a:r>
+              <a:rPr lang="en-US" sz="1200" b="1" dirty="0">
+                <a:solidFill>
+                  <a:srgbClr val="1C2833"/>
+                </a:solidFill>
+                <a:latin typeface="Arial" pitchFamily="34" charset="0"/>
+                <a:ea typeface="Arial" pitchFamily="34" charset="-122"/>
+                <a:cs typeface="Arial" pitchFamily="34" charset="-120"/>
+              </a:rPr>
+              <a:t>Check: cross-subtract gives </a:t>
+            </a:r>
+            <a:pPr algn="l" indent="0" marL="0">
+              <a:lnSpc>
+                <a:spcPts val="1620"/>
+              </a:lnSpc>
+              <a:spcAft>
+                <a:spcPts val="300"/>
+              </a:spcAft>
+              <a:buNone/>
+            </a:pPr>
+            <a:r>
+              <a:rPr lang="en-US" sz="1200" b="1" dirty="0">
+                <a:solidFill>
+                  <a:srgbClr val="1C2833"/>
+                </a:solidFill>
+                <a:latin typeface="Arial" pitchFamily="34" charset="0"/>
+                <a:ea typeface="Arial" pitchFamily="34" charset="-122"/>
+                <a:cs typeface="Arial" pitchFamily="34" charset="-120"/>
+              </a:rPr>
+              <a:t>B − a − b</a:t>
+            </a:r>
+            <a:pPr algn="l" indent="0" marL="0">
+              <a:lnSpc>
+                <a:spcPts val="1620"/>
+              </a:lnSpc>
+              <a:spcAft>
+                <a:spcPts val="300"/>
+              </a:spcAft>
+              <a:buNone/>
+            </a:pPr>
+            <a:r>
+              <a:rPr lang="en-US" sz="1200" b="1" dirty="0">
+                <a:solidFill>
+                  <a:srgbClr val="1C2833"/>
+                </a:solidFill>
+                <a:latin typeface="Arial" pitchFamily="34" charset="0"/>
+                <a:ea typeface="Arial" pitchFamily="34" charset="-122"/>
+                <a:cs typeface="Arial" pitchFamily="34" charset="-120"/>
+              </a:rPr>
+              <a:t>.</a:t>
             </a:r>
             <a:endParaRPr lang="en-US" sz="1200" dirty="0"/>
           </a:p>
@@ -5020,6 +11526,116 @@
       <p:sp>
         <p:nvSpPr>
           <p:cNvPr id="5" name="Text 3"/>
+          <p:cNvSpPr/>
+          <p:nvPr/>
+        </p:nvSpPr>
+        <p:spPr>
+          <a:xfrm>
+            <a:off x="634901" y="1286024"/>
+            <a:ext cx="8102798" cy="563761"/>
+          </a:xfrm>
+          <a:prstGeom prst="rect">
+            <a:avLst/>
+          </a:prstGeom>
+          <a:noFill/>
+          <a:ln/>
+        </p:spPr>
+        <p:txBody>
+          <a:bodyPr wrap="square" lIns="0" tIns="0" rIns="0" bIns="0" rtlCol="0" anchor="t"/>
+          <a:lstStyle/>
+          <a:p>
+            <a:pPr algn="l" marL="342900" indent="-342900">
+              <a:lnSpc>
+                <a:spcPts val="1620"/>
+              </a:lnSpc>
+              <a:spcAft>
+                <a:spcPts val="300"/>
+              </a:spcAft>
+              <a:buSzPct val="100000"/>
+              <a:buChar char="•"/>
+            </a:pPr>
+            <a:r>
+              <a:rPr lang="en-US" sz="1200" dirty="0">
+                <a:solidFill>
+                  <a:srgbClr val="1C2833"/>
+                </a:solidFill>
+                <a:latin typeface="Arial" pitchFamily="34" charset="0"/>
+                <a:ea typeface="Arial" pitchFamily="34" charset="-122"/>
+                <a:cs typeface="Arial" pitchFamily="34" charset="-120"/>
+              </a:rPr>
+              <a:t>(B − a) − b = B − a − b</a:t>
+            </a:r>
+            <a:pPr algn="l" indent="0" marL="0">
+              <a:lnSpc>
+                <a:spcPts val="1620"/>
+              </a:lnSpc>
+              <a:spcAft>
+                <a:spcPts val="300"/>
+              </a:spcAft>
+              <a:buNone/>
+            </a:pPr>
+            <a:r>
+              <a:rPr lang="en-US" sz="1200" dirty="0">
+                <a:solidFill>
+                  <a:srgbClr val="1C2833"/>
+                </a:solidFill>
+                <a:latin typeface="Arial" pitchFamily="34" charset="0"/>
+                <a:ea typeface="Arial" pitchFamily="34" charset="-122"/>
+                <a:cs typeface="Arial" pitchFamily="34" charset="-120"/>
+              </a:rPr>
+              <a:t>. ✓ (97 − 4 = 93.)</a:t>
+            </a:r>
+            <a:endParaRPr lang="en-US" sz="1200" dirty="0"/>
+          </a:p>
+          <a:p>
+            <a:pPr algn="l" marL="342900" indent="-342900">
+              <a:lnSpc>
+                <a:spcPts val="1620"/>
+              </a:lnSpc>
+              <a:spcAft>
+                <a:spcPts val="300"/>
+              </a:spcAft>
+              <a:buSzPct val="100000"/>
+              <a:buChar char="•"/>
+            </a:pPr>
+            <a:r>
+              <a:rPr lang="en-US" sz="1200" dirty="0">
+                <a:solidFill>
+                  <a:srgbClr val="1C2833"/>
+                </a:solidFill>
+                <a:latin typeface="Arial" pitchFamily="34" charset="0"/>
+                <a:ea typeface="Arial" pitchFamily="34" charset="-122"/>
+                <a:cs typeface="Arial" pitchFamily="34" charset="-120"/>
+              </a:rPr>
+              <a:t>(B − b) − a = B − a − b</a:t>
+            </a:r>
+            <a:pPr algn="l" indent="0" marL="0">
+              <a:lnSpc>
+                <a:spcPts val="1620"/>
+              </a:lnSpc>
+              <a:spcAft>
+                <a:spcPts val="300"/>
+              </a:spcAft>
+              <a:buNone/>
+            </a:pPr>
+            <a:r>
+              <a:rPr lang="en-US" sz="1200" dirty="0">
+                <a:solidFill>
+                  <a:srgbClr val="1C2833"/>
+                </a:solidFill>
+                <a:latin typeface="Arial" pitchFamily="34" charset="0"/>
+                <a:ea typeface="Arial" pitchFamily="34" charset="-122"/>
+                <a:cs typeface="Arial" pitchFamily="34" charset="-120"/>
+              </a:rPr>
+              <a:t>. ✓ (Either cross gives the same.)</a:t>
+            </a:r>
+            <a:endParaRPr lang="en-US" sz="1200" dirty="0"/>
+          </a:p>
+        </p:txBody>
+      </p:sp>
+      <p:sp>
+        <p:nvSpPr>
+          <p:cNvPr id="6" name="Text 4"/>
           <p:cNvSpPr/>
           <p:nvPr/>
         </p:nvSpPr>
